--- a/DI/DI01/Presentacion_Pinguino_de_Humboldt.pptx
+++ b/DI/DI01/Presentacion_Pinguino_de_Humboldt.pptx
@@ -13,6 +13,7 @@
     <p:sldId id="261" r:id="rId8"/>
     <p:sldId id="262" r:id="rId9"/>
     <p:sldId id="263" r:id="rId10"/>
+    <p:sldId id="264" r:id="rId11"/>
   </p:sldIdLst>
   <p:sldSz cx="10080625" cy="5670550"/>
   <p:notesSz cx="7559675" cy="10691813"/>
@@ -70,7 +71,7 @@
         <p:txBody>
           <a:bodyPr/>
           <a:p>
-            <a:fld id="{742564C7-4A73-4254-8587-566B6F640667}" type="slidenum">
+            <a:fld id="{D8C3F2A1-1127-42F0-99CD-0B05AE54AC53}" type="slidenum">
               <a:t>&lt;#&gt;</a:t>
             </a:fld>
           </a:p>
@@ -237,7 +238,7 @@
         <p:txBody>
           <a:bodyPr/>
           <a:p>
-            <a:fld id="{73F99A6E-C427-42A6-A9B0-9C6563E0D94E}" type="slidenum">
+            <a:fld id="{C34299F6-443E-4E5F-837E-FA3E91269573}" type="slidenum">
               <a:t>&lt;#&gt;</a:t>
             </a:fld>
           </a:p>
@@ -916,7 +917,7 @@
             <a:pPr indent="0" algn="r">
               <a:buNone/>
             </a:pPr>
-            <a:fld id="{1F54DC68-037B-416D-8EBB-2C246D967F62}" type="slidenum">
+            <a:fld id="{7E40F8E3-7236-4680-95DA-F5399BFB3637}" type="slidenum">
               <a:rPr lang="en-US" sz="1400" b="0" u="none" strike="noStrike">
                 <a:solidFill>
                   <a:srgbClr val="000000"/>
@@ -1095,7 +1096,7 @@
         <p:spPr>
           <a:xfrm>
             <a:off x="0" y="0"/>
-            <a:ext cx="3744000" cy="5670000"/>
+            <a:ext cx="3888000" cy="5670000"/>
           </a:xfrm>
           <a:prstGeom prst="rect">
             <a:avLst/>
@@ -1131,8 +1132,8 @@
         </p:nvSpPr>
         <p:spPr>
           <a:xfrm>
-            <a:off x="3744000" y="0"/>
-            <a:ext cx="216000" cy="5670000"/>
+            <a:off x="3888000" y="0"/>
+            <a:ext cx="180000" cy="5670000"/>
           </a:xfrm>
           <a:prstGeom prst="rect">
             <a:avLst/>
@@ -1168,8 +1169,8 @@
         </p:nvSpPr>
         <p:spPr>
           <a:xfrm>
-            <a:off x="576000" y="648000"/>
-            <a:ext cx="2520000" cy="284040"/>
+            <a:off x="576000" y="576000"/>
+            <a:ext cx="2664000" cy="198000"/>
           </a:xfrm>
           <a:prstGeom prst="rect">
             <a:avLst/>
@@ -1193,7 +1194,7 @@
                 <a:uFillTx/>
                 <a:latin typeface="Arial"/>
               </a:rPr>
-              <a:t>ANALISIS DE DATOS PARA CONSERVACION</a:t>
+              <a:t>CASO DE ESTUDIO | ODS 14</a:t>
             </a:r>
             <a:endParaRPr lang="en-US" sz="1000" b="1" u="none" strike="noStrike">
               <a:solidFill>
@@ -1214,8 +1215,8 @@
         </p:nvSpPr>
         <p:spPr>
           <a:xfrm>
-            <a:off x="576000" y="1296000"/>
-            <a:ext cx="2592000" cy="1134000"/>
+            <a:off x="576000" y="1152000"/>
+            <a:ext cx="2736000" cy="1438920"/>
           </a:xfrm>
           <a:prstGeom prst="rect">
             <a:avLst/>
@@ -1231,7 +1232,7 @@
           </a:bodyPr>
           <a:p>
             <a:r>
-              <a:rPr lang="en-US" sz="2800" b="1" u="none" strike="noStrike">
+              <a:rPr lang="en-US" sz="2550" b="1" u="none" strike="noStrike">
                 <a:solidFill>
                   <a:srgbClr val="FFFFFF"/>
                 </a:solidFill>
@@ -1239,30 +1240,9 @@
                 <a:uFillTx/>
                 <a:latin typeface="Times New Roman"/>
               </a:rPr>
-              <a:t>Pingüino</a:t>
-            </a:r>
-            <a:endParaRPr lang="en-US" sz="2800" b="1" u="none" strike="noStrike">
-              <a:solidFill>
-                <a:srgbClr val="FFFFFF"/>
-              </a:solidFill>
-              <a:effectLst/>
-              <a:uFillTx/>
-              <a:latin typeface="Times New Roman"/>
-            </a:endParaRPr>
-          </a:p>
-          <a:p>
-            <a:r>
-              <a:rPr lang="en-US" sz="2800" b="1" u="none" strike="noStrike">
-                <a:solidFill>
-                  <a:srgbClr val="FFFFFF"/>
-                </a:solidFill>
-                <a:effectLst/>
-                <a:uFillTx/>
-                <a:latin typeface="Times New Roman"/>
-              </a:rPr>
-              <a:t>de Humboldt</a:t>
-            </a:r>
-            <a:endParaRPr lang="en-US" sz="2800" b="1" u="none" strike="noStrike">
+              <a:t>¿Qué nos dice un pingüino cuando el ecosistema costero entra en riesgo?</a:t>
+            </a:r>
+            <a:endParaRPr lang="en-US" sz="2550" b="1" u="none" strike="noStrike">
               <a:solidFill>
                 <a:srgbClr val="FFFFFF"/>
               </a:solidFill>
@@ -1281,8 +1261,8 @@
         </p:nvSpPr>
         <p:spPr>
           <a:xfrm>
-            <a:off x="576000" y="2952000"/>
-            <a:ext cx="2736000" cy="810000"/>
+            <a:off x="576000" y="2808000"/>
+            <a:ext cx="2808000" cy="999360"/>
           </a:xfrm>
           <a:prstGeom prst="rect">
             <a:avLst/>
@@ -1298,7 +1278,7 @@
           </a:bodyPr>
           <a:p>
             <a:r>
-              <a:rPr lang="en-US" sz="1550" b="0" u="none" strike="noStrike">
+              <a:rPr lang="en-US" sz="1400" b="0" u="none" strike="noStrike">
                 <a:solidFill>
                   <a:srgbClr val="DDE8E1"/>
                 </a:solidFill>
@@ -1306,9 +1286,9 @@
                 <a:uFillTx/>
                 <a:latin typeface="Arial"/>
               </a:rPr>
-              <a:t>Factores ambientales y humanos que explican su estado de conservación.</a:t>
-            </a:r>
-            <a:endParaRPr lang="en-US" sz="1550" b="0" u="none" strike="noStrike">
+              <a:t>Tesis: aplicar CRISP-DM permite traducir amenazas ecológicas y humanas en variables, indicadores y decisiones útiles para la conservación.</a:t>
+            </a:r>
+            <a:endParaRPr lang="en-US" sz="1400" b="0" u="none" strike="noStrike">
               <a:solidFill>
                 <a:srgbClr val="DDE8E1"/>
               </a:solidFill>
@@ -1327,8 +1307,8 @@
         </p:nvSpPr>
         <p:spPr>
           <a:xfrm>
-            <a:off x="576000" y="4248000"/>
-            <a:ext cx="2088000" cy="360000"/>
+            <a:off x="576000" y="4032000"/>
+            <a:ext cx="2808000" cy="576000"/>
           </a:xfrm>
           <a:prstGeom prst="rect">
             <a:avLst/>
@@ -1341,12 +1321,12 @@
           </a:ln>
         </p:spPr>
         <p:txBody>
-          <a:bodyPr lIns="108000" tIns="72000" rIns="108000" bIns="72000" anchor="ctr" anchorCtr="1">
-            <a:noAutofit/>
-          </a:bodyPr>
-          <a:p>
-            <a:r>
-              <a:rPr lang="en-US" sz="1000" b="1" u="none" strike="noStrike">
+          <a:bodyPr lIns="144000" tIns="90000" rIns="144000" bIns="72000" anchor="ctr" anchorCtr="1">
+            <a:noAutofit/>
+          </a:bodyPr>
+          <a:p>
+            <a:r>
+              <a:rPr lang="en-US" sz="1150" b="1" u="none" strike="noStrike">
                 <a:solidFill>
                   <a:srgbClr val="153329"/>
                 </a:solidFill>
@@ -1354,9 +1334,9 @@
                 <a:uFillTx/>
                 <a:latin typeface="Arial"/>
               </a:rPr>
-              <a:t>Especie marina vulnerable</a:t>
-            </a:r>
-            <a:endParaRPr lang="en-US" sz="1000" b="1" u="none" strike="noStrike">
+              <a:t>ONU / ODS 14:</a:t>
+            </a:r>
+            <a:endParaRPr lang="en-US" sz="1150" b="1" u="none" strike="noStrike">
               <a:solidFill>
                 <a:srgbClr val="153329"/>
               </a:solidFill>
@@ -1365,64 +1345,39 @@
               <a:latin typeface="Arial"/>
             </a:endParaRPr>
           </a:p>
+          <a:p>
+            <a:r>
+              <a:rPr lang="en-US" sz="1150" b="1" u="none" strike="noStrike">
+                <a:solidFill>
+                  <a:srgbClr val="153329"/>
+                </a:solidFill>
+                <a:effectLst/>
+                <a:uFillTx/>
+                <a:latin typeface="Arial"/>
+              </a:rPr>
+              <a:t>conservar y usar sosteniblemente los océanos y recursos marinos.</a:t>
+            </a:r>
+            <a:endParaRPr lang="en-US" sz="1150" b="1" u="none" strike="noStrike">
+              <a:solidFill>
+                <a:srgbClr val="153329"/>
+              </a:solidFill>
+              <a:effectLst/>
+              <a:uFillTx/>
+              <a:latin typeface="Arial"/>
+            </a:endParaRPr>
+          </a:p>
         </p:txBody>
       </p:sp>
       <p:sp>
         <p:nvSpPr>
           <p:cNvPr id="18" name=""/>
-          <p:cNvSpPr txBox="1"/>
-          <p:nvPr/>
-        </p:nvSpPr>
-        <p:spPr>
-          <a:xfrm>
-            <a:off x="576000" y="4788000"/>
-            <a:ext cx="2736000" cy="414000"/>
-          </a:xfrm>
-          <a:prstGeom prst="rect">
-            <a:avLst/>
-          </a:prstGeom>
-          <a:noFill/>
-          <a:ln w="0">
-            <a:noFill/>
-          </a:ln>
-        </p:spPr>
-        <p:txBody>
-          <a:bodyPr lIns="0" tIns="0" rIns="0" bIns="0" anchor="t">
-            <a:spAutoFit/>
-          </a:bodyPr>
-          <a:p>
-            <a:r>
-              <a:rPr lang="en-US" sz="1150" b="0" u="none" strike="noStrike">
-                <a:solidFill>
-                  <a:srgbClr val="FFFFFF"/>
-                </a:solidFill>
-                <a:effectLst/>
-                <a:uFillTx/>
-                <a:latin typeface="Arial"/>
-              </a:rPr>
-              <a:t>Indicador clave del estado del ecosistema costero de Chile y Perú.</a:t>
-            </a:r>
-            <a:endParaRPr lang="en-US" sz="1150" b="0" u="none" strike="noStrike">
-              <a:solidFill>
-                <a:srgbClr val="FFFFFF"/>
-              </a:solidFill>
-              <a:effectLst/>
-              <a:uFillTx/>
-              <a:latin typeface="Arial"/>
-            </a:endParaRPr>
-          </a:p>
-        </p:txBody>
-      </p:sp>
-      <p:sp>
-        <p:nvSpPr>
-          <p:cNvPr id="19" name=""/>
-          <p:cNvSpPr/>
-          <p:nvPr/>
-        </p:nvSpPr>
-        <p:spPr>
-          <a:xfrm>
-            <a:off x="4176000" y="792000"/>
-            <a:ext cx="5328000" cy="3456000"/>
+          <p:cNvSpPr/>
+          <p:nvPr/>
+        </p:nvSpPr>
+        <p:spPr>
+          <a:xfrm>
+            <a:off x="4248000" y="648000"/>
+            <a:ext cx="5256000" cy="3312000"/>
           </a:xfrm>
           <a:prstGeom prst="rect">
             <a:avLst/>
@@ -1452,7 +1407,7 @@
       </p:sp>
       <p:pic>
         <p:nvPicPr>
-          <p:cNvPr id="20" name=""/>
+          <p:cNvPr id="19" name=""/>
           <p:cNvPicPr/>
           <p:nvPr/>
         </p:nvPicPr>
@@ -1462,8 +1417,8 @@
         </p:blipFill>
         <p:spPr>
           <a:xfrm>
-            <a:off x="4248000" y="878400"/>
-            <a:ext cx="5184000" cy="3283200"/>
+            <a:off x="4375080" y="720000"/>
+            <a:ext cx="5001840" cy="3168000"/>
           </a:xfrm>
           <a:prstGeom prst="rect">
             <a:avLst/>
@@ -1476,44 +1431,90 @@
       </p:pic>
       <p:sp>
         <p:nvSpPr>
+          <p:cNvPr id="20" name=""/>
+          <p:cNvSpPr/>
+          <p:nvPr/>
+        </p:nvSpPr>
+        <p:spPr>
+          <a:xfrm>
+            <a:off x="4248000" y="4176000"/>
+            <a:ext cx="5256000" cy="576000"/>
+          </a:xfrm>
+          <a:prstGeom prst="rect">
+            <a:avLst/>
+          </a:prstGeom>
+          <a:solidFill>
+            <a:srgbClr val="FFFFFF"/>
+          </a:solidFill>
+          <a:ln w="0">
+            <a:noFill/>
+          </a:ln>
+        </p:spPr>
+        <p:txBody>
+          <a:bodyPr lIns="144000" tIns="90000" rIns="144000" bIns="72000" anchor="ctr" anchorCtr="1">
+            <a:noAutofit/>
+          </a:bodyPr>
+          <a:p>
+            <a:r>
+              <a:rPr lang="en-US" sz="1200" b="1" u="none" strike="noStrike">
+                <a:solidFill>
+                  <a:srgbClr val="233033"/>
+                </a:solidFill>
+                <a:effectLst/>
+                <a:uFillTx/>
+                <a:latin typeface="Arial"/>
+              </a:rPr>
+              <a:t>Dato de contexto oficial: en Chile, el 20º proceso RCE propuso elevar la especie a En Peligro (MMA, 2025-2026).</a:t>
+            </a:r>
+            <a:endParaRPr lang="en-US" sz="1200" b="1" u="none" strike="noStrike">
+              <a:solidFill>
+                <a:srgbClr val="233033"/>
+              </a:solidFill>
+              <a:effectLst/>
+              <a:uFillTx/>
+              <a:latin typeface="Arial"/>
+            </a:endParaRPr>
+          </a:p>
+        </p:txBody>
+      </p:sp>
+      <p:sp>
+        <p:nvSpPr>
           <p:cNvPr id="21" name=""/>
-          <p:cNvSpPr/>
-          <p:nvPr/>
-        </p:nvSpPr>
-        <p:spPr>
-          <a:xfrm>
-            <a:off x="4176000" y="4464000"/>
-            <a:ext cx="5328000" cy="432000"/>
-          </a:xfrm>
-          <a:prstGeom prst="rect">
-            <a:avLst/>
-          </a:prstGeom>
-          <a:solidFill>
-            <a:srgbClr val="FFFFFF"/>
-          </a:solidFill>
-          <a:ln w="0">
-            <a:noFill/>
-          </a:ln>
-        </p:spPr>
-        <p:txBody>
-          <a:bodyPr lIns="144000" tIns="90000" rIns="144000" bIns="72000" anchor="ctr" anchorCtr="1">
-            <a:noAutofit/>
-          </a:bodyPr>
-          <a:p>
-            <a:r>
-              <a:rPr lang="en-US" sz="1200" b="0" u="none" strike="noStrike">
-                <a:solidFill>
-                  <a:srgbClr val="233033"/>
-                </a:solidFill>
-                <a:effectLst/>
-                <a:uFillTx/>
-                <a:latin typeface="Arial"/>
-              </a:rPr>
-              <a:t>Enfoque: comprender el equilibrio entre factores naturales y presión humana.</a:t>
-            </a:r>
-            <a:endParaRPr lang="en-US" sz="1200" b="0" u="none" strike="noStrike">
-              <a:solidFill>
-                <a:srgbClr val="233033"/>
+          <p:cNvSpPr txBox="1"/>
+          <p:nvPr/>
+        </p:nvSpPr>
+        <p:spPr>
+          <a:xfrm>
+            <a:off x="4248000" y="4896000"/>
+            <a:ext cx="5256000" cy="270000"/>
+          </a:xfrm>
+          <a:prstGeom prst="rect">
+            <a:avLst/>
+          </a:prstGeom>
+          <a:noFill/>
+          <a:ln w="0">
+            <a:noFill/>
+          </a:ln>
+        </p:spPr>
+        <p:txBody>
+          <a:bodyPr lIns="0" tIns="0" rIns="0" bIns="0" anchor="t">
+            <a:spAutoFit/>
+          </a:bodyPr>
+          <a:p>
+            <a:r>
+              <a:rPr lang="en-US" sz="920" b="0" u="none" strike="noStrike">
+                <a:solidFill>
+                  <a:srgbClr val="677776"/>
+                </a:solidFill>
+                <a:effectLst/>
+                <a:uFillTx/>
+                <a:latin typeface="Arial"/>
+              </a:rPr>
+              <a:t>Fig. 1. Colonia de pingüinos de Humboldt. Fuente: archivo de imagen provisto en el repositorio de la actividad.</a:t>
+            </a:r>
+            <a:endParaRPr lang="en-US" sz="920" b="0" u="none" strike="noStrike">
+              <a:solidFill>
+                <a:srgbClr val="677776"/>
               </a:solidFill>
               <a:effectLst/>
               <a:uFillTx/>
@@ -1672,7 +1673,7 @@
         <p:spPr>
           <a:xfrm>
             <a:off x="576000" y="432000"/>
-            <a:ext cx="4320000" cy="337320"/>
+            <a:ext cx="5400000" cy="337320"/>
           </a:xfrm>
           <a:prstGeom prst="rect">
             <a:avLst/>
@@ -1696,7 +1697,7 @@
                 <a:uFillTx/>
                 <a:latin typeface="Arial"/>
               </a:rPr>
-              <a:t>1. OBJETO DE ESTUDIO</a:t>
+              <a:t>METODOLOGÍA</a:t>
             </a:r>
             <a:endParaRPr lang="en-US" sz="900" b="1" u="none" strike="noStrike">
               <a:solidFill>
@@ -1718,7 +1719,7 @@
         <p:spPr>
           <a:xfrm>
             <a:off x="576000" y="720000"/>
-            <a:ext cx="6840000" cy="337320"/>
+            <a:ext cx="7560000" cy="337320"/>
           </a:xfrm>
           <a:prstGeom prst="rect">
             <a:avLst/>
@@ -1742,7 +1743,7 @@
                 <a:uFillTx/>
                 <a:latin typeface="Times New Roman"/>
               </a:rPr>
-              <a:t>El pingüino de Humboldt como indicador ecológico</a:t>
+              <a:t>CRISP-DM como marco explícito de trabajo</a:t>
             </a:r>
             <a:endParaRPr lang="en-US" sz="2200" b="1" u="none" strike="noStrike">
               <a:solidFill>
@@ -1804,61 +1805,13 @@
       <p:sp>
         <p:nvSpPr>
           <p:cNvPr id="28" name=""/>
-          <p:cNvSpPr/>
+          <p:cNvSpPr txBox="1"/>
           <p:nvPr/>
         </p:nvSpPr>
         <p:spPr>
           <a:xfrm>
             <a:off x="576000" y="1368000"/>
-            <a:ext cx="1440000" cy="360000"/>
-          </a:xfrm>
-          <a:prstGeom prst="rect">
-            <a:avLst/>
-          </a:prstGeom>
-          <a:solidFill>
-            <a:srgbClr val="DDE8E1"/>
-          </a:solidFill>
-          <a:ln w="0">
-            <a:noFill/>
-          </a:ln>
-        </p:spPr>
-        <p:txBody>
-          <a:bodyPr lIns="108000" tIns="72000" rIns="108000" bIns="72000" anchor="ctr" anchorCtr="1">
-            <a:noAutofit/>
-          </a:bodyPr>
-          <a:p>
-            <a:r>
-              <a:rPr lang="en-US" sz="1000" b="1" u="none" strike="noStrike">
-                <a:solidFill>
-                  <a:srgbClr val="1F4D3E"/>
-                </a:solidFill>
-                <a:effectLst/>
-                <a:uFillTx/>
-                <a:latin typeface="Arial"/>
-              </a:rPr>
-              <a:t>Contexto base</a:t>
-            </a:r>
-            <a:endParaRPr lang="en-US" sz="1000" b="1" u="none" strike="noStrike">
-              <a:solidFill>
-                <a:srgbClr val="1F4D3E"/>
-              </a:solidFill>
-              <a:effectLst/>
-              <a:uFillTx/>
-              <a:latin typeface="Arial"/>
-            </a:endParaRPr>
-          </a:p>
-        </p:txBody>
-      </p:sp>
-      <p:sp>
-        <p:nvSpPr>
-          <p:cNvPr id="29" name=""/>
-          <p:cNvSpPr txBox="1"/>
-          <p:nvPr/>
-        </p:nvSpPr>
-        <p:spPr>
-          <a:xfrm>
-            <a:off x="576000" y="1908000"/>
-            <a:ext cx="4176000" cy="1058760"/>
+            <a:ext cx="7200000" cy="341640"/>
           </a:xfrm>
           <a:prstGeom prst="rect">
             <a:avLst/>
@@ -1874,82 +1827,88 @@
           </a:bodyPr>
           <a:p>
             <a:r>
-              <a:rPr lang="en-US" sz="1500" b="0" u="none" strike="noStrike">
-                <a:solidFill>
-                  <a:srgbClr val="233033"/>
-                </a:solidFill>
-                <a:effectLst/>
-                <a:uFillTx/>
-                <a:latin typeface="Arial"/>
-              </a:rPr>
-              <a:t>• Habita la corriente de Humboldt entre Chile y Perú.</a:t>
-            </a:r>
-            <a:endParaRPr lang="en-US" sz="1500" b="0" u="none" strike="noStrike">
-              <a:solidFill>
-                <a:srgbClr val="233033"/>
-              </a:solidFill>
-              <a:effectLst/>
-              <a:uFillTx/>
-              <a:latin typeface="Arial"/>
-            </a:endParaRPr>
-          </a:p>
-          <a:p>
-            <a:r>
-              <a:rPr lang="en-US" sz="1500" b="0" u="none" strike="noStrike">
-                <a:solidFill>
-                  <a:srgbClr val="233033"/>
-                </a:solidFill>
-                <a:effectLst/>
-                <a:uFillTx/>
-                <a:latin typeface="Arial"/>
-              </a:rPr>
-              <a:t>• Vive en costas rocosas e islas.</a:t>
-            </a:r>
-            <a:endParaRPr lang="en-US" sz="1500" b="0" u="none" strike="noStrike">
-              <a:solidFill>
-                <a:srgbClr val="233033"/>
-              </a:solidFill>
-              <a:effectLst/>
-              <a:uFillTx/>
-              <a:latin typeface="Arial"/>
-            </a:endParaRPr>
-          </a:p>
-          <a:p>
-            <a:r>
-              <a:rPr lang="en-US" sz="1500" b="0" u="none" strike="noStrike">
-                <a:solidFill>
-                  <a:srgbClr val="233033"/>
-                </a:solidFill>
-                <a:effectLst/>
-                <a:uFillTx/>
-                <a:latin typeface="Arial"/>
-              </a:rPr>
-              <a:t>• Depende fuertemente del ecosistema marino.</a:t>
-            </a:r>
-            <a:endParaRPr lang="en-US" sz="1500" b="0" u="none" strike="noStrike">
-              <a:solidFill>
-                <a:srgbClr val="233033"/>
-              </a:solidFill>
-              <a:effectLst/>
-              <a:uFillTx/>
-              <a:latin typeface="Arial"/>
-            </a:endParaRPr>
-          </a:p>
-          <a:p>
-            <a:r>
-              <a:rPr lang="en-US" sz="1500" b="0" u="none" strike="noStrike">
-                <a:solidFill>
-                  <a:srgbClr val="233033"/>
-                </a:solidFill>
-                <a:effectLst/>
-                <a:uFillTx/>
-                <a:latin typeface="Arial"/>
-              </a:rPr>
-              <a:t>• Su estado de conservación es vulnerable.</a:t>
-            </a:r>
-            <a:endParaRPr lang="en-US" sz="1500" b="0" u="none" strike="noStrike">
-              <a:solidFill>
-                <a:srgbClr val="233033"/>
+              <a:rPr lang="en-US" sz="1200" b="0" u="none" strike="noStrike">
+                <a:solidFill>
+                  <a:srgbClr val="677776"/>
+                </a:solidFill>
+                <a:effectLst/>
+                <a:uFillTx/>
+                <a:latin typeface="Arial"/>
+              </a:rPr>
+              <a:t>La actividad exige trabajar formalmente las tres primeras fases. El resto del ciclo queda fuera de alcance, pero se mantiene visible para dar coherencia metodológica.</a:t>
+            </a:r>
+            <a:endParaRPr lang="en-US" sz="1200" b="0" u="none" strike="noStrike">
+              <a:solidFill>
+                <a:srgbClr val="677776"/>
+              </a:solidFill>
+              <a:effectLst/>
+              <a:uFillTx/>
+              <a:latin typeface="Arial"/>
+            </a:endParaRPr>
+          </a:p>
+        </p:txBody>
+      </p:sp>
+      <p:sp>
+        <p:nvSpPr>
+          <p:cNvPr id="29" name=""/>
+          <p:cNvSpPr/>
+          <p:nvPr/>
+        </p:nvSpPr>
+        <p:spPr>
+          <a:xfrm>
+            <a:off x="576000" y="2304000"/>
+            <a:ext cx="1296000" cy="1080000"/>
+          </a:xfrm>
+          <a:prstGeom prst="rect">
+            <a:avLst/>
+          </a:prstGeom>
+          <a:solidFill>
+            <a:srgbClr val="1F4D3E"/>
+          </a:solidFill>
+          <a:ln w="0">
+            <a:noFill/>
+          </a:ln>
+        </p:spPr>
+        <p:txBody>
+          <a:bodyPr lIns="108000" tIns="108000" rIns="108000" bIns="72000" anchor="ctr" anchorCtr="1">
+            <a:noAutofit/>
+          </a:bodyPr>
+          <a:p>
+            <a:r>
+              <a:rPr lang="en-US" sz="1150" b="1" u="none" strike="noStrike">
+                <a:solidFill>
+                  <a:srgbClr val="FFFFFF"/>
+                </a:solidFill>
+                <a:effectLst/>
+                <a:uFillTx/>
+                <a:latin typeface="Arial"/>
+              </a:rPr>
+              <a:t>1</a:t>
+            </a:r>
+            <a:endParaRPr lang="en-US" sz="1150" b="1" u="none" strike="noStrike">
+              <a:solidFill>
+                <a:srgbClr val="FFFFFF"/>
+              </a:solidFill>
+              <a:effectLst/>
+              <a:uFillTx/>
+              <a:latin typeface="Arial"/>
+            </a:endParaRPr>
+          </a:p>
+          <a:p>
+            <a:r>
+              <a:rPr lang="en-US" sz="1150" b="1" u="none" strike="noStrike">
+                <a:solidFill>
+                  <a:srgbClr val="FFFFFF"/>
+                </a:solidFill>
+                <a:effectLst/>
+                <a:uFillTx/>
+                <a:latin typeface="Arial"/>
+              </a:rPr>
+              <a:t>Comprensión del negocio</a:t>
+            </a:r>
+            <a:endParaRPr lang="en-US" sz="1150" b="1" u="none" strike="noStrike">
+              <a:solidFill>
+                <a:srgbClr val="FFFFFF"/>
               </a:solidFill>
               <a:effectLst/>
               <a:uFillTx/>
@@ -1966,8 +1925,353 @@
         </p:nvSpPr>
         <p:spPr>
           <a:xfrm>
-            <a:off x="576000" y="3960000"/>
-            <a:ext cx="4248000" cy="864000"/>
+            <a:off x="2088000" y="2304000"/>
+            <a:ext cx="1296000" cy="1080000"/>
+          </a:xfrm>
+          <a:prstGeom prst="rect">
+            <a:avLst/>
+          </a:prstGeom>
+          <a:solidFill>
+            <a:srgbClr val="2D6A6A"/>
+          </a:solidFill>
+          <a:ln w="0">
+            <a:noFill/>
+          </a:ln>
+        </p:spPr>
+        <p:txBody>
+          <a:bodyPr lIns="108000" tIns="108000" rIns="108000" bIns="72000" anchor="ctr" anchorCtr="1">
+            <a:noAutofit/>
+          </a:bodyPr>
+          <a:p>
+            <a:r>
+              <a:rPr lang="en-US" sz="1150" b="1" u="none" strike="noStrike">
+                <a:solidFill>
+                  <a:srgbClr val="FFFFFF"/>
+                </a:solidFill>
+                <a:effectLst/>
+                <a:uFillTx/>
+                <a:latin typeface="Arial"/>
+              </a:rPr>
+              <a:t>2</a:t>
+            </a:r>
+            <a:endParaRPr lang="en-US" sz="1150" b="1" u="none" strike="noStrike">
+              <a:solidFill>
+                <a:srgbClr val="FFFFFF"/>
+              </a:solidFill>
+              <a:effectLst/>
+              <a:uFillTx/>
+              <a:latin typeface="Arial"/>
+            </a:endParaRPr>
+          </a:p>
+          <a:p>
+            <a:r>
+              <a:rPr lang="en-US" sz="1150" b="1" u="none" strike="noStrike">
+                <a:solidFill>
+                  <a:srgbClr val="FFFFFF"/>
+                </a:solidFill>
+                <a:effectLst/>
+                <a:uFillTx/>
+                <a:latin typeface="Arial"/>
+              </a:rPr>
+              <a:t>Comprensión de los datos</a:t>
+            </a:r>
+            <a:endParaRPr lang="en-US" sz="1150" b="1" u="none" strike="noStrike">
+              <a:solidFill>
+                <a:srgbClr val="FFFFFF"/>
+              </a:solidFill>
+              <a:effectLst/>
+              <a:uFillTx/>
+              <a:latin typeface="Arial"/>
+            </a:endParaRPr>
+          </a:p>
+        </p:txBody>
+      </p:sp>
+      <p:sp>
+        <p:nvSpPr>
+          <p:cNvPr id="31" name=""/>
+          <p:cNvSpPr/>
+          <p:nvPr/>
+        </p:nvSpPr>
+        <p:spPr>
+          <a:xfrm>
+            <a:off x="3600000" y="2304000"/>
+            <a:ext cx="1296000" cy="1080000"/>
+          </a:xfrm>
+          <a:prstGeom prst="rect">
+            <a:avLst/>
+          </a:prstGeom>
+          <a:solidFill>
+            <a:srgbClr val="88A97C"/>
+          </a:solidFill>
+          <a:ln w="0">
+            <a:noFill/>
+          </a:ln>
+        </p:spPr>
+        <p:txBody>
+          <a:bodyPr lIns="108000" tIns="108000" rIns="108000" bIns="72000" anchor="ctr" anchorCtr="1">
+            <a:noAutofit/>
+          </a:bodyPr>
+          <a:p>
+            <a:r>
+              <a:rPr lang="en-US" sz="1150" b="1" u="none" strike="noStrike">
+                <a:solidFill>
+                  <a:srgbClr val="153329"/>
+                </a:solidFill>
+                <a:effectLst/>
+                <a:uFillTx/>
+                <a:latin typeface="Arial"/>
+              </a:rPr>
+              <a:t>3</a:t>
+            </a:r>
+            <a:endParaRPr lang="en-US" sz="1150" b="1" u="none" strike="noStrike">
+              <a:solidFill>
+                <a:srgbClr val="153329"/>
+              </a:solidFill>
+              <a:effectLst/>
+              <a:uFillTx/>
+              <a:latin typeface="Arial"/>
+            </a:endParaRPr>
+          </a:p>
+          <a:p>
+            <a:r>
+              <a:rPr lang="en-US" sz="1150" b="1" u="none" strike="noStrike">
+                <a:solidFill>
+                  <a:srgbClr val="153329"/>
+                </a:solidFill>
+                <a:effectLst/>
+                <a:uFillTx/>
+                <a:latin typeface="Arial"/>
+              </a:rPr>
+              <a:t>Preparación de los datos</a:t>
+            </a:r>
+            <a:endParaRPr lang="en-US" sz="1150" b="1" u="none" strike="noStrike">
+              <a:solidFill>
+                <a:srgbClr val="153329"/>
+              </a:solidFill>
+              <a:effectLst/>
+              <a:uFillTx/>
+              <a:latin typeface="Arial"/>
+            </a:endParaRPr>
+          </a:p>
+        </p:txBody>
+      </p:sp>
+      <p:sp>
+        <p:nvSpPr>
+          <p:cNvPr id="32" name=""/>
+          <p:cNvSpPr/>
+          <p:nvPr/>
+        </p:nvSpPr>
+        <p:spPr>
+          <a:xfrm>
+            <a:off x="5112000" y="2304000"/>
+            <a:ext cx="1296000" cy="1080000"/>
+          </a:xfrm>
+          <a:prstGeom prst="rect">
+            <a:avLst/>
+          </a:prstGeom>
+          <a:solidFill>
+            <a:srgbClr val="E8E0CF"/>
+          </a:solidFill>
+          <a:ln w="0">
+            <a:noFill/>
+          </a:ln>
+        </p:spPr>
+        <p:txBody>
+          <a:bodyPr lIns="108000" tIns="108000" rIns="108000" bIns="72000" anchor="ctr" anchorCtr="1">
+            <a:noAutofit/>
+          </a:bodyPr>
+          <a:p>
+            <a:r>
+              <a:rPr lang="en-US" sz="1150" b="1" u="none" strike="noStrike">
+                <a:solidFill>
+                  <a:srgbClr val="153329"/>
+                </a:solidFill>
+                <a:effectLst/>
+                <a:uFillTx/>
+                <a:latin typeface="Arial"/>
+              </a:rPr>
+              <a:t>4</a:t>
+            </a:r>
+            <a:endParaRPr lang="en-US" sz="1150" b="1" u="none" strike="noStrike">
+              <a:solidFill>
+                <a:srgbClr val="153329"/>
+              </a:solidFill>
+              <a:effectLst/>
+              <a:uFillTx/>
+              <a:latin typeface="Arial"/>
+            </a:endParaRPr>
+          </a:p>
+          <a:p>
+            <a:r>
+              <a:rPr lang="en-US" sz="1150" b="1" u="none" strike="noStrike">
+                <a:solidFill>
+                  <a:srgbClr val="153329"/>
+                </a:solidFill>
+                <a:effectLst/>
+                <a:uFillTx/>
+                <a:latin typeface="Arial"/>
+              </a:rPr>
+              <a:t>Modelado</a:t>
+            </a:r>
+            <a:endParaRPr lang="en-US" sz="1150" b="1" u="none" strike="noStrike">
+              <a:solidFill>
+                <a:srgbClr val="153329"/>
+              </a:solidFill>
+              <a:effectLst/>
+              <a:uFillTx/>
+              <a:latin typeface="Arial"/>
+            </a:endParaRPr>
+          </a:p>
+        </p:txBody>
+      </p:sp>
+      <p:sp>
+        <p:nvSpPr>
+          <p:cNvPr id="33" name=""/>
+          <p:cNvSpPr/>
+          <p:nvPr/>
+        </p:nvSpPr>
+        <p:spPr>
+          <a:xfrm>
+            <a:off x="6624000" y="2304000"/>
+            <a:ext cx="1296000" cy="1080000"/>
+          </a:xfrm>
+          <a:prstGeom prst="rect">
+            <a:avLst/>
+          </a:prstGeom>
+          <a:solidFill>
+            <a:srgbClr val="E8E0CF"/>
+          </a:solidFill>
+          <a:ln w="0">
+            <a:noFill/>
+          </a:ln>
+        </p:spPr>
+        <p:txBody>
+          <a:bodyPr lIns="108000" tIns="108000" rIns="108000" bIns="72000" anchor="ctr" anchorCtr="1">
+            <a:noAutofit/>
+          </a:bodyPr>
+          <a:p>
+            <a:r>
+              <a:rPr lang="en-US" sz="1150" b="1" u="none" strike="noStrike">
+                <a:solidFill>
+                  <a:srgbClr val="153329"/>
+                </a:solidFill>
+                <a:effectLst/>
+                <a:uFillTx/>
+                <a:latin typeface="Arial"/>
+              </a:rPr>
+              <a:t>5</a:t>
+            </a:r>
+            <a:endParaRPr lang="en-US" sz="1150" b="1" u="none" strike="noStrike">
+              <a:solidFill>
+                <a:srgbClr val="153329"/>
+              </a:solidFill>
+              <a:effectLst/>
+              <a:uFillTx/>
+              <a:latin typeface="Arial"/>
+            </a:endParaRPr>
+          </a:p>
+          <a:p>
+            <a:r>
+              <a:rPr lang="en-US" sz="1150" b="1" u="none" strike="noStrike">
+                <a:solidFill>
+                  <a:srgbClr val="153329"/>
+                </a:solidFill>
+                <a:effectLst/>
+                <a:uFillTx/>
+                <a:latin typeface="Arial"/>
+              </a:rPr>
+              <a:t>Evaluación</a:t>
+            </a:r>
+            <a:endParaRPr lang="en-US" sz="1150" b="1" u="none" strike="noStrike">
+              <a:solidFill>
+                <a:srgbClr val="153329"/>
+              </a:solidFill>
+              <a:effectLst/>
+              <a:uFillTx/>
+              <a:latin typeface="Arial"/>
+            </a:endParaRPr>
+          </a:p>
+        </p:txBody>
+      </p:sp>
+      <p:sp>
+        <p:nvSpPr>
+          <p:cNvPr id="34" name=""/>
+          <p:cNvSpPr/>
+          <p:nvPr/>
+        </p:nvSpPr>
+        <p:spPr>
+          <a:xfrm>
+            <a:off x="8136000" y="2304000"/>
+            <a:ext cx="1296000" cy="1080000"/>
+          </a:xfrm>
+          <a:prstGeom prst="rect">
+            <a:avLst/>
+          </a:prstGeom>
+          <a:solidFill>
+            <a:srgbClr val="E8E0CF"/>
+          </a:solidFill>
+          <a:ln w="0">
+            <a:noFill/>
+          </a:ln>
+        </p:spPr>
+        <p:txBody>
+          <a:bodyPr lIns="108000" tIns="108000" rIns="108000" bIns="72000" anchor="ctr" anchorCtr="1">
+            <a:noAutofit/>
+          </a:bodyPr>
+          <a:p>
+            <a:r>
+              <a:rPr lang="en-US" sz="1150" b="1" u="none" strike="noStrike">
+                <a:solidFill>
+                  <a:srgbClr val="153329"/>
+                </a:solidFill>
+                <a:effectLst/>
+                <a:uFillTx/>
+                <a:latin typeface="Arial"/>
+              </a:rPr>
+              <a:t>6</a:t>
+            </a:r>
+            <a:endParaRPr lang="en-US" sz="1150" b="1" u="none" strike="noStrike">
+              <a:solidFill>
+                <a:srgbClr val="153329"/>
+              </a:solidFill>
+              <a:effectLst/>
+              <a:uFillTx/>
+              <a:latin typeface="Arial"/>
+            </a:endParaRPr>
+          </a:p>
+          <a:p>
+            <a:r>
+              <a:rPr lang="en-US" sz="1150" b="1" u="none" strike="noStrike">
+                <a:solidFill>
+                  <a:srgbClr val="153329"/>
+                </a:solidFill>
+                <a:effectLst/>
+                <a:uFillTx/>
+                <a:latin typeface="Arial"/>
+              </a:rPr>
+              <a:t>Despliegue</a:t>
+            </a:r>
+            <a:endParaRPr lang="en-US" sz="1150" b="1" u="none" strike="noStrike">
+              <a:solidFill>
+                <a:srgbClr val="153329"/>
+              </a:solidFill>
+              <a:effectLst/>
+              <a:uFillTx/>
+              <a:latin typeface="Arial"/>
+            </a:endParaRPr>
+          </a:p>
+        </p:txBody>
+      </p:sp>
+      <p:sp>
+        <p:nvSpPr>
+          <p:cNvPr id="35" name=""/>
+          <p:cNvSpPr/>
+          <p:nvPr/>
+        </p:nvSpPr>
+        <p:spPr>
+          <a:xfrm>
+            <a:off x="576000" y="4032000"/>
+            <a:ext cx="8928000" cy="648000"/>
           </a:xfrm>
           <a:prstGeom prst="rect">
             <a:avLst/>
@@ -1980,12 +2284,12 @@
           </a:ln>
         </p:spPr>
         <p:txBody>
-          <a:bodyPr lIns="180000" tIns="144000" rIns="180000" bIns="108000" anchor="ctr" anchorCtr="1">
-            <a:noAutofit/>
-          </a:bodyPr>
-          <a:p>
-            <a:r>
-              <a:rPr lang="en-US" sz="1600" b="1" u="none" strike="noStrike">
+          <a:bodyPr lIns="180000" tIns="144000" rIns="180000" bIns="72000" anchor="ctr" anchorCtr="1">
+            <a:noAutofit/>
+          </a:bodyPr>
+          <a:p>
+            <a:r>
+              <a:rPr lang="en-US" sz="1400" b="1" u="none" strike="noStrike">
                 <a:solidFill>
                   <a:srgbClr val="FFFFFF"/>
                 </a:solidFill>
@@ -1993,9 +2297,9 @@
                 <a:uFillTx/>
                 <a:latin typeface="Arial"/>
               </a:rPr>
-              <a:t>No es solo una especie emblemática: su estado refleja la salud del ecosistema costero.</a:t>
-            </a:r>
-            <a:endParaRPr lang="en-US" sz="1600" b="1" u="none" strike="noStrike">
+              <a:t>Alcance de esta presentación: problema -&gt; datos -&gt; preparación.</a:t>
+            </a:r>
+            <a:endParaRPr lang="en-US" sz="1400" b="1" u="none" strike="noStrike">
               <a:solidFill>
                 <a:srgbClr val="FFFFFF"/>
               </a:solidFill>
@@ -2004,155 +2308,21 @@
               <a:latin typeface="Arial"/>
             </a:endParaRPr>
           </a:p>
-        </p:txBody>
-      </p:sp>
-      <p:sp>
-        <p:nvSpPr>
-          <p:cNvPr id="31" name=""/>
-          <p:cNvSpPr/>
-          <p:nvPr/>
-        </p:nvSpPr>
-        <p:spPr>
-          <a:xfrm>
-            <a:off x="5688000" y="1368000"/>
-            <a:ext cx="864000" cy="360000"/>
-          </a:xfrm>
-          <a:prstGeom prst="rect">
-            <a:avLst/>
-          </a:prstGeom>
-          <a:solidFill>
-            <a:srgbClr val="E8E0CF"/>
-          </a:solidFill>
-          <a:ln w="0">
-            <a:noFill/>
-          </a:ln>
-        </p:spPr>
-        <p:txBody>
-          <a:bodyPr lIns="108000" tIns="72000" rIns="108000" bIns="72000" anchor="ctr" anchorCtr="1">
-            <a:noAutofit/>
-          </a:bodyPr>
-          <a:p>
-            <a:r>
-              <a:rPr lang="en-US" sz="1000" b="1" u="none" strike="noStrike">
-                <a:solidFill>
-                  <a:srgbClr val="153329"/>
-                </a:solidFill>
-                <a:effectLst/>
-                <a:uFillTx/>
-                <a:latin typeface="Arial"/>
-              </a:rPr>
-              <a:t>Vulnerable</a:t>
-            </a:r>
-            <a:endParaRPr lang="en-US" sz="1000" b="1" u="none" strike="noStrike">
-              <a:solidFill>
-                <a:srgbClr val="153329"/>
-              </a:solidFill>
-              <a:effectLst/>
-              <a:uFillTx/>
-              <a:latin typeface="Arial"/>
-            </a:endParaRPr>
-          </a:p>
-        </p:txBody>
-      </p:sp>
-      <p:sp>
-        <p:nvSpPr>
-          <p:cNvPr id="32" name=""/>
-          <p:cNvSpPr/>
-          <p:nvPr/>
-        </p:nvSpPr>
-        <p:spPr>
-          <a:xfrm>
-            <a:off x="5616000" y="1728000"/>
-            <a:ext cx="3312000" cy="3240000"/>
-          </a:xfrm>
-          <a:prstGeom prst="rect">
-            <a:avLst/>
-          </a:prstGeom>
-          <a:solidFill>
-            <a:srgbClr val="E8E0CF"/>
-          </a:solidFill>
-          <a:ln w="0">
-            <a:noFill/>
-          </a:ln>
-        </p:spPr>
-        <p:txBody>
-          <a:bodyPr lIns="90000" tIns="45000" rIns="90000" bIns="45000" anchor="ctr" anchorCtr="1">
-            <a:noAutofit/>
-          </a:bodyPr>
-          <a:p>
-            <a:endParaRPr lang="en-US" sz="1800" b="0" u="none" strike="noStrike">
-              <a:solidFill>
-                <a:srgbClr val="000000"/>
-              </a:solidFill>
-              <a:effectLst/>
-              <a:uFillTx/>
-              <a:latin typeface="Arial"/>
-            </a:endParaRPr>
-          </a:p>
-        </p:txBody>
-      </p:sp>
-      <p:pic>
-        <p:nvPicPr>
-          <p:cNvPr id="33" name=""/>
-          <p:cNvPicPr/>
-          <p:nvPr/>
-        </p:nvPicPr>
-        <p:blipFill>
-          <a:blip r:embed="rId1"/>
-          <a:stretch/>
-        </p:blipFill>
-        <p:spPr>
-          <a:xfrm>
-            <a:off x="6046920" y="1818000"/>
-            <a:ext cx="2450160" cy="3060000"/>
-          </a:xfrm>
-          <a:prstGeom prst="rect">
-            <a:avLst/>
-          </a:prstGeom>
-          <a:noFill/>
-          <a:ln w="0">
-            <a:noFill/>
-          </a:ln>
-        </p:spPr>
-      </p:pic>
-      <p:sp>
-        <p:nvSpPr>
-          <p:cNvPr id="34" name=""/>
-          <p:cNvSpPr txBox="1"/>
-          <p:nvPr/>
-        </p:nvSpPr>
-        <p:spPr>
-          <a:xfrm>
-            <a:off x="5616000" y="5076000"/>
-            <a:ext cx="3312000" cy="337320"/>
-          </a:xfrm>
-          <a:prstGeom prst="rect">
-            <a:avLst/>
-          </a:prstGeom>
-          <a:noFill/>
-          <a:ln w="0">
-            <a:noFill/>
-          </a:ln>
-        </p:spPr>
-        <p:txBody>
-          <a:bodyPr lIns="0" tIns="0" rIns="0" bIns="0" anchor="t">
-            <a:spAutoFit/>
-          </a:bodyPr>
-          <a:p>
-            <a:r>
-              <a:rPr lang="en-US" sz="1050" b="0" u="none" strike="noStrike">
-                <a:solidFill>
-                  <a:srgbClr val="677776"/>
-                </a:solidFill>
-                <a:effectLst/>
-                <a:uFillTx/>
-                <a:latin typeface="Arial"/>
-              </a:rPr>
-              <a:t>Objeto de estudio: una especie centinela de la costa pacífica sur.</a:t>
-            </a:r>
-            <a:endParaRPr lang="en-US" sz="1050" b="0" u="none" strike="noStrike">
-              <a:solidFill>
-                <a:srgbClr val="677776"/>
+          <a:p>
+            <a:r>
+              <a:rPr lang="en-US" sz="1400" b="1" u="none" strike="noStrike">
+                <a:solidFill>
+                  <a:srgbClr val="FFFFFF"/>
+                </a:solidFill>
+                <a:effectLst/>
+                <a:uFillTx/>
+                <a:latin typeface="Arial"/>
+              </a:rPr>
+              <a:t>Transición explícita: cada sección siguiente corresponde a una fase CRISP-DM.</a:t>
+            </a:r>
+            <a:endParaRPr lang="en-US" sz="1400" b="1" u="none" strike="noStrike">
+              <a:solidFill>
+                <a:srgbClr val="FFFFFF"/>
               </a:solidFill>
               <a:effectLst/>
               <a:uFillTx/>
@@ -2193,7 +2363,7 @@
       </p:grpSpPr>
       <p:sp>
         <p:nvSpPr>
-          <p:cNvPr id="35" name=""/>
+          <p:cNvPr id="36" name=""/>
           <p:cNvSpPr/>
           <p:nvPr/>
         </p:nvSpPr>
@@ -2230,7 +2400,7 @@
       </p:sp>
       <p:sp>
         <p:nvSpPr>
-          <p:cNvPr id="36" name=""/>
+          <p:cNvPr id="37" name=""/>
           <p:cNvSpPr/>
           <p:nvPr/>
         </p:nvSpPr>
@@ -2267,7 +2437,7 @@
       </p:sp>
       <p:sp>
         <p:nvSpPr>
-          <p:cNvPr id="37" name=""/>
+          <p:cNvPr id="38" name=""/>
           <p:cNvSpPr/>
           <p:nvPr/>
         </p:nvSpPr>
@@ -2304,14 +2474,14 @@
       </p:sp>
       <p:sp>
         <p:nvSpPr>
-          <p:cNvPr id="38" name=""/>
+          <p:cNvPr id="39" name=""/>
           <p:cNvSpPr txBox="1"/>
           <p:nvPr/>
         </p:nvSpPr>
         <p:spPr>
           <a:xfrm>
             <a:off x="576000" y="432000"/>
-            <a:ext cx="4320000" cy="337320"/>
+            <a:ext cx="5400000" cy="337320"/>
           </a:xfrm>
           <a:prstGeom prst="rect">
             <a:avLst/>
@@ -2335,7 +2505,7 @@
                 <a:uFillTx/>
                 <a:latin typeface="Arial"/>
               </a:rPr>
-              <a:t>2. PROBLEMA</a:t>
+              <a:t>FASE 1 | COMPRENSIÓN DEL NEGOCIO</a:t>
             </a:r>
             <a:endParaRPr lang="en-US" sz="900" b="1" u="none" strike="noStrike">
               <a:solidFill>
@@ -2350,14 +2520,14 @@
       </p:sp>
       <p:sp>
         <p:nvSpPr>
-          <p:cNvPr id="39" name=""/>
+          <p:cNvPr id="40" name=""/>
           <p:cNvSpPr txBox="1"/>
           <p:nvPr/>
         </p:nvSpPr>
         <p:spPr>
           <a:xfrm>
             <a:off x="576000" y="720000"/>
-            <a:ext cx="6840000" cy="337320"/>
+            <a:ext cx="7560000" cy="337320"/>
           </a:xfrm>
           <a:prstGeom prst="rect">
             <a:avLst/>
@@ -2381,7 +2551,7 @@
                 <a:uFillTx/>
                 <a:latin typeface="Times New Roman"/>
               </a:rPr>
-              <a:t>Comprensión del negocio y propósito del análisis</a:t>
+              <a:t>Problema, contexto ONU y proposición de trabajo</a:t>
             </a:r>
             <a:endParaRPr lang="en-US" sz="2200" b="1" u="none" strike="noStrike">
               <a:solidFill>
@@ -2396,7 +2566,7 @@
       </p:sp>
       <p:sp>
         <p:nvSpPr>
-          <p:cNvPr id="40" name=""/>
+          <p:cNvPr id="41" name=""/>
           <p:cNvSpPr txBox="1"/>
           <p:nvPr/>
         </p:nvSpPr>
@@ -2442,14 +2612,14 @@
       </p:sp>
       <p:sp>
         <p:nvSpPr>
-          <p:cNvPr id="41" name=""/>
+          <p:cNvPr id="42" name=""/>
           <p:cNvSpPr/>
           <p:nvPr/>
         </p:nvSpPr>
         <p:spPr>
           <a:xfrm>
             <a:off x="576000" y="1512000"/>
-            <a:ext cx="1944000" cy="936000"/>
+            <a:ext cx="4032000" cy="936000"/>
           </a:xfrm>
           <a:prstGeom prst="rect">
             <a:avLst/>
@@ -2479,14 +2649,14 @@
       </p:sp>
       <p:sp>
         <p:nvSpPr>
-          <p:cNvPr id="42" name=""/>
+          <p:cNvPr id="43" name=""/>
           <p:cNvSpPr/>
           <p:nvPr/>
         </p:nvSpPr>
         <p:spPr>
           <a:xfrm>
             <a:off x="576000" y="1512000"/>
-            <a:ext cx="1944000" cy="144000"/>
+            <a:ext cx="4032000" cy="144000"/>
           </a:xfrm>
           <a:prstGeom prst="rect">
             <a:avLst/>
@@ -2516,14 +2686,14 @@
       </p:sp>
       <p:sp>
         <p:nvSpPr>
-          <p:cNvPr id="43" name=""/>
+          <p:cNvPr id="44" name=""/>
           <p:cNvSpPr txBox="1"/>
           <p:nvPr/>
         </p:nvSpPr>
         <p:spPr>
           <a:xfrm>
             <a:off x="684000" y="1728000"/>
-            <a:ext cx="1728000" cy="337320"/>
+            <a:ext cx="3816000" cy="337320"/>
           </a:xfrm>
           <a:prstGeom prst="rect">
             <a:avLst/>
@@ -2539,7 +2709,7 @@
           </a:bodyPr>
           <a:p>
             <a:r>
-              <a:rPr lang="en-US" sz="1350" b="1" u="none" strike="noStrike">
+              <a:rPr lang="en-US" sz="1320" b="1" u="none" strike="noStrike">
                 <a:solidFill>
                   <a:srgbClr val="1F4D3E"/>
                 </a:solidFill>
@@ -2547,9 +2717,9 @@
                 <a:uFillTx/>
                 <a:latin typeface="Times New Roman"/>
               </a:rPr>
-              <a:t>Pesca incidental</a:t>
-            </a:r>
-            <a:endParaRPr lang="en-US" sz="1350" b="1" u="none" strike="noStrike">
+              <a:t>Problema central</a:t>
+            </a:r>
+            <a:endParaRPr lang="en-US" sz="1320" b="1" u="none" strike="noStrike">
               <a:solidFill>
                 <a:srgbClr val="1F4D3E"/>
               </a:solidFill>
@@ -2562,14 +2732,14 @@
       </p:sp>
       <p:sp>
         <p:nvSpPr>
-          <p:cNvPr id="44" name=""/>
+          <p:cNvPr id="45" name=""/>
           <p:cNvSpPr txBox="1"/>
           <p:nvPr/>
         </p:nvSpPr>
         <p:spPr>
           <a:xfrm>
             <a:off x="684000" y="2016000"/>
-            <a:ext cx="1728000" cy="489600"/>
+            <a:ext cx="3816000" cy="337320"/>
           </a:xfrm>
           <a:prstGeom prst="rect">
             <a:avLst/>
@@ -2585,7 +2755,7 @@
           </a:bodyPr>
           <a:p>
             <a:r>
-              <a:rPr lang="en-US" sz="1150" b="0" u="none" strike="noStrike">
+              <a:rPr lang="en-US" sz="1120" b="0" u="none" strike="noStrike">
                 <a:solidFill>
                   <a:srgbClr val="233033"/>
                 </a:solidFill>
@@ -2593,9 +2763,9 @@
                 <a:uFillTx/>
                 <a:latin typeface="Arial"/>
               </a:rPr>
-              <a:t>Captura no intencional que compromete la supervivencia.</a:t>
-            </a:r>
-            <a:endParaRPr lang="en-US" sz="1150" b="0" u="none" strike="noStrike">
+              <a:t>La presión humana y los cambios ambientales deterioran una especie centinela del ecosistema costero.</a:t>
+            </a:r>
+            <a:endParaRPr lang="en-US" sz="1120" b="0" u="none" strike="noStrike">
               <a:solidFill>
                 <a:srgbClr val="233033"/>
               </a:solidFill>
@@ -2608,14 +2778,14 @@
       </p:sp>
       <p:sp>
         <p:nvSpPr>
-          <p:cNvPr id="45" name=""/>
-          <p:cNvSpPr/>
-          <p:nvPr/>
-        </p:nvSpPr>
-        <p:spPr>
-          <a:xfrm>
-            <a:off x="2664000" y="1512000"/>
-            <a:ext cx="1944000" cy="936000"/>
+          <p:cNvPr id="46" name=""/>
+          <p:cNvSpPr/>
+          <p:nvPr/>
+        </p:nvSpPr>
+        <p:spPr>
+          <a:xfrm>
+            <a:off x="576000" y="2592000"/>
+            <a:ext cx="4032000" cy="936000"/>
           </a:xfrm>
           <a:prstGeom prst="rect">
             <a:avLst/>
@@ -2645,14 +2815,14 @@
       </p:sp>
       <p:sp>
         <p:nvSpPr>
-          <p:cNvPr id="46" name=""/>
-          <p:cNvSpPr/>
-          <p:nvPr/>
-        </p:nvSpPr>
-        <p:spPr>
-          <a:xfrm>
-            <a:off x="2664000" y="1512000"/>
-            <a:ext cx="1944000" cy="144000"/>
+          <p:cNvPr id="47" name=""/>
+          <p:cNvSpPr/>
+          <p:nvPr/>
+        </p:nvSpPr>
+        <p:spPr>
+          <a:xfrm>
+            <a:off x="576000" y="2592000"/>
+            <a:ext cx="4032000" cy="144000"/>
           </a:xfrm>
           <a:prstGeom prst="rect">
             <a:avLst/>
@@ -2682,14 +2852,14 @@
       </p:sp>
       <p:sp>
         <p:nvSpPr>
-          <p:cNvPr id="47" name=""/>
+          <p:cNvPr id="48" name=""/>
           <p:cNvSpPr txBox="1"/>
           <p:nvPr/>
         </p:nvSpPr>
         <p:spPr>
           <a:xfrm>
-            <a:off x="2772000" y="1728000"/>
-            <a:ext cx="1728000" cy="337320"/>
+            <a:off x="684000" y="2808000"/>
+            <a:ext cx="3816000" cy="337320"/>
           </a:xfrm>
           <a:prstGeom prst="rect">
             <a:avLst/>
@@ -2705,7 +2875,7 @@
           </a:bodyPr>
           <a:p>
             <a:r>
-              <a:rPr lang="en-US" sz="1350" b="1" u="none" strike="noStrike">
+              <a:rPr lang="en-US" sz="1320" b="1" u="none" strike="noStrike">
                 <a:solidFill>
                   <a:srgbClr val="1F4D3E"/>
                 </a:solidFill>
@@ -2713,9 +2883,9 @@
                 <a:uFillTx/>
                 <a:latin typeface="Times New Roman"/>
               </a:rPr>
-              <a:t>Basura marina</a:t>
-            </a:r>
-            <a:endParaRPr lang="en-US" sz="1350" b="1" u="none" strike="noStrike">
+              <a:t>Marco ONU</a:t>
+            </a:r>
+            <a:endParaRPr lang="en-US" sz="1320" b="1" u="none" strike="noStrike">
               <a:solidFill>
                 <a:srgbClr val="1F4D3E"/>
               </a:solidFill>
@@ -2728,14 +2898,14 @@
       </p:sp>
       <p:sp>
         <p:nvSpPr>
-          <p:cNvPr id="48" name=""/>
+          <p:cNvPr id="49" name=""/>
           <p:cNvSpPr txBox="1"/>
           <p:nvPr/>
         </p:nvSpPr>
         <p:spPr>
           <a:xfrm>
-            <a:off x="2772000" y="2016000"/>
-            <a:ext cx="1728000" cy="337320"/>
+            <a:off x="684000" y="3096000"/>
+            <a:ext cx="3816000" cy="337320"/>
           </a:xfrm>
           <a:prstGeom prst="rect">
             <a:avLst/>
@@ -2751,7 +2921,7 @@
           </a:bodyPr>
           <a:p>
             <a:r>
-              <a:rPr lang="en-US" sz="1150" b="0" u="none" strike="noStrike">
+              <a:rPr lang="en-US" sz="1120" b="0" u="none" strike="noStrike">
                 <a:solidFill>
                   <a:srgbClr val="233033"/>
                 </a:solidFill>
@@ -2759,9 +2929,9 @@
                 <a:uFillTx/>
                 <a:latin typeface="Arial"/>
               </a:rPr>
-              <a:t>Plásticos y redes alteran hábitat y movilidad.</a:t>
-            </a:r>
-            <a:endParaRPr lang="en-US" sz="1150" b="0" u="none" strike="noStrike">
+              <a:t>El caso se conecta directamente con el ODS 14: proteger océanos, recursos marinos y ecosistemas costeros.</a:t>
+            </a:r>
+            <a:endParaRPr lang="en-US" sz="1120" b="0" u="none" strike="noStrike">
               <a:solidFill>
                 <a:srgbClr val="233033"/>
               </a:solidFill>
@@ -2774,14 +2944,14 @@
       </p:sp>
       <p:sp>
         <p:nvSpPr>
-          <p:cNvPr id="49" name=""/>
-          <p:cNvSpPr/>
-          <p:nvPr/>
-        </p:nvSpPr>
-        <p:spPr>
-          <a:xfrm>
-            <a:off x="576000" y="2592000"/>
-            <a:ext cx="1944000" cy="936000"/>
+          <p:cNvPr id="50" name=""/>
+          <p:cNvSpPr/>
+          <p:nvPr/>
+        </p:nvSpPr>
+        <p:spPr>
+          <a:xfrm>
+            <a:off x="576000" y="3672000"/>
+            <a:ext cx="4032000" cy="1080000"/>
           </a:xfrm>
           <a:prstGeom prst="rect">
             <a:avLst/>
@@ -2811,14 +2981,14 @@
       </p:sp>
       <p:sp>
         <p:nvSpPr>
-          <p:cNvPr id="50" name=""/>
-          <p:cNvSpPr/>
-          <p:nvPr/>
-        </p:nvSpPr>
-        <p:spPr>
-          <a:xfrm>
-            <a:off x="576000" y="2592000"/>
-            <a:ext cx="1944000" cy="144000"/>
+          <p:cNvPr id="51" name=""/>
+          <p:cNvSpPr/>
+          <p:nvPr/>
+        </p:nvSpPr>
+        <p:spPr>
+          <a:xfrm>
+            <a:off x="576000" y="3672000"/>
+            <a:ext cx="4032000" cy="144000"/>
           </a:xfrm>
           <a:prstGeom prst="rect">
             <a:avLst/>
@@ -2848,14 +3018,14 @@
       </p:sp>
       <p:sp>
         <p:nvSpPr>
-          <p:cNvPr id="51" name=""/>
+          <p:cNvPr id="52" name=""/>
           <p:cNvSpPr txBox="1"/>
           <p:nvPr/>
         </p:nvSpPr>
         <p:spPr>
           <a:xfrm>
-            <a:off x="684000" y="2808000"/>
-            <a:ext cx="1728000" cy="337320"/>
+            <a:off x="684000" y="3888000"/>
+            <a:ext cx="3816000" cy="337320"/>
           </a:xfrm>
           <a:prstGeom prst="rect">
             <a:avLst/>
@@ -2871,7 +3041,7 @@
           </a:bodyPr>
           <a:p>
             <a:r>
-              <a:rPr lang="en-US" sz="1350" b="1" u="none" strike="noStrike">
+              <a:rPr lang="en-US" sz="1320" b="1" u="none" strike="noStrike">
                 <a:solidFill>
                   <a:srgbClr val="1F4D3E"/>
                 </a:solidFill>
@@ -2879,9 +3049,9 @@
                 <a:uFillTx/>
                 <a:latin typeface="Times New Roman"/>
               </a:rPr>
-              <a:t>Turismo no regulado</a:t>
-            </a:r>
-            <a:endParaRPr lang="en-US" sz="1350" b="1" u="none" strike="noStrike">
+              <a:t>Pregunta y tesis</a:t>
+            </a:r>
+            <a:endParaRPr lang="en-US" sz="1320" b="1" u="none" strike="noStrike">
               <a:solidFill>
                 <a:srgbClr val="1F4D3E"/>
               </a:solidFill>
@@ -2894,14 +3064,14 @@
       </p:sp>
       <p:sp>
         <p:nvSpPr>
-          <p:cNvPr id="52" name=""/>
+          <p:cNvPr id="53" name=""/>
           <p:cNvSpPr txBox="1"/>
           <p:nvPr/>
         </p:nvSpPr>
         <p:spPr>
           <a:xfrm>
-            <a:off x="684000" y="3096000"/>
-            <a:ext cx="1728000" cy="337320"/>
+            <a:off x="684000" y="4176000"/>
+            <a:ext cx="3816000" cy="609480"/>
           </a:xfrm>
           <a:prstGeom prst="rect">
             <a:avLst/>
@@ -2917,7 +3087,7 @@
           </a:bodyPr>
           <a:p>
             <a:r>
-              <a:rPr lang="en-US" sz="1150" b="0" u="none" strike="noStrike">
+              <a:rPr lang="en-US" sz="1070" b="0" u="none" strike="noStrike">
                 <a:solidFill>
                   <a:srgbClr val="233033"/>
                 </a:solidFill>
@@ -2925,9 +3095,9 @@
                 <a:uFillTx/>
                 <a:latin typeface="Arial"/>
               </a:rPr>
-              <a:t>Interfiere con colonias y sitios de nidificación.</a:t>
-            </a:r>
-            <a:endParaRPr lang="en-US" sz="1150" b="0" u="none" strike="noStrike">
+              <a:t>Pregunta: ¿qué factores explican el deterioro del estado de conservación?</a:t>
+            </a:r>
+            <a:endParaRPr lang="en-US" sz="1070" b="0" u="none" strike="noStrike">
               <a:solidFill>
                 <a:srgbClr val="233033"/>
               </a:solidFill>
@@ -2936,37 +3106,21 @@
               <a:latin typeface="Arial"/>
             </a:endParaRPr>
           </a:p>
-        </p:txBody>
-      </p:sp>
-      <p:sp>
-        <p:nvSpPr>
-          <p:cNvPr id="53" name=""/>
-          <p:cNvSpPr/>
-          <p:nvPr/>
-        </p:nvSpPr>
-        <p:spPr>
-          <a:xfrm>
-            <a:off x="2664000" y="2592000"/>
-            <a:ext cx="1944000" cy="936000"/>
-          </a:xfrm>
-          <a:prstGeom prst="rect">
-            <a:avLst/>
-          </a:prstGeom>
-          <a:solidFill>
-            <a:srgbClr val="FFFFFF"/>
-          </a:solidFill>
-          <a:ln w="0">
-            <a:noFill/>
-          </a:ln>
-        </p:spPr>
-        <p:txBody>
-          <a:bodyPr lIns="90000" tIns="45000" rIns="90000" bIns="45000" anchor="ctr" anchorCtr="1">
-            <a:noAutofit/>
-          </a:bodyPr>
-          <a:p>
-            <a:endParaRPr lang="en-US" sz="1800" b="0" u="none" strike="noStrike">
-              <a:solidFill>
-                <a:srgbClr val="000000"/>
+          <a:p>
+            <a:r>
+              <a:rPr lang="en-US" sz="1070" b="0" u="none" strike="noStrike">
+                <a:solidFill>
+                  <a:srgbClr val="233033"/>
+                </a:solidFill>
+                <a:effectLst/>
+                <a:uFillTx/>
+                <a:latin typeface="Arial"/>
+              </a:rPr>
+              <a:t>Tesis: un dataset bien diseñado permite priorizar riesgos y acciones.</a:t>
+            </a:r>
+            <a:endParaRPr lang="en-US" sz="1070" b="0" u="none" strike="noStrike">
+              <a:solidFill>
+                <a:srgbClr val="233033"/>
               </a:solidFill>
               <a:effectLst/>
               <a:uFillTx/>
@@ -2983,281 +3137,14 @@
         </p:nvSpPr>
         <p:spPr>
           <a:xfrm>
-            <a:off x="2664000" y="2592000"/>
-            <a:ext cx="1944000" cy="144000"/>
-          </a:xfrm>
-          <a:prstGeom prst="rect">
-            <a:avLst/>
-          </a:prstGeom>
-          <a:solidFill>
-            <a:srgbClr val="9EB8A7"/>
-          </a:solidFill>
-          <a:ln w="0">
-            <a:noFill/>
-          </a:ln>
-        </p:spPr>
-        <p:txBody>
-          <a:bodyPr lIns="90000" tIns="45000" rIns="90000" bIns="45000" anchor="ctr" anchorCtr="1">
-            <a:noAutofit/>
-          </a:bodyPr>
-          <a:p>
-            <a:endParaRPr lang="en-US" sz="1800" b="0" u="none" strike="noStrike">
-              <a:solidFill>
-                <a:srgbClr val="000000"/>
-              </a:solidFill>
-              <a:effectLst/>
-              <a:uFillTx/>
-              <a:latin typeface="Arial"/>
-            </a:endParaRPr>
-          </a:p>
-        </p:txBody>
-      </p:sp>
-      <p:sp>
-        <p:nvSpPr>
-          <p:cNvPr id="55" name=""/>
-          <p:cNvSpPr txBox="1"/>
-          <p:nvPr/>
-        </p:nvSpPr>
-        <p:spPr>
-          <a:xfrm>
-            <a:off x="2772000" y="2808000"/>
-            <a:ext cx="1728000" cy="337320"/>
-          </a:xfrm>
-          <a:prstGeom prst="rect">
-            <a:avLst/>
-          </a:prstGeom>
-          <a:noFill/>
-          <a:ln w="0">
-            <a:noFill/>
-          </a:ln>
-        </p:spPr>
-        <p:txBody>
-          <a:bodyPr lIns="0" tIns="0" rIns="0" bIns="0" anchor="t">
-            <a:spAutoFit/>
-          </a:bodyPr>
-          <a:p>
-            <a:r>
-              <a:rPr lang="en-US" sz="1350" b="1" u="none" strike="noStrike">
-                <a:solidFill>
-                  <a:srgbClr val="1F4D3E"/>
-                </a:solidFill>
-                <a:effectLst/>
-                <a:uFillTx/>
-                <a:latin typeface="Times New Roman"/>
-              </a:rPr>
-              <a:t>Cambio climático</a:t>
-            </a:r>
-            <a:endParaRPr lang="en-US" sz="1350" b="1" u="none" strike="noStrike">
-              <a:solidFill>
-                <a:srgbClr val="1F4D3E"/>
-              </a:solidFill>
-              <a:effectLst/>
-              <a:uFillTx/>
-              <a:latin typeface="Times New Roman"/>
-            </a:endParaRPr>
-          </a:p>
-        </p:txBody>
-      </p:sp>
-      <p:sp>
-        <p:nvSpPr>
-          <p:cNvPr id="56" name=""/>
-          <p:cNvSpPr txBox="1"/>
-          <p:nvPr/>
-        </p:nvSpPr>
-        <p:spPr>
-          <a:xfrm>
-            <a:off x="2772000" y="3096000"/>
-            <a:ext cx="1728000" cy="489600"/>
-          </a:xfrm>
-          <a:prstGeom prst="rect">
-            <a:avLst/>
-          </a:prstGeom>
-          <a:noFill/>
-          <a:ln w="0">
-            <a:noFill/>
-          </a:ln>
-        </p:spPr>
-        <p:txBody>
-          <a:bodyPr lIns="0" tIns="0" rIns="0" bIns="0" anchor="t">
-            <a:spAutoFit/>
-          </a:bodyPr>
-          <a:p>
-            <a:r>
-              <a:rPr lang="en-US" sz="1150" b="0" u="none" strike="noStrike">
-                <a:solidFill>
-                  <a:srgbClr val="233033"/>
-                </a:solidFill>
-                <a:effectLst/>
-                <a:uFillTx/>
-                <a:latin typeface="Arial"/>
-              </a:rPr>
-              <a:t>El Niño altera alimento, reproducción y estabilidad.</a:t>
-            </a:r>
-            <a:endParaRPr lang="en-US" sz="1150" b="0" u="none" strike="noStrike">
-              <a:solidFill>
-                <a:srgbClr val="233033"/>
-              </a:solidFill>
-              <a:effectLst/>
-              <a:uFillTx/>
-              <a:latin typeface="Arial"/>
-            </a:endParaRPr>
-          </a:p>
-        </p:txBody>
-      </p:sp>
-      <p:sp>
-        <p:nvSpPr>
-          <p:cNvPr id="57" name=""/>
-          <p:cNvSpPr/>
-          <p:nvPr/>
-        </p:nvSpPr>
-        <p:spPr>
-          <a:xfrm>
-            <a:off x="5184000" y="1512000"/>
-            <a:ext cx="4320000" cy="1008000"/>
+            <a:off x="5400000" y="1584000"/>
+            <a:ext cx="2520000" cy="2664000"/>
           </a:xfrm>
           <a:prstGeom prst="rect">
             <a:avLst/>
           </a:prstGeom>
           <a:solidFill>
             <a:srgbClr val="E8E0CF"/>
-          </a:solidFill>
-          <a:ln w="0">
-            <a:noFill/>
-          </a:ln>
-        </p:spPr>
-        <p:txBody>
-          <a:bodyPr lIns="180000" tIns="144000" rIns="180000" bIns="108000" anchor="ctr" anchorCtr="1">
-            <a:noAutofit/>
-          </a:bodyPr>
-          <a:p>
-            <a:r>
-              <a:rPr lang="en-US" sz="1650" b="1" u="none" strike="noStrike">
-                <a:solidFill>
-                  <a:srgbClr val="153329"/>
-                </a:solidFill>
-                <a:effectLst/>
-                <a:uFillTx/>
-                <a:latin typeface="Times New Roman"/>
-              </a:rPr>
-              <a:t>Pregunta central:</a:t>
-            </a:r>
-            <a:endParaRPr lang="en-US" sz="1650" b="1" u="none" strike="noStrike">
-              <a:solidFill>
-                <a:srgbClr val="153329"/>
-              </a:solidFill>
-              <a:effectLst/>
-              <a:uFillTx/>
-              <a:latin typeface="Times New Roman"/>
-            </a:endParaRPr>
-          </a:p>
-          <a:p>
-            <a:r>
-              <a:rPr lang="en-US" sz="1650" b="1" u="none" strike="noStrike">
-                <a:solidFill>
-                  <a:srgbClr val="153329"/>
-                </a:solidFill>
-                <a:effectLst/>
-                <a:uFillTx/>
-                <a:latin typeface="Times New Roman"/>
-              </a:rPr>
-              <a:t>¿Qué factores explican el estado de conservación del pingüino de Humboldt?</a:t>
-            </a:r>
-            <a:endParaRPr lang="en-US" sz="1650" b="1" u="none" strike="noStrike">
-              <a:solidFill>
-                <a:srgbClr val="153329"/>
-              </a:solidFill>
-              <a:effectLst/>
-              <a:uFillTx/>
-              <a:latin typeface="Times New Roman"/>
-            </a:endParaRPr>
-          </a:p>
-        </p:txBody>
-      </p:sp>
-      <p:sp>
-        <p:nvSpPr>
-          <p:cNvPr id="58" name=""/>
-          <p:cNvSpPr/>
-          <p:nvPr/>
-        </p:nvSpPr>
-        <p:spPr>
-          <a:xfrm>
-            <a:off x="5184000" y="2736000"/>
-            <a:ext cx="4320000" cy="1008000"/>
-          </a:xfrm>
-          <a:prstGeom prst="rect">
-            <a:avLst/>
-          </a:prstGeom>
-          <a:solidFill>
-            <a:srgbClr val="1F4D3E"/>
-          </a:solidFill>
-          <a:ln w="0">
-            <a:noFill/>
-          </a:ln>
-        </p:spPr>
-        <p:txBody>
-          <a:bodyPr lIns="180000" tIns="144000" rIns="180000" bIns="108000" anchor="ctr" anchorCtr="1">
-            <a:noAutofit/>
-          </a:bodyPr>
-          <a:p>
-            <a:r>
-              <a:rPr lang="en-US" sz="1500" b="1" u="none" strike="noStrike">
-                <a:solidFill>
-                  <a:srgbClr val="FFFFFF"/>
-                </a:solidFill>
-                <a:effectLst/>
-                <a:uFillTx/>
-                <a:latin typeface="Arial"/>
-              </a:rPr>
-              <a:t>Objetivo:</a:t>
-            </a:r>
-            <a:endParaRPr lang="en-US" sz="1500" b="1" u="none" strike="noStrike">
-              <a:solidFill>
-                <a:srgbClr val="FFFFFF"/>
-              </a:solidFill>
-              <a:effectLst/>
-              <a:uFillTx/>
-              <a:latin typeface="Arial"/>
-            </a:endParaRPr>
-          </a:p>
-          <a:p>
-            <a:r>
-              <a:rPr lang="en-US" sz="1500" b="1" u="none" strike="noStrike">
-                <a:solidFill>
-                  <a:srgbClr val="FFFFFF"/>
-                </a:solidFill>
-                <a:effectLst/>
-                <a:uFillTx/>
-                <a:latin typeface="Arial"/>
-              </a:rPr>
-              <a:t>Analizar variables ambientales y humanas para entender su impacto en la especie.</a:t>
-            </a:r>
-            <a:endParaRPr lang="en-US" sz="1500" b="1" u="none" strike="noStrike">
-              <a:solidFill>
-                <a:srgbClr val="FFFFFF"/>
-              </a:solidFill>
-              <a:effectLst/>
-              <a:uFillTx/>
-              <a:latin typeface="Arial"/>
-            </a:endParaRPr>
-          </a:p>
-        </p:txBody>
-      </p:sp>
-      <p:sp>
-        <p:nvSpPr>
-          <p:cNvPr id="59" name=""/>
-          <p:cNvSpPr/>
-          <p:nvPr/>
-        </p:nvSpPr>
-        <p:spPr>
-          <a:xfrm>
-            <a:off x="5184000" y="4032000"/>
-            <a:ext cx="4320000" cy="720000"/>
-          </a:xfrm>
-          <a:prstGeom prst="rect">
-            <a:avLst/>
-          </a:prstGeom>
-          <a:solidFill>
-            <a:srgbClr val="DDE8E1"/>
           </a:solidFill>
           <a:ln w="0">
             <a:noFill/>
@@ -3281,7 +3168,7 @@
       </p:sp>
       <p:pic>
         <p:nvPicPr>
-          <p:cNvPr id="60" name=""/>
+          <p:cNvPr id="55" name=""/>
           <p:cNvPicPr/>
           <p:nvPr/>
         </p:nvPicPr>
@@ -3291,8 +3178,8 @@
         </p:blipFill>
         <p:spPr>
           <a:xfrm>
-            <a:off x="6727680" y="4068000"/>
-            <a:ext cx="1232280" cy="648000"/>
+            <a:off x="5665320" y="1674000"/>
+            <a:ext cx="1989000" cy="2484000"/>
           </a:xfrm>
           <a:prstGeom prst="rect">
             <a:avLst/>
@@ -3305,14 +3192,257 @@
       </p:pic>
       <p:sp>
         <p:nvSpPr>
-          <p:cNvPr id="61" name=""/>
+          <p:cNvPr id="56" name=""/>
+          <p:cNvSpPr/>
+          <p:nvPr/>
+        </p:nvSpPr>
+        <p:spPr>
+          <a:xfrm>
+            <a:off x="8064000" y="1584000"/>
+            <a:ext cx="1440000" cy="936000"/>
+          </a:xfrm>
+          <a:prstGeom prst="rect">
+            <a:avLst/>
+          </a:prstGeom>
+          <a:solidFill>
+            <a:srgbClr val="FFFFFF"/>
+          </a:solidFill>
+          <a:ln w="0">
+            <a:noFill/>
+          </a:ln>
+        </p:spPr>
+        <p:txBody>
+          <a:bodyPr lIns="108000" tIns="108000" rIns="108000" bIns="72000" anchor="ctr" anchorCtr="1">
+            <a:noAutofit/>
+          </a:bodyPr>
+          <a:p>
+            <a:r>
+              <a:rPr lang="en-US" sz="1100" b="1" u="none" strike="noStrike">
+                <a:solidFill>
+                  <a:srgbClr val="233033"/>
+                </a:solidFill>
+                <a:effectLst/>
+                <a:uFillTx/>
+                <a:latin typeface="Arial"/>
+              </a:rPr>
+              <a:t>Stakeholders:</a:t>
+            </a:r>
+            <a:endParaRPr lang="en-US" sz="1100" b="1" u="none" strike="noStrike">
+              <a:solidFill>
+                <a:srgbClr val="233033"/>
+              </a:solidFill>
+              <a:effectLst/>
+              <a:uFillTx/>
+              <a:latin typeface="Arial"/>
+            </a:endParaRPr>
+          </a:p>
+          <a:p>
+            <a:r>
+              <a:rPr lang="en-US" sz="1100" b="1" u="none" strike="noStrike">
+                <a:solidFill>
+                  <a:srgbClr val="233033"/>
+                </a:solidFill>
+                <a:effectLst/>
+                <a:uFillTx/>
+                <a:latin typeface="Arial"/>
+              </a:rPr>
+              <a:t>MMA</a:t>
+            </a:r>
+            <a:endParaRPr lang="en-US" sz="1100" b="1" u="none" strike="noStrike">
+              <a:solidFill>
+                <a:srgbClr val="233033"/>
+              </a:solidFill>
+              <a:effectLst/>
+              <a:uFillTx/>
+              <a:latin typeface="Arial"/>
+            </a:endParaRPr>
+          </a:p>
+          <a:p>
+            <a:r>
+              <a:rPr lang="en-US" sz="1100" b="1" u="none" strike="noStrike">
+                <a:solidFill>
+                  <a:srgbClr val="233033"/>
+                </a:solidFill>
+                <a:effectLst/>
+                <a:uFillTx/>
+                <a:latin typeface="Arial"/>
+              </a:rPr>
+              <a:t>CONAF</a:t>
+            </a:r>
+            <a:endParaRPr lang="en-US" sz="1100" b="1" u="none" strike="noStrike">
+              <a:solidFill>
+                <a:srgbClr val="233033"/>
+              </a:solidFill>
+              <a:effectLst/>
+              <a:uFillTx/>
+              <a:latin typeface="Arial"/>
+            </a:endParaRPr>
+          </a:p>
+          <a:p>
+            <a:r>
+              <a:rPr lang="en-US" sz="1100" b="1" u="none" strike="noStrike">
+                <a:solidFill>
+                  <a:srgbClr val="233033"/>
+                </a:solidFill>
+                <a:effectLst/>
+                <a:uFillTx/>
+                <a:latin typeface="Arial"/>
+              </a:rPr>
+              <a:t>SERNAPESCA</a:t>
+            </a:r>
+            <a:endParaRPr lang="en-US" sz="1100" b="1" u="none" strike="noStrike">
+              <a:solidFill>
+                <a:srgbClr val="233033"/>
+              </a:solidFill>
+              <a:effectLst/>
+              <a:uFillTx/>
+              <a:latin typeface="Arial"/>
+            </a:endParaRPr>
+          </a:p>
+          <a:p>
+            <a:r>
+              <a:rPr lang="en-US" sz="1100" b="1" u="none" strike="noStrike">
+                <a:solidFill>
+                  <a:srgbClr val="233033"/>
+                </a:solidFill>
+                <a:effectLst/>
+                <a:uFillTx/>
+                <a:latin typeface="Arial"/>
+              </a:rPr>
+              <a:t>ciencia</a:t>
+            </a:r>
+            <a:endParaRPr lang="en-US" sz="1100" b="1" u="none" strike="noStrike">
+              <a:solidFill>
+                <a:srgbClr val="233033"/>
+              </a:solidFill>
+              <a:effectLst/>
+              <a:uFillTx/>
+              <a:latin typeface="Arial"/>
+            </a:endParaRPr>
+          </a:p>
+          <a:p>
+            <a:r>
+              <a:rPr lang="en-US" sz="1100" b="1" u="none" strike="noStrike">
+                <a:solidFill>
+                  <a:srgbClr val="233033"/>
+                </a:solidFill>
+                <a:effectLst/>
+                <a:uFillTx/>
+                <a:latin typeface="Arial"/>
+              </a:rPr>
+              <a:t>comunidades</a:t>
+            </a:r>
+            <a:endParaRPr lang="en-US" sz="1100" b="1" u="none" strike="noStrike">
+              <a:solidFill>
+                <a:srgbClr val="233033"/>
+              </a:solidFill>
+              <a:effectLst/>
+              <a:uFillTx/>
+              <a:latin typeface="Arial"/>
+            </a:endParaRPr>
+          </a:p>
+          <a:p>
+            <a:r>
+              <a:rPr lang="en-US" sz="1100" b="1" u="none" strike="noStrike">
+                <a:solidFill>
+                  <a:srgbClr val="233033"/>
+                </a:solidFill>
+                <a:effectLst/>
+                <a:uFillTx/>
+                <a:latin typeface="Arial"/>
+              </a:rPr>
+              <a:t>turismo</a:t>
+            </a:r>
+            <a:endParaRPr lang="en-US" sz="1100" b="1" u="none" strike="noStrike">
+              <a:solidFill>
+                <a:srgbClr val="233033"/>
+              </a:solidFill>
+              <a:effectLst/>
+              <a:uFillTx/>
+              <a:latin typeface="Arial"/>
+            </a:endParaRPr>
+          </a:p>
+        </p:txBody>
+      </p:sp>
+      <p:sp>
+        <p:nvSpPr>
+          <p:cNvPr id="57" name=""/>
+          <p:cNvSpPr/>
+          <p:nvPr/>
+        </p:nvSpPr>
+        <p:spPr>
+          <a:xfrm>
+            <a:off x="8064000" y="2736000"/>
+            <a:ext cx="1440000" cy="1008000"/>
+          </a:xfrm>
+          <a:prstGeom prst="rect">
+            <a:avLst/>
+          </a:prstGeom>
+          <a:solidFill>
+            <a:srgbClr val="FFFFFF"/>
+          </a:solidFill>
+          <a:ln w="0">
+            <a:noFill/>
+          </a:ln>
+        </p:spPr>
+        <p:txBody>
+          <a:bodyPr lIns="108000" tIns="108000" rIns="108000" bIns="72000" anchor="ctr" anchorCtr="1">
+            <a:noAutofit/>
+          </a:bodyPr>
+          <a:p>
+            <a:r>
+              <a:rPr lang="en-US" sz="1020" b="0" u="none" strike="noStrike">
+                <a:solidFill>
+                  <a:srgbClr val="233033"/>
+                </a:solidFill>
+                <a:effectLst/>
+                <a:uFillTx/>
+                <a:latin typeface="Arial"/>
+              </a:rPr>
+              <a:t>Salida esperada de la fase:</a:t>
+            </a:r>
+            <a:endParaRPr lang="en-US" sz="1020" b="0" u="none" strike="noStrike">
+              <a:solidFill>
+                <a:srgbClr val="233033"/>
+              </a:solidFill>
+              <a:effectLst/>
+              <a:uFillTx/>
+              <a:latin typeface="Arial"/>
+            </a:endParaRPr>
+          </a:p>
+          <a:p>
+            <a:r>
+              <a:rPr lang="en-US" sz="1020" b="0" u="none" strike="noStrike">
+                <a:solidFill>
+                  <a:srgbClr val="233033"/>
+                </a:solidFill>
+                <a:effectLst/>
+                <a:uFillTx/>
+                <a:latin typeface="Arial"/>
+              </a:rPr>
+              <a:t>una definición clara del problema analítico y de las decisiones que la evidencia debe apoyar.</a:t>
+            </a:r>
+            <a:endParaRPr lang="en-US" sz="1020" b="0" u="none" strike="noStrike">
+              <a:solidFill>
+                <a:srgbClr val="233033"/>
+              </a:solidFill>
+              <a:effectLst/>
+              <a:uFillTx/>
+              <a:latin typeface="Arial"/>
+            </a:endParaRPr>
+          </a:p>
+        </p:txBody>
+      </p:sp>
+      <p:sp>
+        <p:nvSpPr>
+          <p:cNvPr id="58" name=""/>
           <p:cNvSpPr txBox="1"/>
           <p:nvPr/>
         </p:nvSpPr>
         <p:spPr>
           <a:xfrm>
-            <a:off x="5184000" y="4896000"/>
-            <a:ext cx="4320000" cy="337320"/>
+            <a:off x="5400000" y="4356000"/>
+            <a:ext cx="4104000" cy="337320"/>
           </a:xfrm>
           <a:prstGeom prst="rect">
             <a:avLst/>
@@ -3328,7 +3458,7 @@
           </a:bodyPr>
           <a:p>
             <a:r>
-              <a:rPr lang="en-US" sz="1050" b="0" u="none" strike="noStrike">
+              <a:rPr lang="en-US" sz="920" b="0" u="none" strike="noStrike">
                 <a:solidFill>
                   <a:srgbClr val="677776"/>
                 </a:solidFill>
@@ -3336,9 +3466,9 @@
                 <a:uFillTx/>
                 <a:latin typeface="Arial"/>
               </a:rPr>
-              <a:t>Estas amenazas afectan la reproducción, la disponibilidad de alimento y la supervivencia.</a:t>
-            </a:r>
-            <a:endParaRPr lang="en-US" sz="1050" b="0" u="none" strike="noStrike">
+              <a:t>Fig. 2. Pingüinos de Humboldt adultos. Fuente: archivo de imagen provisto en el repositorio de la actividad.</a:t>
+            </a:r>
+            <a:endParaRPr lang="en-US" sz="920" b="0" u="none" strike="noStrike">
               <a:solidFill>
                 <a:srgbClr val="677776"/>
               </a:solidFill>
@@ -3381,7 +3511,7 @@
       </p:grpSpPr>
       <p:sp>
         <p:nvSpPr>
-          <p:cNvPr id="62" name=""/>
+          <p:cNvPr id="59" name=""/>
           <p:cNvSpPr/>
           <p:nvPr/>
         </p:nvSpPr>
@@ -3418,7 +3548,7 @@
       </p:sp>
       <p:sp>
         <p:nvSpPr>
-          <p:cNvPr id="63" name=""/>
+          <p:cNvPr id="60" name=""/>
           <p:cNvSpPr/>
           <p:nvPr/>
         </p:nvSpPr>
@@ -3455,7 +3585,7 @@
       </p:sp>
       <p:sp>
         <p:nvSpPr>
-          <p:cNvPr id="64" name=""/>
+          <p:cNvPr id="61" name=""/>
           <p:cNvSpPr/>
           <p:nvPr/>
         </p:nvSpPr>
@@ -3492,14 +3622,152 @@
       </p:sp>
       <p:sp>
         <p:nvSpPr>
+          <p:cNvPr id="62" name=""/>
+          <p:cNvSpPr txBox="1"/>
+          <p:nvPr/>
+        </p:nvSpPr>
+        <p:spPr>
+          <a:xfrm>
+            <a:off x="576000" y="432000"/>
+            <a:ext cx="5400000" cy="337320"/>
+          </a:xfrm>
+          <a:prstGeom prst="rect">
+            <a:avLst/>
+          </a:prstGeom>
+          <a:noFill/>
+          <a:ln w="0">
+            <a:noFill/>
+          </a:ln>
+        </p:spPr>
+        <p:txBody>
+          <a:bodyPr lIns="0" tIns="0" rIns="0" bIns="0" anchor="t">
+            <a:spAutoFit/>
+          </a:bodyPr>
+          <a:p>
+            <a:r>
+              <a:rPr lang="en-US" sz="900" b="1" u="none" strike="noStrike">
+                <a:solidFill>
+                  <a:srgbClr val="2D6A6A"/>
+                </a:solidFill>
+                <a:effectLst/>
+                <a:uFillTx/>
+                <a:latin typeface="Arial"/>
+              </a:rPr>
+              <a:t>FASE 2 | COMPRENSIÓN DE LOS DATOS</a:t>
+            </a:r>
+            <a:endParaRPr lang="en-US" sz="900" b="1" u="none" strike="noStrike">
+              <a:solidFill>
+                <a:srgbClr val="2D6A6A"/>
+              </a:solidFill>
+              <a:effectLst/>
+              <a:uFillTx/>
+              <a:latin typeface="Arial"/>
+            </a:endParaRPr>
+          </a:p>
+        </p:txBody>
+      </p:sp>
+      <p:sp>
+        <p:nvSpPr>
+          <p:cNvPr id="63" name=""/>
+          <p:cNvSpPr txBox="1"/>
+          <p:nvPr/>
+        </p:nvSpPr>
+        <p:spPr>
+          <a:xfrm>
+            <a:off x="576000" y="720000"/>
+            <a:ext cx="7560000" cy="337320"/>
+          </a:xfrm>
+          <a:prstGeom prst="rect">
+            <a:avLst/>
+          </a:prstGeom>
+          <a:noFill/>
+          <a:ln w="0">
+            <a:noFill/>
+          </a:ln>
+        </p:spPr>
+        <p:txBody>
+          <a:bodyPr lIns="0" tIns="0" rIns="0" bIns="0" anchor="t">
+            <a:spAutoFit/>
+          </a:bodyPr>
+          <a:p>
+            <a:r>
+              <a:rPr lang="en-US" sz="2200" b="1" u="none" strike="noStrike">
+                <a:solidFill>
+                  <a:srgbClr val="1F4D3E"/>
+                </a:solidFill>
+                <a:effectLst/>
+                <a:uFillTx/>
+                <a:latin typeface="Times New Roman"/>
+              </a:rPr>
+              <a:t>Qué dataset se necesita y qué variables lo componen</a:t>
+            </a:r>
+            <a:endParaRPr lang="en-US" sz="2200" b="1" u="none" strike="noStrike">
+              <a:solidFill>
+                <a:srgbClr val="1F4D3E"/>
+              </a:solidFill>
+              <a:effectLst/>
+              <a:uFillTx/>
+              <a:latin typeface="Times New Roman"/>
+            </a:endParaRPr>
+          </a:p>
+        </p:txBody>
+      </p:sp>
+      <p:sp>
+        <p:nvSpPr>
+          <p:cNvPr id="64" name=""/>
+          <p:cNvSpPr txBox="1"/>
+          <p:nvPr/>
+        </p:nvSpPr>
+        <p:spPr>
+          <a:xfrm>
+            <a:off x="9108000" y="5274000"/>
+            <a:ext cx="432000" cy="337320"/>
+          </a:xfrm>
+          <a:prstGeom prst="rect">
+            <a:avLst/>
+          </a:prstGeom>
+          <a:noFill/>
+          <a:ln w="0">
+            <a:noFill/>
+          </a:ln>
+        </p:spPr>
+        <p:txBody>
+          <a:bodyPr lIns="0" tIns="0" rIns="0" bIns="0" anchor="t">
+            <a:spAutoFit/>
+          </a:bodyPr>
+          <a:p>
+            <a:r>
+              <a:rPr lang="en-US" sz="900" b="0" u="none" strike="noStrike">
+                <a:solidFill>
+                  <a:srgbClr val="677776"/>
+                </a:solidFill>
+                <a:effectLst/>
+                <a:uFillTx/>
+                <a:latin typeface="Arial"/>
+              </a:rPr>
+              <a:t>04</a:t>
+            </a:r>
+            <a:endParaRPr lang="en-US" sz="900" b="0" u="none" strike="noStrike">
+              <a:solidFill>
+                <a:srgbClr val="677776"/>
+              </a:solidFill>
+              <a:effectLst/>
+              <a:uFillTx/>
+              <a:latin typeface="Arial"/>
+            </a:endParaRPr>
+          </a:p>
+        </p:txBody>
+      </p:sp>
+      <p:sp>
+        <p:nvSpPr>
           <p:cNvPr id="65" name=""/>
           <p:cNvSpPr txBox="1"/>
           <p:nvPr/>
         </p:nvSpPr>
         <p:spPr>
           <a:xfrm>
-            <a:off x="576000" y="432000"/>
-            <a:ext cx="4320000" cy="337320"/>
+            <a:off x="576000" y="1368000"/>
+            <a:ext cx="6840000" cy="341640"/>
           </a:xfrm>
           <a:prstGeom prst="rect">
             <a:avLst/>
@@ -3515,19 +3783,19 @@
           </a:bodyPr>
           <a:p>
             <a:r>
-              <a:rPr lang="en-US" sz="900" b="1" u="none" strike="noStrike">
-                <a:solidFill>
-                  <a:srgbClr val="2D6A6A"/>
-                </a:solidFill>
-                <a:effectLst/>
-                <a:uFillTx/>
-                <a:latin typeface="Arial"/>
-              </a:rPr>
-              <a:t>3. BIOLOGÍA DE LA ESPECIE</a:t>
-            </a:r>
-            <a:endParaRPr lang="en-US" sz="900" b="1" u="none" strike="noStrike">
-              <a:solidFill>
-                <a:srgbClr val="2D6A6A"/>
+              <a:rPr lang="en-US" sz="1200" b="0" u="none" strike="noStrike">
+                <a:solidFill>
+                  <a:srgbClr val="677776"/>
+                </a:solidFill>
+                <a:effectLst/>
+                <a:uFillTx/>
+                <a:latin typeface="Arial"/>
+              </a:rPr>
+              <a:t>En esta fase se identifican las fuentes potenciales, las variables relevantes y los indicadores que representarán el estado de la especie.</a:t>
+            </a:r>
+            <a:endParaRPr lang="en-US" sz="1200" b="0" u="none" strike="noStrike">
+              <a:solidFill>
+                <a:srgbClr val="677776"/>
               </a:solidFill>
               <a:effectLst/>
               <a:uFillTx/>
@@ -3539,13 +3807,87 @@
       <p:sp>
         <p:nvSpPr>
           <p:cNvPr id="66" name=""/>
+          <p:cNvSpPr/>
+          <p:nvPr/>
+        </p:nvSpPr>
+        <p:spPr>
+          <a:xfrm>
+            <a:off x="576000" y="1944000"/>
+            <a:ext cx="1656000" cy="1656000"/>
+          </a:xfrm>
+          <a:prstGeom prst="rect">
+            <a:avLst/>
+          </a:prstGeom>
+          <a:solidFill>
+            <a:srgbClr val="FFFFFF"/>
+          </a:solidFill>
+          <a:ln w="0">
+            <a:noFill/>
+          </a:ln>
+        </p:spPr>
+        <p:txBody>
+          <a:bodyPr lIns="90000" tIns="45000" rIns="90000" bIns="45000" anchor="ctr" anchorCtr="1">
+            <a:noAutofit/>
+          </a:bodyPr>
+          <a:p>
+            <a:endParaRPr lang="en-US" sz="1800" b="0" u="none" strike="noStrike">
+              <a:solidFill>
+                <a:srgbClr val="000000"/>
+              </a:solidFill>
+              <a:effectLst/>
+              <a:uFillTx/>
+              <a:latin typeface="Arial"/>
+            </a:endParaRPr>
+          </a:p>
+        </p:txBody>
+      </p:sp>
+      <p:sp>
+        <p:nvSpPr>
+          <p:cNvPr id="67" name=""/>
+          <p:cNvSpPr/>
+          <p:nvPr/>
+        </p:nvSpPr>
+        <p:spPr>
+          <a:xfrm>
+            <a:off x="576000" y="1944000"/>
+            <a:ext cx="1656000" cy="144000"/>
+          </a:xfrm>
+          <a:prstGeom prst="rect">
+            <a:avLst/>
+          </a:prstGeom>
+          <a:solidFill>
+            <a:srgbClr val="1F4D3E"/>
+          </a:solidFill>
+          <a:ln w="0">
+            <a:noFill/>
+          </a:ln>
+        </p:spPr>
+        <p:txBody>
+          <a:bodyPr lIns="90000" tIns="45000" rIns="90000" bIns="45000" anchor="ctr" anchorCtr="1">
+            <a:noAutofit/>
+          </a:bodyPr>
+          <a:p>
+            <a:endParaRPr lang="en-US" sz="1800" b="0" u="none" strike="noStrike">
+              <a:solidFill>
+                <a:srgbClr val="FFFFFF"/>
+              </a:solidFill>
+              <a:effectLst/>
+              <a:uFillTx/>
+              <a:latin typeface="Arial"/>
+            </a:endParaRPr>
+          </a:p>
+        </p:txBody>
+      </p:sp>
+      <p:sp>
+        <p:nvSpPr>
+          <p:cNvPr id="68" name=""/>
           <p:cNvSpPr txBox="1"/>
           <p:nvPr/>
         </p:nvSpPr>
         <p:spPr>
           <a:xfrm>
-            <a:off x="576000" y="720000"/>
-            <a:ext cx="6840000" cy="337320"/>
+            <a:off x="684000" y="2160000"/>
+            <a:ext cx="1440000" cy="337320"/>
           </a:xfrm>
           <a:prstGeom prst="rect">
             <a:avLst/>
@@ -3561,7 +3903,7 @@
           </a:bodyPr>
           <a:p>
             <a:r>
-              <a:rPr lang="en-US" sz="2200" b="1" u="none" strike="noStrike">
+              <a:rPr lang="en-US" sz="1320" b="1" u="none" strike="noStrike">
                 <a:solidFill>
                   <a:srgbClr val="1F4D3E"/>
                 </a:solidFill>
@@ -3569,9 +3911,9 @@
                 <a:uFillTx/>
                 <a:latin typeface="Times New Roman"/>
               </a:rPr>
-              <a:t>Variables biológicas que sostienen el análisis</a:t>
-            </a:r>
-            <a:endParaRPr lang="en-US" sz="2200" b="1" u="none" strike="noStrike">
+              <a:t>Hábitat</a:t>
+            </a:r>
+            <a:endParaRPr lang="en-US" sz="1320" b="1" u="none" strike="noStrike">
               <a:solidFill>
                 <a:srgbClr val="1F4D3E"/>
               </a:solidFill>
@@ -3584,14 +3926,14 @@
       </p:sp>
       <p:sp>
         <p:nvSpPr>
-          <p:cNvPr id="67" name=""/>
+          <p:cNvPr id="69" name=""/>
           <p:cNvSpPr txBox="1"/>
           <p:nvPr/>
         </p:nvSpPr>
         <p:spPr>
           <a:xfrm>
-            <a:off x="9108000" y="5274000"/>
-            <a:ext cx="432000" cy="337320"/>
+            <a:off x="684000" y="2448000"/>
+            <a:ext cx="1440000" cy="444240"/>
           </a:xfrm>
           <a:prstGeom prst="rect">
             <a:avLst/>
@@ -3607,37 +3949,79 @@
           </a:bodyPr>
           <a:p>
             <a:r>
-              <a:rPr lang="en-US" sz="900" b="0" u="none" strike="noStrike">
-                <a:solidFill>
-                  <a:srgbClr val="677776"/>
-                </a:solidFill>
-                <a:effectLst/>
-                <a:uFillTx/>
-                <a:latin typeface="Arial"/>
-              </a:rPr>
-              <a:t>04</a:t>
-            </a:r>
-            <a:endParaRPr lang="en-US" sz="900" b="0" u="none" strike="noStrike">
-              <a:solidFill>
-                <a:srgbClr val="677776"/>
-              </a:solidFill>
-              <a:effectLst/>
-              <a:uFillTx/>
-              <a:latin typeface="Arial"/>
-            </a:endParaRPr>
-          </a:p>
-        </p:txBody>
-      </p:sp>
-      <p:sp>
-        <p:nvSpPr>
-          <p:cNvPr id="68" name=""/>
-          <p:cNvSpPr/>
-          <p:nvPr/>
-        </p:nvSpPr>
-        <p:spPr>
-          <a:xfrm>
-            <a:off x="576000" y="1512000"/>
-            <a:ext cx="4248000" cy="1224000"/>
+              <a:rPr lang="en-US" sz="1050" b="0" u="none" strike="noStrike">
+                <a:solidFill>
+                  <a:srgbClr val="233033"/>
+                </a:solidFill>
+                <a:effectLst/>
+                <a:uFillTx/>
+                <a:latin typeface="Arial"/>
+              </a:rPr>
+              <a:t>colonias</a:t>
+            </a:r>
+            <a:endParaRPr lang="en-US" sz="1050" b="0" u="none" strike="noStrike">
+              <a:solidFill>
+                <a:srgbClr val="233033"/>
+              </a:solidFill>
+              <a:effectLst/>
+              <a:uFillTx/>
+              <a:latin typeface="Arial"/>
+            </a:endParaRPr>
+          </a:p>
+          <a:p>
+            <a:r>
+              <a:rPr lang="en-US" sz="1050" b="0" u="none" strike="noStrike">
+                <a:solidFill>
+                  <a:srgbClr val="233033"/>
+                </a:solidFill>
+                <a:effectLst/>
+                <a:uFillTx/>
+                <a:latin typeface="Arial"/>
+              </a:rPr>
+              <a:t>ubicación</a:t>
+            </a:r>
+            <a:endParaRPr lang="en-US" sz="1050" b="0" u="none" strike="noStrike">
+              <a:solidFill>
+                <a:srgbClr val="233033"/>
+              </a:solidFill>
+              <a:effectLst/>
+              <a:uFillTx/>
+              <a:latin typeface="Arial"/>
+            </a:endParaRPr>
+          </a:p>
+          <a:p>
+            <a:r>
+              <a:rPr lang="en-US" sz="1050" b="0" u="none" strike="noStrike">
+                <a:solidFill>
+                  <a:srgbClr val="233033"/>
+                </a:solidFill>
+                <a:effectLst/>
+                <a:uFillTx/>
+                <a:latin typeface="Arial"/>
+              </a:rPr>
+              <a:t>región</a:t>
+            </a:r>
+            <a:endParaRPr lang="en-US" sz="1050" b="0" u="none" strike="noStrike">
+              <a:solidFill>
+                <a:srgbClr val="233033"/>
+              </a:solidFill>
+              <a:effectLst/>
+              <a:uFillTx/>
+              <a:latin typeface="Arial"/>
+            </a:endParaRPr>
+          </a:p>
+        </p:txBody>
+      </p:sp>
+      <p:sp>
+        <p:nvSpPr>
+          <p:cNvPr id="70" name=""/>
+          <p:cNvSpPr/>
+          <p:nvPr/>
+        </p:nvSpPr>
+        <p:spPr>
+          <a:xfrm>
+            <a:off x="2376000" y="1944000"/>
+            <a:ext cx="1656000" cy="1656000"/>
           </a:xfrm>
           <a:prstGeom prst="rect">
             <a:avLst/>
@@ -3667,20 +4051,20 @@
       </p:sp>
       <p:sp>
         <p:nvSpPr>
-          <p:cNvPr id="69" name=""/>
-          <p:cNvSpPr/>
-          <p:nvPr/>
-        </p:nvSpPr>
-        <p:spPr>
-          <a:xfrm>
-            <a:off x="576000" y="1512000"/>
-            <a:ext cx="4248000" cy="144000"/>
-          </a:xfrm>
-          <a:prstGeom prst="rect">
-            <a:avLst/>
-          </a:prstGeom>
-          <a:solidFill>
-            <a:srgbClr val="1F4D3E"/>
+          <p:cNvPr id="71" name=""/>
+          <p:cNvSpPr/>
+          <p:nvPr/>
+        </p:nvSpPr>
+        <p:spPr>
+          <a:xfrm>
+            <a:off x="2376000" y="1944000"/>
+            <a:ext cx="1656000" cy="144000"/>
+          </a:xfrm>
+          <a:prstGeom prst="rect">
+            <a:avLst/>
+          </a:prstGeom>
+          <a:solidFill>
+            <a:srgbClr val="2D6A6A"/>
           </a:solidFill>
           <a:ln w="0">
             <a:noFill/>
@@ -3704,14 +4088,14 @@
       </p:sp>
       <p:sp>
         <p:nvSpPr>
-          <p:cNvPr id="70" name=""/>
+          <p:cNvPr id="72" name=""/>
           <p:cNvSpPr txBox="1"/>
           <p:nvPr/>
         </p:nvSpPr>
         <p:spPr>
           <a:xfrm>
-            <a:off x="684000" y="1728000"/>
-            <a:ext cx="4032000" cy="337320"/>
+            <a:off x="2484000" y="2160000"/>
+            <a:ext cx="1440000" cy="337320"/>
           </a:xfrm>
           <a:prstGeom prst="rect">
             <a:avLst/>
@@ -3727,7 +4111,7 @@
           </a:bodyPr>
           <a:p>
             <a:r>
-              <a:rPr lang="en-US" sz="1350" b="1" u="none" strike="noStrike">
+              <a:rPr lang="en-US" sz="1320" b="1" u="none" strike="noStrike">
                 <a:solidFill>
                   <a:srgbClr val="1F4D3E"/>
                 </a:solidFill>
@@ -3737,7 +4121,7 @@
               </a:rPr>
               <a:t>Reproducción</a:t>
             </a:r>
-            <a:endParaRPr lang="en-US" sz="1350" b="1" u="none" strike="noStrike">
+            <a:endParaRPr lang="en-US" sz="1320" b="1" u="none" strike="noStrike">
               <a:solidFill>
                 <a:srgbClr val="1F4D3E"/>
               </a:solidFill>
@@ -3750,14 +4134,14 @@
       </p:sp>
       <p:sp>
         <p:nvSpPr>
-          <p:cNvPr id="71" name=""/>
+          <p:cNvPr id="73" name=""/>
           <p:cNvSpPr txBox="1"/>
           <p:nvPr/>
         </p:nvSpPr>
         <p:spPr>
           <a:xfrm>
-            <a:off x="684000" y="2016000"/>
-            <a:ext cx="4032000" cy="489600"/>
+            <a:off x="2484000" y="2448000"/>
+            <a:ext cx="1440000" cy="444240"/>
           </a:xfrm>
           <a:prstGeom prst="rect">
             <a:avLst/>
@@ -3773,7 +4157,7 @@
           </a:bodyPr>
           <a:p>
             <a:r>
-              <a:rPr lang="en-US" sz="1150" b="0" u="none" strike="noStrike">
+              <a:rPr lang="en-US" sz="1050" b="0" u="none" strike="noStrike">
                 <a:solidFill>
                   <a:srgbClr val="233033"/>
                 </a:solidFill>
@@ -3781,9 +4165,9 @@
                 <a:uFillTx/>
                 <a:latin typeface="Arial"/>
               </a:rPr>
-              <a:t>Nidificación en cuevas o guano.</a:t>
-            </a:r>
-            <a:endParaRPr lang="en-US" sz="1150" b="0" u="none" strike="noStrike">
+              <a:t>nidos activos</a:t>
+            </a:r>
+            <a:endParaRPr lang="en-US" sz="1050" b="0" u="none" strike="noStrike">
               <a:solidFill>
                 <a:srgbClr val="233033"/>
               </a:solidFill>
@@ -3794,7 +4178,7 @@
           </a:p>
           <a:p>
             <a:r>
-              <a:rPr lang="en-US" sz="1150" b="0" u="none" strike="noStrike">
+              <a:rPr lang="en-US" sz="1050" b="0" u="none" strike="noStrike">
                 <a:solidFill>
                   <a:srgbClr val="233033"/>
                 </a:solidFill>
@@ -3802,9 +4186,9 @@
                 <a:uFillTx/>
                 <a:latin typeface="Arial"/>
               </a:rPr>
-              <a:t>Cerca de 2 huevos por nidada.</a:t>
-            </a:r>
-            <a:endParaRPr lang="en-US" sz="1150" b="0" u="none" strike="noStrike">
+              <a:t>parejas</a:t>
+            </a:r>
+            <a:endParaRPr lang="en-US" sz="1050" b="0" u="none" strike="noStrike">
               <a:solidFill>
                 <a:srgbClr val="233033"/>
               </a:solidFill>
@@ -3815,7 +4199,7 @@
           </a:p>
           <a:p>
             <a:r>
-              <a:rPr lang="en-US" sz="1150" b="0" u="none" strike="noStrike">
+              <a:rPr lang="en-US" sz="1050" b="0" u="none" strike="noStrike">
                 <a:solidFill>
                   <a:srgbClr val="233033"/>
                 </a:solidFill>
@@ -3823,9 +4207,9 @@
                 <a:uFillTx/>
                 <a:latin typeface="Arial"/>
               </a:rPr>
-              <a:t>Ambos padres participan y dependen del ambiente.</a:t>
-            </a:r>
-            <a:endParaRPr lang="en-US" sz="1150" b="0" u="none" strike="noStrike">
+              <a:t>éxito reproductivo</a:t>
+            </a:r>
+            <a:endParaRPr lang="en-US" sz="1050" b="0" u="none" strike="noStrike">
               <a:solidFill>
                 <a:srgbClr val="233033"/>
               </a:solidFill>
@@ -3838,14 +4222,14 @@
       </p:sp>
       <p:sp>
         <p:nvSpPr>
-          <p:cNvPr id="72" name=""/>
-          <p:cNvSpPr/>
-          <p:nvPr/>
-        </p:nvSpPr>
-        <p:spPr>
-          <a:xfrm>
-            <a:off x="5256000" y="1512000"/>
-            <a:ext cx="4248000" cy="1224000"/>
+          <p:cNvPr id="74" name=""/>
+          <p:cNvSpPr/>
+          <p:nvPr/>
+        </p:nvSpPr>
+        <p:spPr>
+          <a:xfrm>
+            <a:off x="4176000" y="1944000"/>
+            <a:ext cx="1656000" cy="1656000"/>
           </a:xfrm>
           <a:prstGeom prst="rect">
             <a:avLst/>
@@ -3875,20 +4259,20 @@
       </p:sp>
       <p:sp>
         <p:nvSpPr>
-          <p:cNvPr id="73" name=""/>
-          <p:cNvSpPr/>
-          <p:nvPr/>
-        </p:nvSpPr>
-        <p:spPr>
-          <a:xfrm>
-            <a:off x="5256000" y="1512000"/>
-            <a:ext cx="4248000" cy="144000"/>
-          </a:xfrm>
-          <a:prstGeom prst="rect">
-            <a:avLst/>
-          </a:prstGeom>
-          <a:solidFill>
-            <a:srgbClr val="2D6A6A"/>
+          <p:cNvPr id="75" name=""/>
+          <p:cNvSpPr/>
+          <p:nvPr/>
+        </p:nvSpPr>
+        <p:spPr>
+          <a:xfrm>
+            <a:off x="4176000" y="1944000"/>
+            <a:ext cx="1656000" cy="144000"/>
+          </a:xfrm>
+          <a:prstGeom prst="rect">
+            <a:avLst/>
+          </a:prstGeom>
+          <a:solidFill>
+            <a:srgbClr val="88A97C"/>
           </a:solidFill>
           <a:ln w="0">
             <a:noFill/>
@@ -3901,25 +4285,25 @@
           <a:p>
             <a:endParaRPr lang="en-US" sz="1800" b="0" u="none" strike="noStrike">
               <a:solidFill>
-                <a:srgbClr val="FFFFFF"/>
-              </a:solidFill>
-              <a:effectLst/>
-              <a:uFillTx/>
-              <a:latin typeface="Arial"/>
-            </a:endParaRPr>
-          </a:p>
-        </p:txBody>
-      </p:sp>
-      <p:sp>
-        <p:nvSpPr>
-          <p:cNvPr id="74" name=""/>
+                <a:srgbClr val="000000"/>
+              </a:solidFill>
+              <a:effectLst/>
+              <a:uFillTx/>
+              <a:latin typeface="Arial"/>
+            </a:endParaRPr>
+          </a:p>
+        </p:txBody>
+      </p:sp>
+      <p:sp>
+        <p:nvSpPr>
+          <p:cNvPr id="76" name=""/>
           <p:cNvSpPr txBox="1"/>
           <p:nvPr/>
         </p:nvSpPr>
         <p:spPr>
           <a:xfrm>
-            <a:off x="5364000" y="1728000"/>
-            <a:ext cx="4032000" cy="337320"/>
+            <a:off x="4284000" y="2160000"/>
+            <a:ext cx="1440000" cy="337320"/>
           </a:xfrm>
           <a:prstGeom prst="rect">
             <a:avLst/>
@@ -3935,7 +4319,7 @@
           </a:bodyPr>
           <a:p>
             <a:r>
-              <a:rPr lang="en-US" sz="1350" b="1" u="none" strike="noStrike">
+              <a:rPr lang="en-US" sz="1320" b="1" u="none" strike="noStrike">
                 <a:solidFill>
                   <a:srgbClr val="1F4D3E"/>
                 </a:solidFill>
@@ -3945,7 +4329,7 @@
               </a:rPr>
               <a:t>Alimentación</a:t>
             </a:r>
-            <a:endParaRPr lang="en-US" sz="1350" b="1" u="none" strike="noStrike">
+            <a:endParaRPr lang="en-US" sz="1320" b="1" u="none" strike="noStrike">
               <a:solidFill>
                 <a:srgbClr val="1F4D3E"/>
               </a:solidFill>
@@ -3958,14 +4342,14 @@
       </p:sp>
       <p:sp>
         <p:nvSpPr>
-          <p:cNvPr id="75" name=""/>
+          <p:cNvPr id="77" name=""/>
           <p:cNvSpPr txBox="1"/>
           <p:nvPr/>
         </p:nvSpPr>
         <p:spPr>
           <a:xfrm>
-            <a:off x="5364000" y="2016000"/>
-            <a:ext cx="4032000" cy="489600"/>
+            <a:off x="4284000" y="2448000"/>
+            <a:ext cx="1440000" cy="444240"/>
           </a:xfrm>
           <a:prstGeom prst="rect">
             <a:avLst/>
@@ -3981,7 +4365,7 @@
           </a:bodyPr>
           <a:p>
             <a:r>
-              <a:rPr lang="en-US" sz="1150" b="0" u="none" strike="noStrike">
+              <a:rPr lang="en-US" sz="1050" b="0" u="none" strike="noStrike">
                 <a:solidFill>
                   <a:srgbClr val="233033"/>
                 </a:solidFill>
@@ -3989,9 +4373,9 @@
                 <a:uFillTx/>
                 <a:latin typeface="Arial"/>
               </a:rPr>
-              <a:t>Peces como anchoveta y sardina.</a:t>
-            </a:r>
-            <a:endParaRPr lang="en-US" sz="1150" b="0" u="none" strike="noStrike">
+              <a:t>presa dominante</a:t>
+            </a:r>
+            <a:endParaRPr lang="en-US" sz="1050" b="0" u="none" strike="noStrike">
               <a:solidFill>
                 <a:srgbClr val="233033"/>
               </a:solidFill>
@@ -4002,7 +4386,7 @@
           </a:p>
           <a:p>
             <a:r>
-              <a:rPr lang="en-US" sz="1150" b="0" u="none" strike="noStrike">
+              <a:rPr lang="en-US" sz="1050" b="0" u="none" strike="noStrike">
                 <a:solidFill>
                   <a:srgbClr val="233033"/>
                 </a:solidFill>
@@ -4010,9 +4394,9 @@
                 <a:uFillTx/>
                 <a:latin typeface="Arial"/>
               </a:rPr>
-              <a:t>También cefalópodos y crustáceos.</a:t>
-            </a:r>
-            <a:endParaRPr lang="en-US" sz="1150" b="0" u="none" strike="noStrike">
+              <a:t>sardina</a:t>
+            </a:r>
+            <a:endParaRPr lang="en-US" sz="1050" b="0" u="none" strike="noStrike">
               <a:solidFill>
                 <a:srgbClr val="233033"/>
               </a:solidFill>
@@ -4023,7 +4407,7 @@
           </a:p>
           <a:p>
             <a:r>
-              <a:rPr lang="en-US" sz="1150" b="0" u="none" strike="noStrike">
+              <a:rPr lang="en-US" sz="1050" b="0" u="none" strike="noStrike">
                 <a:solidFill>
                   <a:srgbClr val="233033"/>
                 </a:solidFill>
@@ -4031,9 +4415,9 @@
                 <a:uFillTx/>
                 <a:latin typeface="Arial"/>
               </a:rPr>
-              <a:t>La disponibilidad marina determina su éxito.</a:t>
-            </a:r>
-            <a:endParaRPr lang="en-US" sz="1150" b="0" u="none" strike="noStrike">
+              <a:t>anchoveta</a:t>
+            </a:r>
+            <a:endParaRPr lang="en-US" sz="1050" b="0" u="none" strike="noStrike">
               <a:solidFill>
                 <a:srgbClr val="233033"/>
               </a:solidFill>
@@ -4046,14 +4430,14 @@
       </p:sp>
       <p:sp>
         <p:nvSpPr>
-          <p:cNvPr id="76" name=""/>
-          <p:cNvSpPr/>
-          <p:nvPr/>
-        </p:nvSpPr>
-        <p:spPr>
-          <a:xfrm>
-            <a:off x="576000" y="3024000"/>
-            <a:ext cx="4248000" cy="1224000"/>
+          <p:cNvPr id="78" name=""/>
+          <p:cNvSpPr/>
+          <p:nvPr/>
+        </p:nvSpPr>
+        <p:spPr>
+          <a:xfrm>
+            <a:off x="5976000" y="1944000"/>
+            <a:ext cx="1656000" cy="1656000"/>
           </a:xfrm>
           <a:prstGeom prst="rect">
             <a:avLst/>
@@ -4083,20 +4467,20 @@
       </p:sp>
       <p:sp>
         <p:nvSpPr>
-          <p:cNvPr id="77" name=""/>
-          <p:cNvSpPr/>
-          <p:nvPr/>
-        </p:nvSpPr>
-        <p:spPr>
-          <a:xfrm>
-            <a:off x="576000" y="3024000"/>
-            <a:ext cx="4248000" cy="144000"/>
-          </a:xfrm>
-          <a:prstGeom prst="rect">
-            <a:avLst/>
-          </a:prstGeom>
-          <a:solidFill>
-            <a:srgbClr val="88A97C"/>
+          <p:cNvPr id="79" name=""/>
+          <p:cNvSpPr/>
+          <p:nvPr/>
+        </p:nvSpPr>
+        <p:spPr>
+          <a:xfrm>
+            <a:off x="5976000" y="1944000"/>
+            <a:ext cx="1656000" cy="144000"/>
+          </a:xfrm>
+          <a:prstGeom prst="rect">
+            <a:avLst/>
+          </a:prstGeom>
+          <a:solidFill>
+            <a:srgbClr val="9EB8A7"/>
           </a:solidFill>
           <a:ln w="0">
             <a:noFill/>
@@ -4120,14 +4504,14 @@
       </p:sp>
       <p:sp>
         <p:nvSpPr>
-          <p:cNvPr id="78" name=""/>
+          <p:cNvPr id="80" name=""/>
           <p:cNvSpPr txBox="1"/>
           <p:nvPr/>
         </p:nvSpPr>
         <p:spPr>
           <a:xfrm>
-            <a:off x="684000" y="3240000"/>
-            <a:ext cx="4032000" cy="337320"/>
+            <a:off x="6084000" y="2160000"/>
+            <a:ext cx="1440000" cy="337320"/>
           </a:xfrm>
           <a:prstGeom prst="rect">
             <a:avLst/>
@@ -4143,7 +4527,7 @@
           </a:bodyPr>
           <a:p>
             <a:r>
-              <a:rPr lang="en-US" sz="1350" b="1" u="none" strike="noStrike">
+              <a:rPr lang="en-US" sz="1320" b="1" u="none" strike="noStrike">
                 <a:solidFill>
                   <a:srgbClr val="1F4D3E"/>
                 </a:solidFill>
@@ -4153,7 +4537,7 @@
               </a:rPr>
               <a:t>Salud</a:t>
             </a:r>
-            <a:endParaRPr lang="en-US" sz="1350" b="1" u="none" strike="noStrike">
+            <a:endParaRPr lang="en-US" sz="1320" b="1" u="none" strike="noStrike">
               <a:solidFill>
                 <a:srgbClr val="1F4D3E"/>
               </a:solidFill>
@@ -4166,14 +4550,14 @@
       </p:sp>
       <p:sp>
         <p:nvSpPr>
-          <p:cNvPr id="79" name=""/>
+          <p:cNvPr id="81" name=""/>
           <p:cNvSpPr txBox="1"/>
           <p:nvPr/>
         </p:nvSpPr>
         <p:spPr>
           <a:xfrm>
-            <a:off x="684000" y="3528000"/>
-            <a:ext cx="4032000" cy="489600"/>
+            <a:off x="6084000" y="2448000"/>
+            <a:ext cx="1440000" cy="444240"/>
           </a:xfrm>
           <a:prstGeom prst="rect">
             <a:avLst/>
@@ -4189,7 +4573,7 @@
           </a:bodyPr>
           <a:p>
             <a:r>
-              <a:rPr lang="en-US" sz="1150" b="0" u="none" strike="noStrike">
+              <a:rPr lang="en-US" sz="1050" b="0" u="none" strike="noStrike">
                 <a:solidFill>
                   <a:srgbClr val="233033"/>
                 </a:solidFill>
@@ -4197,9 +4581,9 @@
                 <a:uFillTx/>
                 <a:latin typeface="Arial"/>
               </a:rPr>
-              <a:t>Parásitos y enfermedades como malaria aviar.</a:t>
-            </a:r>
-            <a:endParaRPr lang="en-US" sz="1150" b="0" u="none" strike="noStrike">
+              <a:t>parásitos</a:t>
+            </a:r>
+            <a:endParaRPr lang="en-US" sz="1050" b="0" u="none" strike="noStrike">
               <a:solidFill>
                 <a:srgbClr val="233033"/>
               </a:solidFill>
@@ -4210,7 +4594,7 @@
           </a:p>
           <a:p>
             <a:r>
-              <a:rPr lang="en-US" sz="1150" b="0" u="none" strike="noStrike">
+              <a:rPr lang="en-US" sz="1050" b="0" u="none" strike="noStrike">
                 <a:solidFill>
                   <a:srgbClr val="233033"/>
                 </a:solidFill>
@@ -4218,9 +4602,9 @@
                 <a:uFillTx/>
                 <a:latin typeface="Arial"/>
               </a:rPr>
-              <a:t>Existe menor disponibilidad de datos.</a:t>
-            </a:r>
-            <a:endParaRPr lang="en-US" sz="1150" b="0" u="none" strike="noStrike">
+              <a:t>enfermedades</a:t>
+            </a:r>
+            <a:endParaRPr lang="en-US" sz="1050" b="0" u="none" strike="noStrike">
               <a:solidFill>
                 <a:srgbClr val="233033"/>
               </a:solidFill>
@@ -4231,7 +4615,7 @@
           </a:p>
           <a:p>
             <a:r>
-              <a:rPr lang="en-US" sz="1150" b="0" u="none" strike="noStrike">
+              <a:rPr lang="en-US" sz="1050" b="0" u="none" strike="noStrike">
                 <a:solidFill>
                   <a:srgbClr val="233033"/>
                 </a:solidFill>
@@ -4239,9 +4623,9 @@
                 <a:uFillTx/>
                 <a:latin typeface="Arial"/>
               </a:rPr>
-              <a:t>Es una dimensión con más incertidumbre.</a:t>
-            </a:r>
-            <a:endParaRPr lang="en-US" sz="1150" b="0" u="none" strike="noStrike">
+              <a:t>datos faltantes</a:t>
+            </a:r>
+            <a:endParaRPr lang="en-US" sz="1050" b="0" u="none" strike="noStrike">
               <a:solidFill>
                 <a:srgbClr val="233033"/>
               </a:solidFill>
@@ -4254,14 +4638,14 @@
       </p:sp>
       <p:sp>
         <p:nvSpPr>
-          <p:cNvPr id="80" name=""/>
-          <p:cNvSpPr/>
-          <p:nvPr/>
-        </p:nvSpPr>
-        <p:spPr>
-          <a:xfrm>
-            <a:off x="5256000" y="3024000"/>
-            <a:ext cx="4248000" cy="1224000"/>
+          <p:cNvPr id="82" name=""/>
+          <p:cNvSpPr/>
+          <p:nvPr/>
+        </p:nvSpPr>
+        <p:spPr>
+          <a:xfrm>
+            <a:off x="7776000" y="1944000"/>
+            <a:ext cx="1656000" cy="1656000"/>
           </a:xfrm>
           <a:prstGeom prst="rect">
             <a:avLst/>
@@ -4291,20 +4675,20 @@
       </p:sp>
       <p:sp>
         <p:nvSpPr>
-          <p:cNvPr id="81" name=""/>
-          <p:cNvSpPr/>
-          <p:nvPr/>
-        </p:nvSpPr>
-        <p:spPr>
-          <a:xfrm>
-            <a:off x="5256000" y="3024000"/>
-            <a:ext cx="4248000" cy="144000"/>
-          </a:xfrm>
-          <a:prstGeom prst="rect">
-            <a:avLst/>
-          </a:prstGeom>
-          <a:solidFill>
-            <a:srgbClr val="9EB8A7"/>
+          <p:cNvPr id="83" name=""/>
+          <p:cNvSpPr/>
+          <p:nvPr/>
+        </p:nvSpPr>
+        <p:spPr>
+          <a:xfrm>
+            <a:off x="7776000" y="1944000"/>
+            <a:ext cx="1656000" cy="144000"/>
+          </a:xfrm>
+          <a:prstGeom prst="rect">
+            <a:avLst/>
+          </a:prstGeom>
+          <a:solidFill>
+            <a:srgbClr val="153329"/>
           </a:solidFill>
           <a:ln w="0">
             <a:noFill/>
@@ -4317,25 +4701,25 @@
           <a:p>
             <a:endParaRPr lang="en-US" sz="1800" b="0" u="none" strike="noStrike">
               <a:solidFill>
-                <a:srgbClr val="000000"/>
-              </a:solidFill>
-              <a:effectLst/>
-              <a:uFillTx/>
-              <a:latin typeface="Arial"/>
-            </a:endParaRPr>
-          </a:p>
-        </p:txBody>
-      </p:sp>
-      <p:sp>
-        <p:nvSpPr>
-          <p:cNvPr id="82" name=""/>
+                <a:srgbClr val="FFFFFF"/>
+              </a:solidFill>
+              <a:effectLst/>
+              <a:uFillTx/>
+              <a:latin typeface="Arial"/>
+            </a:endParaRPr>
+          </a:p>
+        </p:txBody>
+      </p:sp>
+      <p:sp>
+        <p:nvSpPr>
+          <p:cNvPr id="84" name=""/>
           <p:cNvSpPr txBox="1"/>
           <p:nvPr/>
         </p:nvSpPr>
         <p:spPr>
           <a:xfrm>
-            <a:off x="5364000" y="3240000"/>
-            <a:ext cx="4032000" cy="337320"/>
+            <a:off x="7884000" y="2160000"/>
+            <a:ext cx="1440000" cy="337320"/>
           </a:xfrm>
           <a:prstGeom prst="rect">
             <a:avLst/>
@@ -4351,7 +4735,7 @@
           </a:bodyPr>
           <a:p>
             <a:r>
-              <a:rPr lang="en-US" sz="1350" b="1" u="none" strike="noStrike">
+              <a:rPr lang="en-US" sz="1320" b="1" u="none" strike="noStrike">
                 <a:solidFill>
                   <a:srgbClr val="1F4D3E"/>
                 </a:solidFill>
@@ -4359,9 +4743,9 @@
                 <a:uFillTx/>
                 <a:latin typeface="Times New Roman"/>
               </a:rPr>
-              <a:t>Hábitat</a:t>
-            </a:r>
-            <a:endParaRPr lang="en-US" sz="1350" b="1" u="none" strike="noStrike">
+              <a:t>Amenazas</a:t>
+            </a:r>
+            <a:endParaRPr lang="en-US" sz="1320" b="1" u="none" strike="noStrike">
               <a:solidFill>
                 <a:srgbClr val="1F4D3E"/>
               </a:solidFill>
@@ -4374,14 +4758,14 @@
       </p:sp>
       <p:sp>
         <p:nvSpPr>
-          <p:cNvPr id="83" name=""/>
+          <p:cNvPr id="85" name=""/>
           <p:cNvSpPr txBox="1"/>
           <p:nvPr/>
         </p:nvSpPr>
         <p:spPr>
           <a:xfrm>
-            <a:off x="5364000" y="3528000"/>
-            <a:ext cx="4032000" cy="489600"/>
+            <a:off x="7884000" y="2448000"/>
+            <a:ext cx="1440000" cy="592200"/>
           </a:xfrm>
           <a:prstGeom prst="rect">
             <a:avLst/>
@@ -4397,7 +4781,7 @@
           </a:bodyPr>
           <a:p>
             <a:r>
-              <a:rPr lang="en-US" sz="1150" b="0" u="none" strike="noStrike">
+              <a:rPr lang="en-US" sz="1050" b="0" u="none" strike="noStrike">
                 <a:solidFill>
                   <a:srgbClr val="233033"/>
                 </a:solidFill>
@@ -4405,9 +4789,9 @@
                 <a:uFillTx/>
                 <a:latin typeface="Arial"/>
               </a:rPr>
-              <a:t>Colonias distribuidas en la costa Chile-Perú.</a:t>
-            </a:r>
-            <a:endParaRPr lang="en-US" sz="1150" b="0" u="none" strike="noStrike">
+              <a:t>pesca</a:t>
+            </a:r>
+            <a:endParaRPr lang="en-US" sz="1050" b="0" u="none" strike="noStrike">
               <a:solidFill>
                 <a:srgbClr val="233033"/>
               </a:solidFill>
@@ -4418,7 +4802,7 @@
           </a:p>
           <a:p>
             <a:r>
-              <a:rPr lang="en-US" sz="1150" b="0" u="none" strike="noStrike">
+              <a:rPr lang="en-US" sz="1050" b="0" u="none" strike="noStrike">
                 <a:solidFill>
                   <a:srgbClr val="233033"/>
                 </a:solidFill>
@@ -4426,9 +4810,9 @@
                 <a:uFillTx/>
                 <a:latin typeface="Arial"/>
               </a:rPr>
-              <a:t>Alta fidelidad a sitios de nidificación.</a:t>
-            </a:r>
-            <a:endParaRPr lang="en-US" sz="1150" b="0" u="none" strike="noStrike">
+              <a:t>basura</a:t>
+            </a:r>
+            <a:endParaRPr lang="en-US" sz="1050" b="0" u="none" strike="noStrike">
               <a:solidFill>
                 <a:srgbClr val="233033"/>
               </a:solidFill>
@@ -4439,7 +4823,7 @@
           </a:p>
           <a:p>
             <a:r>
-              <a:rPr lang="en-US" sz="1150" b="0" u="none" strike="noStrike">
+              <a:rPr lang="en-US" sz="1050" b="0" u="none" strike="noStrike">
                 <a:solidFill>
                   <a:srgbClr val="233033"/>
                 </a:solidFill>
@@ -4447,9 +4831,9 @@
                 <a:uFillTx/>
                 <a:latin typeface="Arial"/>
               </a:rPr>
-              <a:t>La localización condiciona su vulnerabilidad.</a:t>
-            </a:r>
-            <a:endParaRPr lang="en-US" sz="1150" b="0" u="none" strike="noStrike">
+              <a:t>turismo</a:t>
+            </a:r>
+            <a:endParaRPr lang="en-US" sz="1050" b="0" u="none" strike="noStrike">
               <a:solidFill>
                 <a:srgbClr val="233033"/>
               </a:solidFill>
@@ -4458,18 +4842,39 @@
               <a:latin typeface="Arial"/>
             </a:endParaRPr>
           </a:p>
-        </p:txBody>
-      </p:sp>
-      <p:sp>
-        <p:nvSpPr>
-          <p:cNvPr id="84" name=""/>
-          <p:cNvSpPr/>
-          <p:nvPr/>
-        </p:nvSpPr>
-        <p:spPr>
-          <a:xfrm>
-            <a:off x="576000" y="4536000"/>
-            <a:ext cx="8928000" cy="504000"/>
+          <a:p>
+            <a:r>
+              <a:rPr lang="en-US" sz="1050" b="0" u="none" strike="noStrike">
+                <a:solidFill>
+                  <a:srgbClr val="233033"/>
+                </a:solidFill>
+                <a:effectLst/>
+                <a:uFillTx/>
+                <a:latin typeface="Arial"/>
+              </a:rPr>
+              <a:t>El Niño</a:t>
+            </a:r>
+            <a:endParaRPr lang="en-US" sz="1050" b="0" u="none" strike="noStrike">
+              <a:solidFill>
+                <a:srgbClr val="233033"/>
+              </a:solidFill>
+              <a:effectLst/>
+              <a:uFillTx/>
+              <a:latin typeface="Arial"/>
+            </a:endParaRPr>
+          </a:p>
+        </p:txBody>
+      </p:sp>
+      <p:sp>
+        <p:nvSpPr>
+          <p:cNvPr id="86" name=""/>
+          <p:cNvSpPr/>
+          <p:nvPr/>
+        </p:nvSpPr>
+        <p:spPr>
+          <a:xfrm>
+            <a:off x="576000" y="3960000"/>
+            <a:ext cx="4248000" cy="720000"/>
           </a:xfrm>
           <a:prstGeom prst="rect">
             <a:avLst/>
@@ -4487,7 +4892,7 @@
           </a:bodyPr>
           <a:p>
             <a:r>
-              <a:rPr lang="en-US" sz="1250" b="1" u="none" strike="noStrike">
+              <a:rPr lang="en-US" sz="1150" b="1" u="none" strike="noStrike">
                 <a:solidFill>
                   <a:srgbClr val="153329"/>
                 </a:solidFill>
@@ -4495,11 +4900,101 @@
                 <a:uFillTx/>
                 <a:latin typeface="Arial"/>
               </a:rPr>
-              <a:t>Estas cuatro dimensiones justifican por qué el análisis debe vincular reproducción, alimento, salud y hábitat.</a:t>
-            </a:r>
-            <a:endParaRPr lang="en-US" sz="1250" b="1" u="none" strike="noStrike">
+              <a:t>Lenguaje técnico de la fase:</a:t>
+            </a:r>
+            <a:endParaRPr lang="en-US" sz="1150" b="1" u="none" strike="noStrike">
               <a:solidFill>
                 <a:srgbClr val="153329"/>
+              </a:solidFill>
+              <a:effectLst/>
+              <a:uFillTx/>
+              <a:latin typeface="Arial"/>
+            </a:endParaRPr>
+          </a:p>
+          <a:p>
+            <a:r>
+              <a:rPr lang="en-US" sz="1150" b="1" u="none" strike="noStrike">
+                <a:solidFill>
+                  <a:srgbClr val="153329"/>
+                </a:solidFill>
+                <a:effectLst/>
+                <a:uFillTx/>
+                <a:latin typeface="Arial"/>
+              </a:rPr>
+              <a:t>dataset, variables explicativas, variable objetivo, indicadores y calidad de datos.</a:t>
+            </a:r>
+            <a:endParaRPr lang="en-US" sz="1150" b="1" u="none" strike="noStrike">
+              <a:solidFill>
+                <a:srgbClr val="153329"/>
+              </a:solidFill>
+              <a:effectLst/>
+              <a:uFillTx/>
+              <a:latin typeface="Arial"/>
+            </a:endParaRPr>
+          </a:p>
+        </p:txBody>
+      </p:sp>
+      <p:sp>
+        <p:nvSpPr>
+          <p:cNvPr id="87" name=""/>
+          <p:cNvSpPr/>
+          <p:nvPr/>
+        </p:nvSpPr>
+        <p:spPr>
+          <a:xfrm>
+            <a:off x="5256000" y="3960000"/>
+            <a:ext cx="4248000" cy="720000"/>
+          </a:xfrm>
+          <a:prstGeom prst="rect">
+            <a:avLst/>
+          </a:prstGeom>
+          <a:solidFill>
+            <a:srgbClr val="1F4D3E"/>
+          </a:solidFill>
+          <a:ln w="0">
+            <a:noFill/>
+          </a:ln>
+        </p:spPr>
+        <p:txBody>
+          <a:bodyPr lIns="144000" tIns="108000" rIns="144000" bIns="72000" anchor="ctr" anchorCtr="1">
+            <a:noAutofit/>
+          </a:bodyPr>
+          <a:p>
+            <a:r>
+              <a:rPr lang="en-US" sz="1150" b="1" u="none" strike="noStrike">
+                <a:solidFill>
+                  <a:srgbClr val="FFFFFF"/>
+                </a:solidFill>
+                <a:effectLst/>
+                <a:uFillTx/>
+                <a:latin typeface="Arial"/>
+              </a:rPr>
+              <a:t>Transición a la siguiente fase:</a:t>
+            </a:r>
+            <a:endParaRPr lang="en-US" sz="1150" b="1" u="none" strike="noStrike">
+              <a:solidFill>
+                <a:srgbClr val="FFFFFF"/>
+              </a:solidFill>
+              <a:effectLst/>
+              <a:uFillTx/>
+              <a:latin typeface="Arial"/>
+            </a:endParaRPr>
+          </a:p>
+          <a:p>
+            <a:r>
+              <a:rPr lang="en-US" sz="1150" b="1" u="none" strike="noStrike">
+                <a:solidFill>
+                  <a:srgbClr val="FFFFFF"/>
+                </a:solidFill>
+                <a:effectLst/>
+                <a:uFillTx/>
+                <a:latin typeface="Arial"/>
+              </a:rPr>
+              <a:t>una vez entendidas las variables, se define cómo estandarizarlas y prepararlas para análisis.</a:t>
+            </a:r>
+            <a:endParaRPr lang="en-US" sz="1150" b="1" u="none" strike="noStrike">
+              <a:solidFill>
+                <a:srgbClr val="FFFFFF"/>
               </a:solidFill>
               <a:effectLst/>
               <a:uFillTx/>
@@ -4540,7 +5035,7 @@
       </p:grpSpPr>
       <p:sp>
         <p:nvSpPr>
-          <p:cNvPr id="85" name=""/>
+          <p:cNvPr id="88" name=""/>
           <p:cNvSpPr/>
           <p:nvPr/>
         </p:nvSpPr>
@@ -4577,7 +5072,7 @@
       </p:sp>
       <p:sp>
         <p:nvSpPr>
-          <p:cNvPr id="86" name=""/>
+          <p:cNvPr id="89" name=""/>
           <p:cNvSpPr/>
           <p:nvPr/>
         </p:nvSpPr>
@@ -4614,7 +5109,7 @@
       </p:sp>
       <p:sp>
         <p:nvSpPr>
-          <p:cNvPr id="87" name=""/>
+          <p:cNvPr id="90" name=""/>
           <p:cNvSpPr/>
           <p:nvPr/>
         </p:nvSpPr>
@@ -4651,14 +5146,14 @@
       </p:sp>
       <p:sp>
         <p:nvSpPr>
-          <p:cNvPr id="88" name=""/>
+          <p:cNvPr id="91" name=""/>
           <p:cNvSpPr txBox="1"/>
           <p:nvPr/>
         </p:nvSpPr>
         <p:spPr>
           <a:xfrm>
             <a:off x="576000" y="432000"/>
-            <a:ext cx="4320000" cy="337320"/>
+            <a:ext cx="5400000" cy="337320"/>
           </a:xfrm>
           <a:prstGeom prst="rect">
             <a:avLst/>
@@ -4682,7 +5177,7 @@
                 <a:uFillTx/>
                 <a:latin typeface="Arial"/>
               </a:rPr>
-              <a:t>4. COMPRENSIÓN DE LOS DATOS</a:t>
+              <a:t>FASE 3 | PREPARACIÓN DE LOS DATOS</a:t>
             </a:r>
             <a:endParaRPr lang="en-US" sz="900" b="1" u="none" strike="noStrike">
               <a:solidFill>
@@ -4697,14 +5192,14 @@
       </p:sp>
       <p:sp>
         <p:nvSpPr>
-          <p:cNvPr id="89" name=""/>
+          <p:cNvPr id="92" name=""/>
           <p:cNvSpPr txBox="1"/>
           <p:nvPr/>
         </p:nvSpPr>
         <p:spPr>
           <a:xfrm>
             <a:off x="576000" y="720000"/>
-            <a:ext cx="6840000" cy="337320"/>
+            <a:ext cx="7560000" cy="337320"/>
           </a:xfrm>
           <a:prstGeom prst="rect">
             <a:avLst/>
@@ -4728,7 +5223,7 @@
                 <a:uFillTx/>
                 <a:latin typeface="Times New Roman"/>
               </a:rPr>
-              <a:t>Cinco dimensiones para organizar la evidencia</a:t>
+              <a:t>Del registro ecológico a un dataset consistente</a:t>
             </a:r>
             <a:endParaRPr lang="en-US" sz="2200" b="1" u="none" strike="noStrike">
               <a:solidFill>
@@ -4743,7 +5238,7 @@
       </p:sp>
       <p:sp>
         <p:nvSpPr>
-          <p:cNvPr id="90" name=""/>
+          <p:cNvPr id="93" name=""/>
           <p:cNvSpPr txBox="1"/>
           <p:nvPr/>
         </p:nvSpPr>
@@ -4789,97 +5284,578 @@
       </p:sp>
       <p:sp>
         <p:nvSpPr>
-          <p:cNvPr id="91" name=""/>
-          <p:cNvSpPr txBox="1"/>
-          <p:nvPr/>
-        </p:nvSpPr>
-        <p:spPr>
-          <a:xfrm>
-            <a:off x="576000" y="1332000"/>
-            <a:ext cx="6480000" cy="341640"/>
-          </a:xfrm>
-          <a:prstGeom prst="rect">
-            <a:avLst/>
-          </a:prstGeom>
-          <a:noFill/>
-          <a:ln w="0">
-            <a:noFill/>
-          </a:ln>
-        </p:spPr>
-        <p:txBody>
-          <a:bodyPr lIns="0" tIns="0" rIns="0" bIns="0" anchor="t">
-            <a:spAutoFit/>
+          <p:cNvPr id="94" name=""/>
+          <p:cNvSpPr/>
+          <p:nvPr/>
+        </p:nvSpPr>
+        <p:spPr>
+          <a:xfrm>
+            <a:off x="576000" y="1512000"/>
+            <a:ext cx="432000" cy="576000"/>
+          </a:xfrm>
+          <a:prstGeom prst="rect">
+            <a:avLst/>
+          </a:prstGeom>
+          <a:solidFill>
+            <a:srgbClr val="1F4D3E"/>
+          </a:solidFill>
+          <a:ln w="0">
+            <a:noFill/>
+          </a:ln>
+        </p:spPr>
+        <p:txBody>
+          <a:bodyPr lIns="108000" tIns="72000" rIns="108000" bIns="72000" anchor="ctr" anchorCtr="1">
+            <a:noAutofit/>
+          </a:bodyPr>
+          <a:p>
+            <a:r>
+              <a:rPr lang="en-US" sz="1800" b="1" u="none" strike="noStrike">
+                <a:solidFill>
+                  <a:srgbClr val="FFFFFF"/>
+                </a:solidFill>
+                <a:effectLst/>
+                <a:uFillTx/>
+                <a:latin typeface="Times New Roman"/>
+              </a:rPr>
+              <a:t>1</a:t>
+            </a:r>
+            <a:endParaRPr lang="en-US" sz="1800" b="1" u="none" strike="noStrike">
+              <a:solidFill>
+                <a:srgbClr val="FFFFFF"/>
+              </a:solidFill>
+              <a:effectLst/>
+              <a:uFillTx/>
+              <a:latin typeface="Times New Roman"/>
+            </a:endParaRPr>
+          </a:p>
+        </p:txBody>
+      </p:sp>
+      <p:sp>
+        <p:nvSpPr>
+          <p:cNvPr id="95" name=""/>
+          <p:cNvSpPr/>
+          <p:nvPr/>
+        </p:nvSpPr>
+        <p:spPr>
+          <a:xfrm>
+            <a:off x="1116000" y="1512000"/>
+            <a:ext cx="2088000" cy="576000"/>
+          </a:xfrm>
+          <a:prstGeom prst="rect">
+            <a:avLst/>
+          </a:prstGeom>
+          <a:solidFill>
+            <a:srgbClr val="FFFFFF"/>
+          </a:solidFill>
+          <a:ln w="0">
+            <a:noFill/>
+          </a:ln>
+        </p:spPr>
+        <p:txBody>
+          <a:bodyPr lIns="144000" tIns="90000" rIns="144000" bIns="72000" anchor="ctr" anchorCtr="1">
+            <a:noAutofit/>
+          </a:bodyPr>
+          <a:p>
+            <a:r>
+              <a:rPr lang="en-US" sz="1100" b="1" u="none" strike="noStrike">
+                <a:solidFill>
+                  <a:srgbClr val="233033"/>
+                </a:solidFill>
+                <a:effectLst/>
+                <a:uFillTx/>
+                <a:latin typeface="Arial"/>
+              </a:rPr>
+              <a:t>Estandarizar</a:t>
+            </a:r>
+            <a:endParaRPr lang="en-US" sz="1100" b="1" u="none" strike="noStrike">
+              <a:solidFill>
+                <a:srgbClr val="233033"/>
+              </a:solidFill>
+              <a:effectLst/>
+              <a:uFillTx/>
+              <a:latin typeface="Arial"/>
+            </a:endParaRPr>
+          </a:p>
+          <a:p>
+            <a:r>
+              <a:rPr lang="en-US" sz="1100" b="1" u="none" strike="noStrike">
+                <a:solidFill>
+                  <a:srgbClr val="233033"/>
+                </a:solidFill>
+                <a:effectLst/>
+                <a:uFillTx/>
+                <a:latin typeface="Arial"/>
+              </a:rPr>
+              <a:t>colonias, regiones y fechas</a:t>
+            </a:r>
+            <a:endParaRPr lang="en-US" sz="1100" b="1" u="none" strike="noStrike">
+              <a:solidFill>
+                <a:srgbClr val="233033"/>
+              </a:solidFill>
+              <a:effectLst/>
+              <a:uFillTx/>
+              <a:latin typeface="Arial"/>
+            </a:endParaRPr>
+          </a:p>
+        </p:txBody>
+      </p:sp>
+      <p:sp>
+        <p:nvSpPr>
+          <p:cNvPr id="96" name=""/>
+          <p:cNvSpPr/>
+          <p:nvPr/>
+        </p:nvSpPr>
+        <p:spPr>
+          <a:xfrm>
+            <a:off x="576000" y="2196000"/>
+            <a:ext cx="432000" cy="576000"/>
+          </a:xfrm>
+          <a:prstGeom prst="rect">
+            <a:avLst/>
+          </a:prstGeom>
+          <a:solidFill>
+            <a:srgbClr val="1F4D3E"/>
+          </a:solidFill>
+          <a:ln w="0">
+            <a:noFill/>
+          </a:ln>
+        </p:spPr>
+        <p:txBody>
+          <a:bodyPr lIns="108000" tIns="72000" rIns="108000" bIns="72000" anchor="ctr" anchorCtr="1">
+            <a:noAutofit/>
+          </a:bodyPr>
+          <a:p>
+            <a:r>
+              <a:rPr lang="en-US" sz="1800" b="1" u="none" strike="noStrike">
+                <a:solidFill>
+                  <a:srgbClr val="FFFFFF"/>
+                </a:solidFill>
+                <a:effectLst/>
+                <a:uFillTx/>
+                <a:latin typeface="Times New Roman"/>
+              </a:rPr>
+              <a:t>2</a:t>
+            </a:r>
+            <a:endParaRPr lang="en-US" sz="1800" b="1" u="none" strike="noStrike">
+              <a:solidFill>
+                <a:srgbClr val="FFFFFF"/>
+              </a:solidFill>
+              <a:effectLst/>
+              <a:uFillTx/>
+              <a:latin typeface="Times New Roman"/>
+            </a:endParaRPr>
+          </a:p>
+        </p:txBody>
+      </p:sp>
+      <p:sp>
+        <p:nvSpPr>
+          <p:cNvPr id="97" name=""/>
+          <p:cNvSpPr/>
+          <p:nvPr/>
+        </p:nvSpPr>
+        <p:spPr>
+          <a:xfrm>
+            <a:off x="1116000" y="2196000"/>
+            <a:ext cx="2088000" cy="576000"/>
+          </a:xfrm>
+          <a:prstGeom prst="rect">
+            <a:avLst/>
+          </a:prstGeom>
+          <a:solidFill>
+            <a:srgbClr val="FFFFFF"/>
+          </a:solidFill>
+          <a:ln w="0">
+            <a:noFill/>
+          </a:ln>
+        </p:spPr>
+        <p:txBody>
+          <a:bodyPr lIns="144000" tIns="90000" rIns="144000" bIns="72000" anchor="ctr" anchorCtr="1">
+            <a:noAutofit/>
+          </a:bodyPr>
+          <a:p>
+            <a:r>
+              <a:rPr lang="en-US" sz="1100" b="1" u="none" strike="noStrike">
+                <a:solidFill>
+                  <a:srgbClr val="233033"/>
+                </a:solidFill>
+                <a:effectLst/>
+                <a:uFillTx/>
+                <a:latin typeface="Arial"/>
+              </a:rPr>
+              <a:t>Definir unidad</a:t>
+            </a:r>
+            <a:endParaRPr lang="en-US" sz="1100" b="1" u="none" strike="noStrike">
+              <a:solidFill>
+                <a:srgbClr val="233033"/>
+              </a:solidFill>
+              <a:effectLst/>
+              <a:uFillTx/>
+              <a:latin typeface="Arial"/>
+            </a:endParaRPr>
+          </a:p>
+          <a:p>
+            <a:r>
+              <a:rPr lang="en-US" sz="1100" b="1" u="none" strike="noStrike">
+                <a:solidFill>
+                  <a:srgbClr val="233033"/>
+                </a:solidFill>
+                <a:effectLst/>
+                <a:uFillTx/>
+                <a:latin typeface="Arial"/>
+              </a:rPr>
+              <a:t>dataset tipo colonia + año</a:t>
+            </a:r>
+            <a:endParaRPr lang="en-US" sz="1100" b="1" u="none" strike="noStrike">
+              <a:solidFill>
+                <a:srgbClr val="233033"/>
+              </a:solidFill>
+              <a:effectLst/>
+              <a:uFillTx/>
+              <a:latin typeface="Arial"/>
+            </a:endParaRPr>
+          </a:p>
+        </p:txBody>
+      </p:sp>
+      <p:sp>
+        <p:nvSpPr>
+          <p:cNvPr id="98" name=""/>
+          <p:cNvSpPr/>
+          <p:nvPr/>
+        </p:nvSpPr>
+        <p:spPr>
+          <a:xfrm>
+            <a:off x="576000" y="2880000"/>
+            <a:ext cx="432000" cy="576000"/>
+          </a:xfrm>
+          <a:prstGeom prst="rect">
+            <a:avLst/>
+          </a:prstGeom>
+          <a:solidFill>
+            <a:srgbClr val="1F4D3E"/>
+          </a:solidFill>
+          <a:ln w="0">
+            <a:noFill/>
+          </a:ln>
+        </p:spPr>
+        <p:txBody>
+          <a:bodyPr lIns="108000" tIns="72000" rIns="108000" bIns="72000" anchor="ctr" anchorCtr="1">
+            <a:noAutofit/>
+          </a:bodyPr>
+          <a:p>
+            <a:r>
+              <a:rPr lang="en-US" sz="1800" b="1" u="none" strike="noStrike">
+                <a:solidFill>
+                  <a:srgbClr val="FFFFFF"/>
+                </a:solidFill>
+                <a:effectLst/>
+                <a:uFillTx/>
+                <a:latin typeface="Times New Roman"/>
+              </a:rPr>
+              <a:t>3</a:t>
+            </a:r>
+            <a:endParaRPr lang="en-US" sz="1800" b="1" u="none" strike="noStrike">
+              <a:solidFill>
+                <a:srgbClr val="FFFFFF"/>
+              </a:solidFill>
+              <a:effectLst/>
+              <a:uFillTx/>
+              <a:latin typeface="Times New Roman"/>
+            </a:endParaRPr>
+          </a:p>
+        </p:txBody>
+      </p:sp>
+      <p:sp>
+        <p:nvSpPr>
+          <p:cNvPr id="99" name=""/>
+          <p:cNvSpPr/>
+          <p:nvPr/>
+        </p:nvSpPr>
+        <p:spPr>
+          <a:xfrm>
+            <a:off x="1116000" y="2880000"/>
+            <a:ext cx="2088000" cy="576000"/>
+          </a:xfrm>
+          <a:prstGeom prst="rect">
+            <a:avLst/>
+          </a:prstGeom>
+          <a:solidFill>
+            <a:srgbClr val="FFFFFF"/>
+          </a:solidFill>
+          <a:ln w="0">
+            <a:noFill/>
+          </a:ln>
+        </p:spPr>
+        <p:txBody>
+          <a:bodyPr lIns="144000" tIns="90000" rIns="144000" bIns="72000" anchor="ctr" anchorCtr="1">
+            <a:noAutofit/>
+          </a:bodyPr>
+          <a:p>
+            <a:r>
+              <a:rPr lang="en-US" sz="1100" b="1" u="none" strike="noStrike">
+                <a:solidFill>
+                  <a:srgbClr val="233033"/>
+                </a:solidFill>
+                <a:effectLst/>
+                <a:uFillTx/>
+                <a:latin typeface="Arial"/>
+              </a:rPr>
+              <a:t>Crear variables</a:t>
+            </a:r>
+            <a:endParaRPr lang="en-US" sz="1100" b="1" u="none" strike="noStrike">
+              <a:solidFill>
+                <a:srgbClr val="233033"/>
+              </a:solidFill>
+              <a:effectLst/>
+              <a:uFillTx/>
+              <a:latin typeface="Arial"/>
+            </a:endParaRPr>
+          </a:p>
+          <a:p>
+            <a:r>
+              <a:rPr lang="en-US" sz="1100" b="1" u="none" strike="noStrike">
+                <a:solidFill>
+                  <a:srgbClr val="233033"/>
+                </a:solidFill>
+                <a:effectLst/>
+                <a:uFillTx/>
+                <a:latin typeface="Arial"/>
+              </a:rPr>
+              <a:t>nidos activos, dieta, amenazas, ambiente</a:t>
+            </a:r>
+            <a:endParaRPr lang="en-US" sz="1100" b="1" u="none" strike="noStrike">
+              <a:solidFill>
+                <a:srgbClr val="233033"/>
+              </a:solidFill>
+              <a:effectLst/>
+              <a:uFillTx/>
+              <a:latin typeface="Arial"/>
+            </a:endParaRPr>
+          </a:p>
+        </p:txBody>
+      </p:sp>
+      <p:sp>
+        <p:nvSpPr>
+          <p:cNvPr id="100" name=""/>
+          <p:cNvSpPr/>
+          <p:nvPr/>
+        </p:nvSpPr>
+        <p:spPr>
+          <a:xfrm>
+            <a:off x="576000" y="3564000"/>
+            <a:ext cx="432000" cy="576000"/>
+          </a:xfrm>
+          <a:prstGeom prst="rect">
+            <a:avLst/>
+          </a:prstGeom>
+          <a:solidFill>
+            <a:srgbClr val="1F4D3E"/>
+          </a:solidFill>
+          <a:ln w="0">
+            <a:noFill/>
+          </a:ln>
+        </p:spPr>
+        <p:txBody>
+          <a:bodyPr lIns="108000" tIns="72000" rIns="108000" bIns="72000" anchor="ctr" anchorCtr="1">
+            <a:noAutofit/>
+          </a:bodyPr>
+          <a:p>
+            <a:r>
+              <a:rPr lang="en-US" sz="1800" b="1" u="none" strike="noStrike">
+                <a:solidFill>
+                  <a:srgbClr val="FFFFFF"/>
+                </a:solidFill>
+                <a:effectLst/>
+                <a:uFillTx/>
+                <a:latin typeface="Times New Roman"/>
+              </a:rPr>
+              <a:t>4</a:t>
+            </a:r>
+            <a:endParaRPr lang="en-US" sz="1800" b="1" u="none" strike="noStrike">
+              <a:solidFill>
+                <a:srgbClr val="FFFFFF"/>
+              </a:solidFill>
+              <a:effectLst/>
+              <a:uFillTx/>
+              <a:latin typeface="Times New Roman"/>
+            </a:endParaRPr>
+          </a:p>
+        </p:txBody>
+      </p:sp>
+      <p:sp>
+        <p:nvSpPr>
+          <p:cNvPr id="101" name=""/>
+          <p:cNvSpPr/>
+          <p:nvPr/>
+        </p:nvSpPr>
+        <p:spPr>
+          <a:xfrm>
+            <a:off x="1116000" y="3564000"/>
+            <a:ext cx="2088000" cy="576000"/>
+          </a:xfrm>
+          <a:prstGeom prst="rect">
+            <a:avLst/>
+          </a:prstGeom>
+          <a:solidFill>
+            <a:srgbClr val="FFFFFF"/>
+          </a:solidFill>
+          <a:ln w="0">
+            <a:noFill/>
+          </a:ln>
+        </p:spPr>
+        <p:txBody>
+          <a:bodyPr lIns="144000" tIns="90000" rIns="144000" bIns="72000" anchor="ctr" anchorCtr="1">
+            <a:noAutofit/>
+          </a:bodyPr>
+          <a:p>
+            <a:r>
+              <a:rPr lang="en-US" sz="1100" b="1" u="none" strike="noStrike">
+                <a:solidFill>
+                  <a:srgbClr val="233033"/>
+                </a:solidFill>
+                <a:effectLst/>
+                <a:uFillTx/>
+                <a:latin typeface="Arial"/>
+              </a:rPr>
+              <a:t>Construir indicadores</a:t>
+            </a:r>
+            <a:endParaRPr lang="en-US" sz="1100" b="1" u="none" strike="noStrike">
+              <a:solidFill>
+                <a:srgbClr val="233033"/>
+              </a:solidFill>
+              <a:effectLst/>
+              <a:uFillTx/>
+              <a:latin typeface="Arial"/>
+            </a:endParaRPr>
+          </a:p>
+          <a:p>
+            <a:r>
+              <a:rPr lang="en-US" sz="1100" b="1" u="none" strike="noStrike">
+                <a:solidFill>
+                  <a:srgbClr val="233033"/>
+                </a:solidFill>
+                <a:effectLst/>
+                <a:uFillTx/>
+                <a:latin typeface="Arial"/>
+              </a:rPr>
+              <a:t>presión humana y calidad del hábitat</a:t>
+            </a:r>
+            <a:endParaRPr lang="en-US" sz="1100" b="1" u="none" strike="noStrike">
+              <a:solidFill>
+                <a:srgbClr val="233033"/>
+              </a:solidFill>
+              <a:effectLst/>
+              <a:uFillTx/>
+              <a:latin typeface="Arial"/>
+            </a:endParaRPr>
+          </a:p>
+        </p:txBody>
+      </p:sp>
+      <p:sp>
+        <p:nvSpPr>
+          <p:cNvPr id="102" name=""/>
+          <p:cNvSpPr/>
+          <p:nvPr/>
+        </p:nvSpPr>
+        <p:spPr>
+          <a:xfrm>
+            <a:off x="3672000" y="1512000"/>
+            <a:ext cx="5832000" cy="792000"/>
+          </a:xfrm>
+          <a:prstGeom prst="rect">
+            <a:avLst/>
+          </a:prstGeom>
+          <a:solidFill>
+            <a:srgbClr val="E8E0CF"/>
+          </a:solidFill>
+          <a:ln w="0">
+            <a:noFill/>
+          </a:ln>
+        </p:spPr>
+        <p:txBody>
+          <a:bodyPr lIns="180000" tIns="108000" rIns="144000" bIns="72000" anchor="ctr" anchorCtr="1">
+            <a:noAutofit/>
+          </a:bodyPr>
+          <a:p>
+            <a:r>
+              <a:rPr lang="en-US" sz="1700" b="1" u="none" strike="noStrike">
+                <a:solidFill>
+                  <a:srgbClr val="153329"/>
+                </a:solidFill>
+                <a:effectLst/>
+                <a:uFillTx/>
+                <a:latin typeface="Times New Roman"/>
+              </a:rPr>
+              <a:t>Ejemplo de estructura del dataset</a:t>
+            </a:r>
+            <a:endParaRPr lang="en-US" sz="1700" b="1" u="none" strike="noStrike">
+              <a:solidFill>
+                <a:srgbClr val="153329"/>
+              </a:solidFill>
+              <a:effectLst/>
+              <a:uFillTx/>
+              <a:latin typeface="Times New Roman"/>
+            </a:endParaRPr>
+          </a:p>
+        </p:txBody>
+      </p:sp>
+      <p:sp>
+        <p:nvSpPr>
+          <p:cNvPr id="103" name=""/>
+          <p:cNvSpPr/>
+          <p:nvPr/>
+        </p:nvSpPr>
+        <p:spPr>
+          <a:xfrm>
+            <a:off x="3672000" y="2448000"/>
+            <a:ext cx="5832000" cy="1152000"/>
+          </a:xfrm>
+          <a:prstGeom prst="rect">
+            <a:avLst/>
+          </a:prstGeom>
+          <a:solidFill>
+            <a:srgbClr val="FFFFFF"/>
+          </a:solidFill>
+          <a:ln w="0">
+            <a:noFill/>
+          </a:ln>
+        </p:spPr>
+        <p:txBody>
+          <a:bodyPr lIns="180000" tIns="144000" rIns="180000" bIns="108000" anchor="ctr" anchorCtr="1">
+            <a:noAutofit/>
           </a:bodyPr>
           <a:p>
             <a:r>
               <a:rPr lang="en-US" sz="1200" b="0" u="none" strike="noStrike">
                 <a:solidFill>
-                  <a:srgbClr val="677776"/>
-                </a:solidFill>
-                <a:effectLst/>
-                <a:uFillTx/>
-                <a:latin typeface="Arial"/>
-              </a:rPr>
-              <a:t>La información puede estructurarse en una vista integrada del sistema ecológico y sus amenazas.</a:t>
+                  <a:srgbClr val="233033"/>
+                </a:solidFill>
+                <a:effectLst/>
+                <a:uFillTx/>
+                <a:latin typeface="Arial"/>
+              </a:rPr>
+              <a:t>colonia | año | nidos activos | dieta dominante | amenaza pesca | amenaza basura | indicador presión humana | condición El Niño</a:t>
             </a:r>
             <a:endParaRPr lang="en-US" sz="1200" b="0" u="none" strike="noStrike">
               <a:solidFill>
-                <a:srgbClr val="677776"/>
-              </a:solidFill>
-              <a:effectLst/>
-              <a:uFillTx/>
-              <a:latin typeface="Arial"/>
-            </a:endParaRPr>
-          </a:p>
-        </p:txBody>
-      </p:sp>
-      <p:sp>
-        <p:nvSpPr>
-          <p:cNvPr id="92" name=""/>
-          <p:cNvSpPr/>
-          <p:nvPr/>
-        </p:nvSpPr>
-        <p:spPr>
-          <a:xfrm>
-            <a:off x="576000" y="1872000"/>
-            <a:ext cx="1656000" cy="1944000"/>
-          </a:xfrm>
-          <a:prstGeom prst="rect">
-            <a:avLst/>
-          </a:prstGeom>
-          <a:solidFill>
-            <a:srgbClr val="FFFFFF"/>
-          </a:solidFill>
-          <a:ln w="0">
-            <a:noFill/>
-          </a:ln>
-        </p:spPr>
-        <p:txBody>
-          <a:bodyPr lIns="90000" tIns="45000" rIns="90000" bIns="45000" anchor="ctr" anchorCtr="1">
-            <a:noAutofit/>
-          </a:bodyPr>
-          <a:p>
-            <a:endParaRPr lang="en-US" sz="1800" b="0" u="none" strike="noStrike">
-              <a:solidFill>
-                <a:srgbClr val="000000"/>
-              </a:solidFill>
-              <a:effectLst/>
-              <a:uFillTx/>
-              <a:latin typeface="Arial"/>
-            </a:endParaRPr>
-          </a:p>
-        </p:txBody>
-      </p:sp>
-      <p:sp>
-        <p:nvSpPr>
-          <p:cNvPr id="93" name=""/>
-          <p:cNvSpPr/>
-          <p:nvPr/>
-        </p:nvSpPr>
-        <p:spPr>
-          <a:xfrm>
-            <a:off x="576000" y="1872000"/>
-            <a:ext cx="1656000" cy="144000"/>
+                <a:srgbClr val="233033"/>
+              </a:solidFill>
+              <a:effectLst/>
+              <a:uFillTx/>
+              <a:latin typeface="Arial"/>
+            </a:endParaRPr>
+          </a:p>
+        </p:txBody>
+      </p:sp>
+      <p:sp>
+        <p:nvSpPr>
+          <p:cNvPr id="104" name=""/>
+          <p:cNvSpPr/>
+          <p:nvPr/>
+        </p:nvSpPr>
+        <p:spPr>
+          <a:xfrm>
+            <a:off x="3672000" y="3816000"/>
+            <a:ext cx="5832000" cy="720000"/>
           </a:xfrm>
           <a:prstGeom prst="rect">
             <a:avLst/>
@@ -4892,11 +5868,22 @@
           </a:ln>
         </p:spPr>
         <p:txBody>
-          <a:bodyPr lIns="90000" tIns="45000" rIns="90000" bIns="45000" anchor="ctr" anchorCtr="1">
-            <a:noAutofit/>
-          </a:bodyPr>
-          <a:p>
-            <a:endParaRPr lang="en-US" sz="1800" b="0" u="none" strike="noStrike">
+          <a:bodyPr lIns="180000" tIns="108000" rIns="180000" bIns="72000" anchor="ctr" anchorCtr="1">
+            <a:noAutofit/>
+          </a:bodyPr>
+          <a:p>
+            <a:r>
+              <a:rPr lang="en-US" sz="1180" b="1" u="none" strike="noStrike">
+                <a:solidFill>
+                  <a:srgbClr val="FFFFFF"/>
+                </a:solidFill>
+                <a:effectLst/>
+                <a:uFillTx/>
+                <a:latin typeface="Arial"/>
+              </a:rPr>
+              <a:t>Criterio técnico clave:</a:t>
+            </a:r>
+            <a:endParaRPr lang="en-US" sz="1180" b="1" u="none" strike="noStrike">
               <a:solidFill>
                 <a:srgbClr val="FFFFFF"/>
               </a:solidFill>
@@ -4905,792 +5892,9 @@
               <a:latin typeface="Arial"/>
             </a:endParaRPr>
           </a:p>
-        </p:txBody>
-      </p:sp>
-      <p:sp>
-        <p:nvSpPr>
-          <p:cNvPr id="94" name=""/>
-          <p:cNvSpPr txBox="1"/>
-          <p:nvPr/>
-        </p:nvSpPr>
-        <p:spPr>
-          <a:xfrm>
-            <a:off x="684000" y="2088000"/>
-            <a:ext cx="1440000" cy="337320"/>
-          </a:xfrm>
-          <a:prstGeom prst="rect">
-            <a:avLst/>
-          </a:prstGeom>
-          <a:noFill/>
-          <a:ln w="0">
-            <a:noFill/>
-          </a:ln>
-        </p:spPr>
-        <p:txBody>
-          <a:bodyPr lIns="0" tIns="0" rIns="0" bIns="0" anchor="t">
-            <a:spAutoFit/>
-          </a:bodyPr>
-          <a:p>
-            <a:r>
-              <a:rPr lang="en-US" sz="1350" b="1" u="none" strike="noStrike">
-                <a:solidFill>
-                  <a:srgbClr val="1F4D3E"/>
-                </a:solidFill>
-                <a:effectLst/>
-                <a:uFillTx/>
-                <a:latin typeface="Times New Roman"/>
-              </a:rPr>
-              <a:t>Hábitat</a:t>
-            </a:r>
-            <a:endParaRPr lang="en-US" sz="1350" b="1" u="none" strike="noStrike">
-              <a:solidFill>
-                <a:srgbClr val="1F4D3E"/>
-              </a:solidFill>
-              <a:effectLst/>
-              <a:uFillTx/>
-              <a:latin typeface="Times New Roman"/>
-            </a:endParaRPr>
-          </a:p>
-        </p:txBody>
-      </p:sp>
-      <p:sp>
-        <p:nvSpPr>
-          <p:cNvPr id="95" name=""/>
-          <p:cNvSpPr txBox="1"/>
-          <p:nvPr/>
-        </p:nvSpPr>
-        <p:spPr>
-          <a:xfrm>
-            <a:off x="684000" y="2376000"/>
-            <a:ext cx="1440000" cy="337320"/>
-          </a:xfrm>
-          <a:prstGeom prst="rect">
-            <a:avLst/>
-          </a:prstGeom>
-          <a:noFill/>
-          <a:ln w="0">
-            <a:noFill/>
-          </a:ln>
-        </p:spPr>
-        <p:txBody>
-          <a:bodyPr lIns="0" tIns="0" rIns="0" bIns="0" anchor="t">
-            <a:spAutoFit/>
-          </a:bodyPr>
-          <a:p>
-            <a:r>
-              <a:rPr lang="en-US" sz="1080" b="0" u="none" strike="noStrike">
-                <a:solidFill>
-                  <a:srgbClr val="233033"/>
-                </a:solidFill>
-                <a:effectLst/>
-                <a:uFillTx/>
-                <a:latin typeface="Arial"/>
-              </a:rPr>
-              <a:t>Colonias, ubicación y región.</a:t>
-            </a:r>
-            <a:endParaRPr lang="en-US" sz="1080" b="0" u="none" strike="noStrike">
-              <a:solidFill>
-                <a:srgbClr val="233033"/>
-              </a:solidFill>
-              <a:effectLst/>
-              <a:uFillTx/>
-              <a:latin typeface="Arial"/>
-            </a:endParaRPr>
-          </a:p>
-        </p:txBody>
-      </p:sp>
-      <p:sp>
-        <p:nvSpPr>
-          <p:cNvPr id="96" name=""/>
-          <p:cNvSpPr/>
-          <p:nvPr/>
-        </p:nvSpPr>
-        <p:spPr>
-          <a:xfrm>
-            <a:off x="2376000" y="1872000"/>
-            <a:ext cx="1656000" cy="1944000"/>
-          </a:xfrm>
-          <a:prstGeom prst="rect">
-            <a:avLst/>
-          </a:prstGeom>
-          <a:solidFill>
-            <a:srgbClr val="FFFFFF"/>
-          </a:solidFill>
-          <a:ln w="0">
-            <a:noFill/>
-          </a:ln>
-        </p:spPr>
-        <p:txBody>
-          <a:bodyPr lIns="90000" tIns="45000" rIns="90000" bIns="45000" anchor="ctr" anchorCtr="1">
-            <a:noAutofit/>
-          </a:bodyPr>
-          <a:p>
-            <a:endParaRPr lang="en-US" sz="1800" b="0" u="none" strike="noStrike">
-              <a:solidFill>
-                <a:srgbClr val="000000"/>
-              </a:solidFill>
-              <a:effectLst/>
-              <a:uFillTx/>
-              <a:latin typeface="Arial"/>
-            </a:endParaRPr>
-          </a:p>
-        </p:txBody>
-      </p:sp>
-      <p:sp>
-        <p:nvSpPr>
-          <p:cNvPr id="97" name=""/>
-          <p:cNvSpPr/>
-          <p:nvPr/>
-        </p:nvSpPr>
-        <p:spPr>
-          <a:xfrm>
-            <a:off x="2376000" y="1872000"/>
-            <a:ext cx="1656000" cy="144000"/>
-          </a:xfrm>
-          <a:prstGeom prst="rect">
-            <a:avLst/>
-          </a:prstGeom>
-          <a:solidFill>
-            <a:srgbClr val="2D6A6A"/>
-          </a:solidFill>
-          <a:ln w="0">
-            <a:noFill/>
-          </a:ln>
-        </p:spPr>
-        <p:txBody>
-          <a:bodyPr lIns="90000" tIns="45000" rIns="90000" bIns="45000" anchor="ctr" anchorCtr="1">
-            <a:noAutofit/>
-          </a:bodyPr>
-          <a:p>
-            <a:endParaRPr lang="en-US" sz="1800" b="0" u="none" strike="noStrike">
-              <a:solidFill>
-                <a:srgbClr val="FFFFFF"/>
-              </a:solidFill>
-              <a:effectLst/>
-              <a:uFillTx/>
-              <a:latin typeface="Arial"/>
-            </a:endParaRPr>
-          </a:p>
-        </p:txBody>
-      </p:sp>
-      <p:sp>
-        <p:nvSpPr>
-          <p:cNvPr id="98" name=""/>
-          <p:cNvSpPr txBox="1"/>
-          <p:nvPr/>
-        </p:nvSpPr>
-        <p:spPr>
-          <a:xfrm>
-            <a:off x="2484000" y="2088000"/>
-            <a:ext cx="1440000" cy="337320"/>
-          </a:xfrm>
-          <a:prstGeom prst="rect">
-            <a:avLst/>
-          </a:prstGeom>
-          <a:noFill/>
-          <a:ln w="0">
-            <a:noFill/>
-          </a:ln>
-        </p:spPr>
-        <p:txBody>
-          <a:bodyPr lIns="0" tIns="0" rIns="0" bIns="0" anchor="t">
-            <a:spAutoFit/>
-          </a:bodyPr>
-          <a:p>
-            <a:r>
-              <a:rPr lang="en-US" sz="1350" b="1" u="none" strike="noStrike">
-                <a:solidFill>
-                  <a:srgbClr val="1F4D3E"/>
-                </a:solidFill>
-                <a:effectLst/>
-                <a:uFillTx/>
-                <a:latin typeface="Times New Roman"/>
-              </a:rPr>
-              <a:t>Reproducción</a:t>
-            </a:r>
-            <a:endParaRPr lang="en-US" sz="1350" b="1" u="none" strike="noStrike">
-              <a:solidFill>
-                <a:srgbClr val="1F4D3E"/>
-              </a:solidFill>
-              <a:effectLst/>
-              <a:uFillTx/>
-              <a:latin typeface="Times New Roman"/>
-            </a:endParaRPr>
-          </a:p>
-        </p:txBody>
-      </p:sp>
-      <p:sp>
-        <p:nvSpPr>
-          <p:cNvPr id="99" name=""/>
-          <p:cNvSpPr txBox="1"/>
-          <p:nvPr/>
-        </p:nvSpPr>
-        <p:spPr>
-          <a:xfrm>
-            <a:off x="2484000" y="2376000"/>
-            <a:ext cx="1440000" cy="337320"/>
-          </a:xfrm>
-          <a:prstGeom prst="rect">
-            <a:avLst/>
-          </a:prstGeom>
-          <a:noFill/>
-          <a:ln w="0">
-            <a:noFill/>
-          </a:ln>
-        </p:spPr>
-        <p:txBody>
-          <a:bodyPr lIns="0" tIns="0" rIns="0" bIns="0" anchor="t">
-            <a:spAutoFit/>
-          </a:bodyPr>
-          <a:p>
-            <a:r>
-              <a:rPr lang="en-US" sz="1080" b="0" u="none" strike="noStrike">
-                <a:solidFill>
-                  <a:srgbClr val="233033"/>
-                </a:solidFill>
-                <a:effectLst/>
-                <a:uFillTx/>
-                <a:latin typeface="Arial"/>
-              </a:rPr>
-              <a:t>Nidos activos como indicador clave.</a:t>
-            </a:r>
-            <a:endParaRPr lang="en-US" sz="1080" b="0" u="none" strike="noStrike">
-              <a:solidFill>
-                <a:srgbClr val="233033"/>
-              </a:solidFill>
-              <a:effectLst/>
-              <a:uFillTx/>
-              <a:latin typeface="Arial"/>
-            </a:endParaRPr>
-          </a:p>
-        </p:txBody>
-      </p:sp>
-      <p:sp>
-        <p:nvSpPr>
-          <p:cNvPr id="100" name=""/>
-          <p:cNvSpPr/>
-          <p:nvPr/>
-        </p:nvSpPr>
-        <p:spPr>
-          <a:xfrm>
-            <a:off x="4176000" y="1872000"/>
-            <a:ext cx="1656000" cy="1944000"/>
-          </a:xfrm>
-          <a:prstGeom prst="rect">
-            <a:avLst/>
-          </a:prstGeom>
-          <a:solidFill>
-            <a:srgbClr val="FFFFFF"/>
-          </a:solidFill>
-          <a:ln w="0">
-            <a:noFill/>
-          </a:ln>
-        </p:spPr>
-        <p:txBody>
-          <a:bodyPr lIns="90000" tIns="45000" rIns="90000" bIns="45000" anchor="ctr" anchorCtr="1">
-            <a:noAutofit/>
-          </a:bodyPr>
-          <a:p>
-            <a:endParaRPr lang="en-US" sz="1800" b="0" u="none" strike="noStrike">
-              <a:solidFill>
-                <a:srgbClr val="000000"/>
-              </a:solidFill>
-              <a:effectLst/>
-              <a:uFillTx/>
-              <a:latin typeface="Arial"/>
-            </a:endParaRPr>
-          </a:p>
-        </p:txBody>
-      </p:sp>
-      <p:sp>
-        <p:nvSpPr>
-          <p:cNvPr id="101" name=""/>
-          <p:cNvSpPr/>
-          <p:nvPr/>
-        </p:nvSpPr>
-        <p:spPr>
-          <a:xfrm>
-            <a:off x="4176000" y="1872000"/>
-            <a:ext cx="1656000" cy="144000"/>
-          </a:xfrm>
-          <a:prstGeom prst="rect">
-            <a:avLst/>
-          </a:prstGeom>
-          <a:solidFill>
-            <a:srgbClr val="88A97C"/>
-          </a:solidFill>
-          <a:ln w="0">
-            <a:noFill/>
-          </a:ln>
-        </p:spPr>
-        <p:txBody>
-          <a:bodyPr lIns="90000" tIns="45000" rIns="90000" bIns="45000" anchor="ctr" anchorCtr="1">
-            <a:noAutofit/>
-          </a:bodyPr>
-          <a:p>
-            <a:endParaRPr lang="en-US" sz="1800" b="0" u="none" strike="noStrike">
-              <a:solidFill>
-                <a:srgbClr val="000000"/>
-              </a:solidFill>
-              <a:effectLst/>
-              <a:uFillTx/>
-              <a:latin typeface="Arial"/>
-            </a:endParaRPr>
-          </a:p>
-        </p:txBody>
-      </p:sp>
-      <p:sp>
-        <p:nvSpPr>
-          <p:cNvPr id="102" name=""/>
-          <p:cNvSpPr txBox="1"/>
-          <p:nvPr/>
-        </p:nvSpPr>
-        <p:spPr>
-          <a:xfrm>
-            <a:off x="4284000" y="2088000"/>
-            <a:ext cx="1440000" cy="337320"/>
-          </a:xfrm>
-          <a:prstGeom prst="rect">
-            <a:avLst/>
-          </a:prstGeom>
-          <a:noFill/>
-          <a:ln w="0">
-            <a:noFill/>
-          </a:ln>
-        </p:spPr>
-        <p:txBody>
-          <a:bodyPr lIns="0" tIns="0" rIns="0" bIns="0" anchor="t">
-            <a:spAutoFit/>
-          </a:bodyPr>
-          <a:p>
-            <a:r>
-              <a:rPr lang="en-US" sz="1350" b="1" u="none" strike="noStrike">
-                <a:solidFill>
-                  <a:srgbClr val="1F4D3E"/>
-                </a:solidFill>
-                <a:effectLst/>
-                <a:uFillTx/>
-                <a:latin typeface="Times New Roman"/>
-              </a:rPr>
-              <a:t>Alimentación</a:t>
-            </a:r>
-            <a:endParaRPr lang="en-US" sz="1350" b="1" u="none" strike="noStrike">
-              <a:solidFill>
-                <a:srgbClr val="1F4D3E"/>
-              </a:solidFill>
-              <a:effectLst/>
-              <a:uFillTx/>
-              <a:latin typeface="Times New Roman"/>
-            </a:endParaRPr>
-          </a:p>
-        </p:txBody>
-      </p:sp>
-      <p:sp>
-        <p:nvSpPr>
-          <p:cNvPr id="103" name=""/>
-          <p:cNvSpPr txBox="1"/>
-          <p:nvPr/>
-        </p:nvSpPr>
-        <p:spPr>
-          <a:xfrm>
-            <a:off x="4284000" y="2376000"/>
-            <a:ext cx="1440000" cy="337320"/>
-          </a:xfrm>
-          <a:prstGeom prst="rect">
-            <a:avLst/>
-          </a:prstGeom>
-          <a:noFill/>
-          <a:ln w="0">
-            <a:noFill/>
-          </a:ln>
-        </p:spPr>
-        <p:txBody>
-          <a:bodyPr lIns="0" tIns="0" rIns="0" bIns="0" anchor="t">
-            <a:spAutoFit/>
-          </a:bodyPr>
-          <a:p>
-            <a:r>
-              <a:rPr lang="en-US" sz="1080" b="0" u="none" strike="noStrike">
-                <a:solidFill>
-                  <a:srgbClr val="233033"/>
-                </a:solidFill>
-                <a:effectLst/>
-                <a:uFillTx/>
-                <a:latin typeface="Arial"/>
-              </a:rPr>
-              <a:t>Tipo de presa y disponibilidad.</a:t>
-            </a:r>
-            <a:endParaRPr lang="en-US" sz="1080" b="0" u="none" strike="noStrike">
-              <a:solidFill>
-                <a:srgbClr val="233033"/>
-              </a:solidFill>
-              <a:effectLst/>
-              <a:uFillTx/>
-              <a:latin typeface="Arial"/>
-            </a:endParaRPr>
-          </a:p>
-        </p:txBody>
-      </p:sp>
-      <p:sp>
-        <p:nvSpPr>
-          <p:cNvPr id="104" name=""/>
-          <p:cNvSpPr/>
-          <p:nvPr/>
-        </p:nvSpPr>
-        <p:spPr>
-          <a:xfrm>
-            <a:off x="5976000" y="1872000"/>
-            <a:ext cx="1656000" cy="1944000"/>
-          </a:xfrm>
-          <a:prstGeom prst="rect">
-            <a:avLst/>
-          </a:prstGeom>
-          <a:solidFill>
-            <a:srgbClr val="FFFFFF"/>
-          </a:solidFill>
-          <a:ln w="0">
-            <a:noFill/>
-          </a:ln>
-        </p:spPr>
-        <p:txBody>
-          <a:bodyPr lIns="90000" tIns="45000" rIns="90000" bIns="45000" anchor="ctr" anchorCtr="1">
-            <a:noAutofit/>
-          </a:bodyPr>
-          <a:p>
-            <a:endParaRPr lang="en-US" sz="1800" b="0" u="none" strike="noStrike">
-              <a:solidFill>
-                <a:srgbClr val="000000"/>
-              </a:solidFill>
-              <a:effectLst/>
-              <a:uFillTx/>
-              <a:latin typeface="Arial"/>
-            </a:endParaRPr>
-          </a:p>
-        </p:txBody>
-      </p:sp>
-      <p:sp>
-        <p:nvSpPr>
-          <p:cNvPr id="105" name=""/>
-          <p:cNvSpPr/>
-          <p:nvPr/>
-        </p:nvSpPr>
-        <p:spPr>
-          <a:xfrm>
-            <a:off x="5976000" y="1872000"/>
-            <a:ext cx="1656000" cy="144000"/>
-          </a:xfrm>
-          <a:prstGeom prst="rect">
-            <a:avLst/>
-          </a:prstGeom>
-          <a:solidFill>
-            <a:srgbClr val="9EB8A7"/>
-          </a:solidFill>
-          <a:ln w="0">
-            <a:noFill/>
-          </a:ln>
-        </p:spPr>
-        <p:txBody>
-          <a:bodyPr lIns="90000" tIns="45000" rIns="90000" bIns="45000" anchor="ctr" anchorCtr="1">
-            <a:noAutofit/>
-          </a:bodyPr>
-          <a:p>
-            <a:endParaRPr lang="en-US" sz="1800" b="0" u="none" strike="noStrike">
-              <a:solidFill>
-                <a:srgbClr val="000000"/>
-              </a:solidFill>
-              <a:effectLst/>
-              <a:uFillTx/>
-              <a:latin typeface="Arial"/>
-            </a:endParaRPr>
-          </a:p>
-        </p:txBody>
-      </p:sp>
-      <p:sp>
-        <p:nvSpPr>
-          <p:cNvPr id="106" name=""/>
-          <p:cNvSpPr txBox="1"/>
-          <p:nvPr/>
-        </p:nvSpPr>
-        <p:spPr>
-          <a:xfrm>
-            <a:off x="6084000" y="2088000"/>
-            <a:ext cx="1440000" cy="337320"/>
-          </a:xfrm>
-          <a:prstGeom prst="rect">
-            <a:avLst/>
-          </a:prstGeom>
-          <a:noFill/>
-          <a:ln w="0">
-            <a:noFill/>
-          </a:ln>
-        </p:spPr>
-        <p:txBody>
-          <a:bodyPr lIns="0" tIns="0" rIns="0" bIns="0" anchor="t">
-            <a:spAutoFit/>
-          </a:bodyPr>
-          <a:p>
-            <a:r>
-              <a:rPr lang="en-US" sz="1350" b="1" u="none" strike="noStrike">
-                <a:solidFill>
-                  <a:srgbClr val="1F4D3E"/>
-                </a:solidFill>
-                <a:effectLst/>
-                <a:uFillTx/>
-                <a:latin typeface="Times New Roman"/>
-              </a:rPr>
-              <a:t>Salud</a:t>
-            </a:r>
-            <a:endParaRPr lang="en-US" sz="1350" b="1" u="none" strike="noStrike">
-              <a:solidFill>
-                <a:srgbClr val="1F4D3E"/>
-              </a:solidFill>
-              <a:effectLst/>
-              <a:uFillTx/>
-              <a:latin typeface="Times New Roman"/>
-            </a:endParaRPr>
-          </a:p>
-        </p:txBody>
-      </p:sp>
-      <p:sp>
-        <p:nvSpPr>
-          <p:cNvPr id="107" name=""/>
-          <p:cNvSpPr txBox="1"/>
-          <p:nvPr/>
-        </p:nvSpPr>
-        <p:spPr>
-          <a:xfrm>
-            <a:off x="6084000" y="2376000"/>
-            <a:ext cx="1440000" cy="457200"/>
-          </a:xfrm>
-          <a:prstGeom prst="rect">
-            <a:avLst/>
-          </a:prstGeom>
-          <a:noFill/>
-          <a:ln w="0">
-            <a:noFill/>
-          </a:ln>
-        </p:spPr>
-        <p:txBody>
-          <a:bodyPr lIns="0" tIns="0" rIns="0" bIns="0" anchor="t">
-            <a:spAutoFit/>
-          </a:bodyPr>
-          <a:p>
-            <a:r>
-              <a:rPr lang="en-US" sz="1080" b="0" u="none" strike="noStrike">
-                <a:solidFill>
-                  <a:srgbClr val="233033"/>
-                </a:solidFill>
-                <a:effectLst/>
-                <a:uFillTx/>
-                <a:latin typeface="Arial"/>
-              </a:rPr>
-              <a:t>Parásitos y enfermedades reportadas.</a:t>
-            </a:r>
-            <a:endParaRPr lang="en-US" sz="1080" b="0" u="none" strike="noStrike">
-              <a:solidFill>
-                <a:srgbClr val="233033"/>
-              </a:solidFill>
-              <a:effectLst/>
-              <a:uFillTx/>
-              <a:latin typeface="Arial"/>
-            </a:endParaRPr>
-          </a:p>
-        </p:txBody>
-      </p:sp>
-      <p:sp>
-        <p:nvSpPr>
-          <p:cNvPr id="108" name=""/>
-          <p:cNvSpPr/>
-          <p:nvPr/>
-        </p:nvSpPr>
-        <p:spPr>
-          <a:xfrm>
-            <a:off x="7776000" y="1872000"/>
-            <a:ext cx="1656000" cy="1944000"/>
-          </a:xfrm>
-          <a:prstGeom prst="rect">
-            <a:avLst/>
-          </a:prstGeom>
-          <a:solidFill>
-            <a:srgbClr val="FFFFFF"/>
-          </a:solidFill>
-          <a:ln w="0">
-            <a:noFill/>
-          </a:ln>
-        </p:spPr>
-        <p:txBody>
-          <a:bodyPr lIns="90000" tIns="45000" rIns="90000" bIns="45000" anchor="ctr" anchorCtr="1">
-            <a:noAutofit/>
-          </a:bodyPr>
-          <a:p>
-            <a:endParaRPr lang="en-US" sz="1800" b="0" u="none" strike="noStrike">
-              <a:solidFill>
-                <a:srgbClr val="000000"/>
-              </a:solidFill>
-              <a:effectLst/>
-              <a:uFillTx/>
-              <a:latin typeface="Arial"/>
-            </a:endParaRPr>
-          </a:p>
-        </p:txBody>
-      </p:sp>
-      <p:sp>
-        <p:nvSpPr>
-          <p:cNvPr id="109" name=""/>
-          <p:cNvSpPr/>
-          <p:nvPr/>
-        </p:nvSpPr>
-        <p:spPr>
-          <a:xfrm>
-            <a:off x="7776000" y="1872000"/>
-            <a:ext cx="1656000" cy="144000"/>
-          </a:xfrm>
-          <a:prstGeom prst="rect">
-            <a:avLst/>
-          </a:prstGeom>
-          <a:solidFill>
-            <a:srgbClr val="153329"/>
-          </a:solidFill>
-          <a:ln w="0">
-            <a:noFill/>
-          </a:ln>
-        </p:spPr>
-        <p:txBody>
-          <a:bodyPr lIns="90000" tIns="45000" rIns="90000" bIns="45000" anchor="ctr" anchorCtr="1">
-            <a:noAutofit/>
-          </a:bodyPr>
-          <a:p>
-            <a:endParaRPr lang="en-US" sz="1800" b="0" u="none" strike="noStrike">
-              <a:solidFill>
-                <a:srgbClr val="FFFFFF"/>
-              </a:solidFill>
-              <a:effectLst/>
-              <a:uFillTx/>
-              <a:latin typeface="Arial"/>
-            </a:endParaRPr>
-          </a:p>
-        </p:txBody>
-      </p:sp>
-      <p:sp>
-        <p:nvSpPr>
-          <p:cNvPr id="110" name=""/>
-          <p:cNvSpPr txBox="1"/>
-          <p:nvPr/>
-        </p:nvSpPr>
-        <p:spPr>
-          <a:xfrm>
-            <a:off x="7884000" y="2088000"/>
-            <a:ext cx="1440000" cy="337320"/>
-          </a:xfrm>
-          <a:prstGeom prst="rect">
-            <a:avLst/>
-          </a:prstGeom>
-          <a:noFill/>
-          <a:ln w="0">
-            <a:noFill/>
-          </a:ln>
-        </p:spPr>
-        <p:txBody>
-          <a:bodyPr lIns="0" tIns="0" rIns="0" bIns="0" anchor="t">
-            <a:spAutoFit/>
-          </a:bodyPr>
-          <a:p>
-            <a:r>
-              <a:rPr lang="en-US" sz="1350" b="1" u="none" strike="noStrike">
-                <a:solidFill>
-                  <a:srgbClr val="1F4D3E"/>
-                </a:solidFill>
-                <a:effectLst/>
-                <a:uFillTx/>
-                <a:latin typeface="Times New Roman"/>
-              </a:rPr>
-              <a:t>Amenazas</a:t>
-            </a:r>
-            <a:endParaRPr lang="en-US" sz="1350" b="1" u="none" strike="noStrike">
-              <a:solidFill>
-                <a:srgbClr val="1F4D3E"/>
-              </a:solidFill>
-              <a:effectLst/>
-              <a:uFillTx/>
-              <a:latin typeface="Times New Roman"/>
-            </a:endParaRPr>
-          </a:p>
-        </p:txBody>
-      </p:sp>
-      <p:sp>
-        <p:nvSpPr>
-          <p:cNvPr id="111" name=""/>
-          <p:cNvSpPr txBox="1"/>
-          <p:nvPr/>
-        </p:nvSpPr>
-        <p:spPr>
-          <a:xfrm>
-            <a:off x="7884000" y="2376000"/>
-            <a:ext cx="1440000" cy="337320"/>
-          </a:xfrm>
-          <a:prstGeom prst="rect">
-            <a:avLst/>
-          </a:prstGeom>
-          <a:noFill/>
-          <a:ln w="0">
-            <a:noFill/>
-          </a:ln>
-        </p:spPr>
-        <p:txBody>
-          <a:bodyPr lIns="0" tIns="0" rIns="0" bIns="0" anchor="t">
-            <a:spAutoFit/>
-          </a:bodyPr>
-          <a:p>
-            <a:r>
-              <a:rPr lang="en-US" sz="1080" b="0" u="none" strike="noStrike">
-                <a:solidFill>
-                  <a:srgbClr val="233033"/>
-                </a:solidFill>
-                <a:effectLst/>
-                <a:uFillTx/>
-                <a:latin typeface="Arial"/>
-              </a:rPr>
-              <a:t>Pesca, basura, turismo y El Niño.</a:t>
-            </a:r>
-            <a:endParaRPr lang="en-US" sz="1080" b="0" u="none" strike="noStrike">
-              <a:solidFill>
-                <a:srgbClr val="233033"/>
-              </a:solidFill>
-              <a:effectLst/>
-              <a:uFillTx/>
-              <a:latin typeface="Arial"/>
-            </a:endParaRPr>
-          </a:p>
-        </p:txBody>
-      </p:sp>
-      <p:sp>
-        <p:nvSpPr>
-          <p:cNvPr id="112" name=""/>
-          <p:cNvSpPr/>
-          <p:nvPr/>
-        </p:nvSpPr>
-        <p:spPr>
-          <a:xfrm>
-            <a:off x="576000" y="4248000"/>
-            <a:ext cx="8928000" cy="720000"/>
-          </a:xfrm>
-          <a:prstGeom prst="rect">
-            <a:avLst/>
-          </a:prstGeom>
-          <a:solidFill>
-            <a:srgbClr val="1F4D3E"/>
-          </a:solidFill>
-          <a:ln w="0">
-            <a:noFill/>
-          </a:ln>
-        </p:spPr>
-        <p:txBody>
-          <a:bodyPr lIns="180000" tIns="144000" rIns="180000" bIns="72000" anchor="ctr" anchorCtr="1">
-            <a:noAutofit/>
-          </a:bodyPr>
-          <a:p>
-            <a:r>
-              <a:rPr lang="en-US" sz="1400" b="1" u="none" strike="noStrike">
+          <a:p>
+            <a:r>
+              <a:rPr lang="en-US" sz="1180" b="1" u="none" strike="noStrike">
                 <a:solidFill>
                   <a:srgbClr val="FFFFFF"/>
                 </a:solidFill>
@@ -5698,30 +5902,9 @@
                 <a:uFillTx/>
                 <a:latin typeface="Arial"/>
               </a:rPr>
-              <a:t>Variables prácticas para el dataset:</a:t>
-            </a:r>
-            <a:endParaRPr lang="en-US" sz="1400" b="1" u="none" strike="noStrike">
-              <a:solidFill>
-                <a:srgbClr val="FFFFFF"/>
-              </a:solidFill>
-              <a:effectLst/>
-              <a:uFillTx/>
-              <a:latin typeface="Arial"/>
-            </a:endParaRPr>
-          </a:p>
-          <a:p>
-            <a:r>
-              <a:rPr lang="en-US" sz="1400" b="1" u="none" strike="noStrike">
-                <a:solidFill>
-                  <a:srgbClr val="FFFFFF"/>
-                </a:solidFill>
-                <a:effectLst/>
-                <a:uFillTx/>
-                <a:latin typeface="Arial"/>
-              </a:rPr>
-              <a:t>colonias, nidos activos, dieta, presencia de amenazas y condiciones ambientales.</a:t>
-            </a:r>
-            <a:endParaRPr lang="en-US" sz="1400" b="1" u="none" strike="noStrike">
+              <a:t>tratar faltantes en salud y agrupar amenazas para hacer comparables las colonias.</a:t>
+            </a:r>
+            <a:endParaRPr lang="en-US" sz="1180" b="1" u="none" strike="noStrike">
               <a:solidFill>
                 <a:srgbClr val="FFFFFF"/>
               </a:solidFill>
@@ -5764,7 +5947,7 @@
       </p:grpSpPr>
       <p:sp>
         <p:nvSpPr>
-          <p:cNvPr id="113" name=""/>
+          <p:cNvPr id="105" name=""/>
           <p:cNvSpPr/>
           <p:nvPr/>
         </p:nvSpPr>
@@ -5801,7 +5984,7 @@
       </p:sp>
       <p:sp>
         <p:nvSpPr>
-          <p:cNvPr id="114" name=""/>
+          <p:cNvPr id="106" name=""/>
           <p:cNvSpPr/>
           <p:nvPr/>
         </p:nvSpPr>
@@ -5838,7 +6021,7 @@
       </p:sp>
       <p:sp>
         <p:nvSpPr>
-          <p:cNvPr id="115" name=""/>
+          <p:cNvPr id="107" name=""/>
           <p:cNvSpPr/>
           <p:nvPr/>
         </p:nvSpPr>
@@ -5875,14 +6058,14 @@
       </p:sp>
       <p:sp>
         <p:nvSpPr>
-          <p:cNvPr id="116" name=""/>
+          <p:cNvPr id="108" name=""/>
           <p:cNvSpPr txBox="1"/>
           <p:nvPr/>
         </p:nvSpPr>
         <p:spPr>
           <a:xfrm>
             <a:off x="576000" y="432000"/>
-            <a:ext cx="4320000" cy="337320"/>
+            <a:ext cx="5400000" cy="337320"/>
           </a:xfrm>
           <a:prstGeom prst="rect">
             <a:avLst/>
@@ -5906,11 +6089,343 @@
                 <a:uFillTx/>
                 <a:latin typeface="Arial"/>
               </a:rPr>
-              <a:t>5. PREPARACIÓN DE LOS DATOS</a:t>
+              <a:t>EVIDENCIA Y EJEMPLOS</a:t>
             </a:r>
             <a:endParaRPr lang="en-US" sz="900" b="1" u="none" strike="noStrike">
               <a:solidFill>
                 <a:srgbClr val="2D6A6A"/>
+              </a:solidFill>
+              <a:effectLst/>
+              <a:uFillTx/>
+              <a:latin typeface="Arial"/>
+            </a:endParaRPr>
+          </a:p>
+        </p:txBody>
+      </p:sp>
+      <p:sp>
+        <p:nvSpPr>
+          <p:cNvPr id="109" name=""/>
+          <p:cNvSpPr txBox="1"/>
+          <p:nvPr/>
+        </p:nvSpPr>
+        <p:spPr>
+          <a:xfrm>
+            <a:off x="576000" y="720000"/>
+            <a:ext cx="7560000" cy="337320"/>
+          </a:xfrm>
+          <a:prstGeom prst="rect">
+            <a:avLst/>
+          </a:prstGeom>
+          <a:noFill/>
+          <a:ln w="0">
+            <a:noFill/>
+          </a:ln>
+        </p:spPr>
+        <p:txBody>
+          <a:bodyPr lIns="0" tIns="0" rIns="0" bIns="0" anchor="t">
+            <a:spAutoFit/>
+          </a:bodyPr>
+          <a:p>
+            <a:r>
+              <a:rPr lang="en-US" sz="2200" b="1" u="none" strike="noStrike">
+                <a:solidFill>
+                  <a:srgbClr val="1F4D3E"/>
+                </a:solidFill>
+                <a:effectLst/>
+                <a:uFillTx/>
+                <a:latin typeface="Times New Roman"/>
+              </a:rPr>
+              <a:t>Datos oficiales y observables concretos del caso</a:t>
+            </a:r>
+            <a:endParaRPr lang="en-US" sz="2200" b="1" u="none" strike="noStrike">
+              <a:solidFill>
+                <a:srgbClr val="1F4D3E"/>
+              </a:solidFill>
+              <a:effectLst/>
+              <a:uFillTx/>
+              <a:latin typeface="Times New Roman"/>
+            </a:endParaRPr>
+          </a:p>
+        </p:txBody>
+      </p:sp>
+      <p:sp>
+        <p:nvSpPr>
+          <p:cNvPr id="110" name=""/>
+          <p:cNvSpPr txBox="1"/>
+          <p:nvPr/>
+        </p:nvSpPr>
+        <p:spPr>
+          <a:xfrm>
+            <a:off x="9108000" y="5274000"/>
+            <a:ext cx="432000" cy="337320"/>
+          </a:xfrm>
+          <a:prstGeom prst="rect">
+            <a:avLst/>
+          </a:prstGeom>
+          <a:noFill/>
+          <a:ln w="0">
+            <a:noFill/>
+          </a:ln>
+        </p:spPr>
+        <p:txBody>
+          <a:bodyPr lIns="0" tIns="0" rIns="0" bIns="0" anchor="t">
+            <a:spAutoFit/>
+          </a:bodyPr>
+          <a:p>
+            <a:r>
+              <a:rPr lang="en-US" sz="900" b="0" u="none" strike="noStrike">
+                <a:solidFill>
+                  <a:srgbClr val="677776"/>
+                </a:solidFill>
+                <a:effectLst/>
+                <a:uFillTx/>
+                <a:latin typeface="Arial"/>
+              </a:rPr>
+              <a:t>06</a:t>
+            </a:r>
+            <a:endParaRPr lang="en-US" sz="900" b="0" u="none" strike="noStrike">
+              <a:solidFill>
+                <a:srgbClr val="677776"/>
+              </a:solidFill>
+              <a:effectLst/>
+              <a:uFillTx/>
+              <a:latin typeface="Arial"/>
+            </a:endParaRPr>
+          </a:p>
+        </p:txBody>
+      </p:sp>
+      <p:sp>
+        <p:nvSpPr>
+          <p:cNvPr id="111" name=""/>
+          <p:cNvSpPr/>
+          <p:nvPr/>
+        </p:nvSpPr>
+        <p:spPr>
+          <a:xfrm>
+            <a:off x="576000" y="1584000"/>
+            <a:ext cx="2736000" cy="1296000"/>
+          </a:xfrm>
+          <a:prstGeom prst="rect">
+            <a:avLst/>
+          </a:prstGeom>
+          <a:solidFill>
+            <a:srgbClr val="FFFFFF"/>
+          </a:solidFill>
+          <a:ln w="0">
+            <a:noFill/>
+          </a:ln>
+        </p:spPr>
+        <p:txBody>
+          <a:bodyPr lIns="90000" tIns="45000" rIns="90000" bIns="45000" anchor="ctr" anchorCtr="1">
+            <a:noAutofit/>
+          </a:bodyPr>
+          <a:p>
+            <a:endParaRPr lang="en-US" sz="1800" b="0" u="none" strike="noStrike">
+              <a:solidFill>
+                <a:srgbClr val="000000"/>
+              </a:solidFill>
+              <a:effectLst/>
+              <a:uFillTx/>
+              <a:latin typeface="Arial"/>
+            </a:endParaRPr>
+          </a:p>
+        </p:txBody>
+      </p:sp>
+      <p:sp>
+        <p:nvSpPr>
+          <p:cNvPr id="112" name=""/>
+          <p:cNvSpPr/>
+          <p:nvPr/>
+        </p:nvSpPr>
+        <p:spPr>
+          <a:xfrm>
+            <a:off x="576000" y="1584000"/>
+            <a:ext cx="2736000" cy="144000"/>
+          </a:xfrm>
+          <a:prstGeom prst="rect">
+            <a:avLst/>
+          </a:prstGeom>
+          <a:solidFill>
+            <a:srgbClr val="1F4D3E"/>
+          </a:solidFill>
+          <a:ln w="0">
+            <a:noFill/>
+          </a:ln>
+        </p:spPr>
+        <p:txBody>
+          <a:bodyPr lIns="90000" tIns="45000" rIns="90000" bIns="45000" anchor="ctr" anchorCtr="1">
+            <a:noAutofit/>
+          </a:bodyPr>
+          <a:p>
+            <a:endParaRPr lang="en-US" sz="1800" b="0" u="none" strike="noStrike">
+              <a:solidFill>
+                <a:srgbClr val="FFFFFF"/>
+              </a:solidFill>
+              <a:effectLst/>
+              <a:uFillTx/>
+              <a:latin typeface="Arial"/>
+            </a:endParaRPr>
+          </a:p>
+        </p:txBody>
+      </p:sp>
+      <p:sp>
+        <p:nvSpPr>
+          <p:cNvPr id="113" name=""/>
+          <p:cNvSpPr txBox="1"/>
+          <p:nvPr/>
+        </p:nvSpPr>
+        <p:spPr>
+          <a:xfrm>
+            <a:off x="684000" y="1800000"/>
+            <a:ext cx="2520000" cy="337320"/>
+          </a:xfrm>
+          <a:prstGeom prst="rect">
+            <a:avLst/>
+          </a:prstGeom>
+          <a:noFill/>
+          <a:ln w="0">
+            <a:noFill/>
+          </a:ln>
+        </p:spPr>
+        <p:txBody>
+          <a:bodyPr lIns="0" tIns="0" rIns="0" bIns="0" anchor="t">
+            <a:spAutoFit/>
+          </a:bodyPr>
+          <a:p>
+            <a:r>
+              <a:rPr lang="en-US" sz="1320" b="1" u="none" strike="noStrike">
+                <a:solidFill>
+                  <a:srgbClr val="1F4D3E"/>
+                </a:solidFill>
+                <a:effectLst/>
+                <a:uFillTx/>
+                <a:latin typeface="Times New Roman"/>
+              </a:rPr>
+              <a:t>RCE Chile 2025-2026</a:t>
+            </a:r>
+            <a:endParaRPr lang="en-US" sz="1320" b="1" u="none" strike="noStrike">
+              <a:solidFill>
+                <a:srgbClr val="1F4D3E"/>
+              </a:solidFill>
+              <a:effectLst/>
+              <a:uFillTx/>
+              <a:latin typeface="Times New Roman"/>
+            </a:endParaRPr>
+          </a:p>
+        </p:txBody>
+      </p:sp>
+      <p:sp>
+        <p:nvSpPr>
+          <p:cNvPr id="114" name=""/>
+          <p:cNvSpPr txBox="1"/>
+          <p:nvPr/>
+        </p:nvSpPr>
+        <p:spPr>
+          <a:xfrm>
+            <a:off x="684000" y="2088000"/>
+            <a:ext cx="2520000" cy="337320"/>
+          </a:xfrm>
+          <a:prstGeom prst="rect">
+            <a:avLst/>
+          </a:prstGeom>
+          <a:noFill/>
+          <a:ln w="0">
+            <a:noFill/>
+          </a:ln>
+        </p:spPr>
+        <p:txBody>
+          <a:bodyPr lIns="0" tIns="0" rIns="0" bIns="0" anchor="t">
+            <a:spAutoFit/>
+          </a:bodyPr>
+          <a:p>
+            <a:r>
+              <a:rPr lang="en-US" sz="1100" b="0" u="none" strike="noStrike">
+                <a:solidFill>
+                  <a:srgbClr val="233033"/>
+                </a:solidFill>
+                <a:effectLst/>
+                <a:uFillTx/>
+                <a:latin typeface="Arial"/>
+              </a:rPr>
+              <a:t>La ficha final del 20º proceso clasifica la especie como En Peligro (EN).</a:t>
+            </a:r>
+            <a:endParaRPr lang="en-US" sz="1100" b="0" u="none" strike="noStrike">
+              <a:solidFill>
+                <a:srgbClr val="233033"/>
+              </a:solidFill>
+              <a:effectLst/>
+              <a:uFillTx/>
+              <a:latin typeface="Arial"/>
+            </a:endParaRPr>
+          </a:p>
+        </p:txBody>
+      </p:sp>
+      <p:sp>
+        <p:nvSpPr>
+          <p:cNvPr id="115" name=""/>
+          <p:cNvSpPr/>
+          <p:nvPr/>
+        </p:nvSpPr>
+        <p:spPr>
+          <a:xfrm>
+            <a:off x="3672000" y="1584000"/>
+            <a:ext cx="2736000" cy="1296000"/>
+          </a:xfrm>
+          <a:prstGeom prst="rect">
+            <a:avLst/>
+          </a:prstGeom>
+          <a:solidFill>
+            <a:srgbClr val="FFFFFF"/>
+          </a:solidFill>
+          <a:ln w="0">
+            <a:noFill/>
+          </a:ln>
+        </p:spPr>
+        <p:txBody>
+          <a:bodyPr lIns="90000" tIns="45000" rIns="90000" bIns="45000" anchor="ctr" anchorCtr="1">
+            <a:noAutofit/>
+          </a:bodyPr>
+          <a:p>
+            <a:endParaRPr lang="en-US" sz="1800" b="0" u="none" strike="noStrike">
+              <a:solidFill>
+                <a:srgbClr val="000000"/>
+              </a:solidFill>
+              <a:effectLst/>
+              <a:uFillTx/>
+              <a:latin typeface="Arial"/>
+            </a:endParaRPr>
+          </a:p>
+        </p:txBody>
+      </p:sp>
+      <p:sp>
+        <p:nvSpPr>
+          <p:cNvPr id="116" name=""/>
+          <p:cNvSpPr/>
+          <p:nvPr/>
+        </p:nvSpPr>
+        <p:spPr>
+          <a:xfrm>
+            <a:off x="3672000" y="1584000"/>
+            <a:ext cx="2736000" cy="144000"/>
+          </a:xfrm>
+          <a:prstGeom prst="rect">
+            <a:avLst/>
+          </a:prstGeom>
+          <a:solidFill>
+            <a:srgbClr val="2D6A6A"/>
+          </a:solidFill>
+          <a:ln w="0">
+            <a:noFill/>
+          </a:ln>
+        </p:spPr>
+        <p:txBody>
+          <a:bodyPr lIns="90000" tIns="45000" rIns="90000" bIns="45000" anchor="ctr" anchorCtr="1">
+            <a:noAutofit/>
+          </a:bodyPr>
+          <a:p>
+            <a:endParaRPr lang="en-US" sz="1800" b="0" u="none" strike="noStrike">
+              <a:solidFill>
+                <a:srgbClr val="FFFFFF"/>
               </a:solidFill>
               <a:effectLst/>
               <a:uFillTx/>
@@ -5927,8 +6442,8 @@
         </p:nvSpPr>
         <p:spPr>
           <a:xfrm>
-            <a:off x="576000" y="720000"/>
-            <a:ext cx="6840000" cy="618840"/>
+            <a:off x="3780000" y="1800000"/>
+            <a:ext cx="2520000" cy="337320"/>
           </a:xfrm>
           <a:prstGeom prst="rect">
             <a:avLst/>
@@ -5944,7 +6459,7 @@
           </a:bodyPr>
           <a:p>
             <a:r>
-              <a:rPr lang="en-US" sz="2200" b="1" u="none" strike="noStrike">
+              <a:rPr lang="en-US" sz="1320" b="1" u="none" strike="noStrike">
                 <a:solidFill>
                   <a:srgbClr val="1F4D3E"/>
                 </a:solidFill>
@@ -5952,9 +6467,9 @@
                 <a:uFillTx/>
                 <a:latin typeface="Times New Roman"/>
               </a:rPr>
-              <a:t>Cómo convertir información dispersa en un dataset analizable</a:t>
-            </a:r>
-            <a:endParaRPr lang="en-US" sz="2200" b="1" u="none" strike="noStrike">
+              <a:t>Dato poblacional</a:t>
+            </a:r>
+            <a:endParaRPr lang="en-US" sz="1320" b="1" u="none" strike="noStrike">
               <a:solidFill>
                 <a:srgbClr val="1F4D3E"/>
               </a:solidFill>
@@ -5973,8 +6488,8 @@
         </p:nvSpPr>
         <p:spPr>
           <a:xfrm>
-            <a:off x="9108000" y="5274000"/>
-            <a:ext cx="432000" cy="337320"/>
+            <a:off x="3780000" y="2088000"/>
+            <a:ext cx="2520000" cy="457200"/>
           </a:xfrm>
           <a:prstGeom prst="rect">
             <a:avLst/>
@@ -5990,19 +6505,19 @@
           </a:bodyPr>
           <a:p>
             <a:r>
-              <a:rPr lang="en-US" sz="900" b="0" u="none" strike="noStrike">
-                <a:solidFill>
-                  <a:srgbClr val="677776"/>
-                </a:solidFill>
-                <a:effectLst/>
-                <a:uFillTx/>
-                <a:latin typeface="Arial"/>
-              </a:rPr>
-              <a:t>06</a:t>
-            </a:r>
-            <a:endParaRPr lang="en-US" sz="900" b="0" u="none" strike="noStrike">
-              <a:solidFill>
-                <a:srgbClr val="677776"/>
+              <a:rPr lang="en-US" sz="1070" b="0" u="none" strike="noStrike">
+                <a:solidFill>
+                  <a:srgbClr val="233033"/>
+                </a:solidFill>
+                <a:effectLst/>
+                <a:uFillTx/>
+                <a:latin typeface="Arial"/>
+              </a:rPr>
+              <a:t>Se reporta una disminución de 50% entre 2017 y 2021 en parejas reproductivas de principales colonias.</a:t>
+            </a:r>
+            <a:endParaRPr lang="en-US" sz="1070" b="0" u="none" strike="noStrike">
+              <a:solidFill>
+                <a:srgbClr val="233033"/>
               </a:solidFill>
               <a:effectLst/>
               <a:uFillTx/>
@@ -6019,8 +6534,243 @@
         </p:nvSpPr>
         <p:spPr>
           <a:xfrm>
-            <a:off x="576000" y="1512000"/>
-            <a:ext cx="432000" cy="576000"/>
+            <a:off x="6768000" y="1584000"/>
+            <a:ext cx="2736000" cy="1296000"/>
+          </a:xfrm>
+          <a:prstGeom prst="rect">
+            <a:avLst/>
+          </a:prstGeom>
+          <a:solidFill>
+            <a:srgbClr val="FFFFFF"/>
+          </a:solidFill>
+          <a:ln w="0">
+            <a:noFill/>
+          </a:ln>
+        </p:spPr>
+        <p:txBody>
+          <a:bodyPr lIns="90000" tIns="45000" rIns="90000" bIns="45000" anchor="ctr" anchorCtr="1">
+            <a:noAutofit/>
+          </a:bodyPr>
+          <a:p>
+            <a:endParaRPr lang="en-US" sz="1800" b="0" u="none" strike="noStrike">
+              <a:solidFill>
+                <a:srgbClr val="000000"/>
+              </a:solidFill>
+              <a:effectLst/>
+              <a:uFillTx/>
+              <a:latin typeface="Arial"/>
+            </a:endParaRPr>
+          </a:p>
+        </p:txBody>
+      </p:sp>
+      <p:sp>
+        <p:nvSpPr>
+          <p:cNvPr id="120" name=""/>
+          <p:cNvSpPr/>
+          <p:nvPr/>
+        </p:nvSpPr>
+        <p:spPr>
+          <a:xfrm>
+            <a:off x="6768000" y="1584000"/>
+            <a:ext cx="2736000" cy="144000"/>
+          </a:xfrm>
+          <a:prstGeom prst="rect">
+            <a:avLst/>
+          </a:prstGeom>
+          <a:solidFill>
+            <a:srgbClr val="88A97C"/>
+          </a:solidFill>
+          <a:ln w="0">
+            <a:noFill/>
+          </a:ln>
+        </p:spPr>
+        <p:txBody>
+          <a:bodyPr lIns="90000" tIns="45000" rIns="90000" bIns="45000" anchor="ctr" anchorCtr="1">
+            <a:noAutofit/>
+          </a:bodyPr>
+          <a:p>
+            <a:endParaRPr lang="en-US" sz="1800" b="0" u="none" strike="noStrike">
+              <a:solidFill>
+                <a:srgbClr val="000000"/>
+              </a:solidFill>
+              <a:effectLst/>
+              <a:uFillTx/>
+              <a:latin typeface="Arial"/>
+            </a:endParaRPr>
+          </a:p>
+        </p:txBody>
+      </p:sp>
+      <p:sp>
+        <p:nvSpPr>
+          <p:cNvPr id="121" name=""/>
+          <p:cNvSpPr txBox="1"/>
+          <p:nvPr/>
+        </p:nvSpPr>
+        <p:spPr>
+          <a:xfrm>
+            <a:off x="6876000" y="1800000"/>
+            <a:ext cx="2520000" cy="337320"/>
+          </a:xfrm>
+          <a:prstGeom prst="rect">
+            <a:avLst/>
+          </a:prstGeom>
+          <a:noFill/>
+          <a:ln w="0">
+            <a:noFill/>
+          </a:ln>
+        </p:spPr>
+        <p:txBody>
+          <a:bodyPr lIns="0" tIns="0" rIns="0" bIns="0" anchor="t">
+            <a:spAutoFit/>
+          </a:bodyPr>
+          <a:p>
+            <a:r>
+              <a:rPr lang="en-US" sz="1320" b="1" u="none" strike="noStrike">
+                <a:solidFill>
+                  <a:srgbClr val="1F4D3E"/>
+                </a:solidFill>
+                <a:effectLst/>
+                <a:uFillTx/>
+                <a:latin typeface="Times New Roman"/>
+              </a:rPr>
+              <a:t>Distribución confirmada</a:t>
+            </a:r>
+            <a:endParaRPr lang="en-US" sz="1320" b="1" u="none" strike="noStrike">
+              <a:solidFill>
+                <a:srgbClr val="1F4D3E"/>
+              </a:solidFill>
+              <a:effectLst/>
+              <a:uFillTx/>
+              <a:latin typeface="Times New Roman"/>
+            </a:endParaRPr>
+          </a:p>
+        </p:txBody>
+      </p:sp>
+      <p:sp>
+        <p:nvSpPr>
+          <p:cNvPr id="122" name=""/>
+          <p:cNvSpPr txBox="1"/>
+          <p:nvPr/>
+        </p:nvSpPr>
+        <p:spPr>
+          <a:xfrm>
+            <a:off x="6876000" y="2088000"/>
+            <a:ext cx="2520000" cy="337320"/>
+          </a:xfrm>
+          <a:prstGeom prst="rect">
+            <a:avLst/>
+          </a:prstGeom>
+          <a:noFill/>
+          <a:ln w="0">
+            <a:noFill/>
+          </a:ln>
+        </p:spPr>
+        <p:txBody>
+          <a:bodyPr lIns="0" tIns="0" rIns="0" bIns="0" anchor="t">
+            <a:spAutoFit/>
+          </a:bodyPr>
+          <a:p>
+            <a:r>
+              <a:rPr lang="en-US" sz="1100" b="0" u="none" strike="noStrike">
+                <a:solidFill>
+                  <a:srgbClr val="233033"/>
+                </a:solidFill>
+                <a:effectLst/>
+                <a:uFillTx/>
+                <a:latin typeface="Arial"/>
+              </a:rPr>
+              <a:t>En Chile se ha confirmado nidificación en al menos 48 colonias.</a:t>
+            </a:r>
+            <a:endParaRPr lang="en-US" sz="1100" b="0" u="none" strike="noStrike">
+              <a:solidFill>
+                <a:srgbClr val="233033"/>
+              </a:solidFill>
+              <a:effectLst/>
+              <a:uFillTx/>
+              <a:latin typeface="Arial"/>
+            </a:endParaRPr>
+          </a:p>
+        </p:txBody>
+      </p:sp>
+      <p:sp>
+        <p:nvSpPr>
+          <p:cNvPr id="123" name=""/>
+          <p:cNvSpPr/>
+          <p:nvPr/>
+        </p:nvSpPr>
+        <p:spPr>
+          <a:xfrm>
+            <a:off x="576000" y="3312000"/>
+            <a:ext cx="8928000" cy="648000"/>
+          </a:xfrm>
+          <a:prstGeom prst="rect">
+            <a:avLst/>
+          </a:prstGeom>
+          <a:solidFill>
+            <a:srgbClr val="FFFFFF"/>
+          </a:solidFill>
+          <a:ln w="0">
+            <a:noFill/>
+          </a:ln>
+        </p:spPr>
+        <p:txBody>
+          <a:bodyPr lIns="144000" tIns="108000" rIns="144000" bIns="72000" anchor="ctr" anchorCtr="1">
+            <a:noAutofit/>
+          </a:bodyPr>
+          <a:p>
+            <a:r>
+              <a:rPr lang="en-US" sz="1260" b="1" u="none" strike="noStrike">
+                <a:solidFill>
+                  <a:srgbClr val="153329"/>
+                </a:solidFill>
+                <a:effectLst/>
+                <a:uFillTx/>
+                <a:latin typeface="Arial"/>
+              </a:rPr>
+              <a:t>Amenazas documentadas oficialmente:</a:t>
+            </a:r>
+            <a:endParaRPr lang="en-US" sz="1260" b="1" u="none" strike="noStrike">
+              <a:solidFill>
+                <a:srgbClr val="153329"/>
+              </a:solidFill>
+              <a:effectLst/>
+              <a:uFillTx/>
+              <a:latin typeface="Arial"/>
+            </a:endParaRPr>
+          </a:p>
+          <a:p>
+            <a:r>
+              <a:rPr lang="en-US" sz="1260" b="1" u="none" strike="noStrike">
+                <a:solidFill>
+                  <a:srgbClr val="153329"/>
+                </a:solidFill>
+                <a:effectLst/>
+                <a:uFillTx/>
+                <a:latin typeface="Arial"/>
+              </a:rPr>
+              <a:t>pesquerías, disminución del alimento, perturbación humana en colonias y cambio climático.</a:t>
+            </a:r>
+            <a:endParaRPr lang="en-US" sz="1260" b="1" u="none" strike="noStrike">
+              <a:solidFill>
+                <a:srgbClr val="153329"/>
+              </a:solidFill>
+              <a:effectLst/>
+              <a:uFillTx/>
+              <a:latin typeface="Arial"/>
+            </a:endParaRPr>
+          </a:p>
+        </p:txBody>
+      </p:sp>
+      <p:sp>
+        <p:nvSpPr>
+          <p:cNvPr id="124" name=""/>
+          <p:cNvSpPr/>
+          <p:nvPr/>
+        </p:nvSpPr>
+        <p:spPr>
+          <a:xfrm>
+            <a:off x="576000" y="4176000"/>
+            <a:ext cx="8928000" cy="648000"/>
           </a:xfrm>
           <a:prstGeom prst="rect">
             <a:avLst/>
@@ -6033,617 +6783,43 @@
           </a:ln>
         </p:spPr>
         <p:txBody>
-          <a:bodyPr lIns="108000" tIns="72000" rIns="108000" bIns="72000" anchor="ctr" anchorCtr="1">
-            <a:noAutofit/>
-          </a:bodyPr>
-          <a:p>
-            <a:r>
-              <a:rPr lang="en-US" sz="1800" b="1" u="none" strike="noStrike">
+          <a:bodyPr lIns="144000" tIns="108000" rIns="144000" bIns="72000" anchor="ctr" anchorCtr="1">
+            <a:noAutofit/>
+          </a:bodyPr>
+          <a:p>
+            <a:r>
+              <a:rPr lang="en-US" sz="1260" b="1" u="none" strike="noStrike">
                 <a:solidFill>
                   <a:srgbClr val="FFFFFF"/>
                 </a:solidFill>
                 <a:effectLst/>
                 <a:uFillTx/>
-                <a:latin typeface="Times New Roman"/>
-              </a:rPr>
-              <a:t>1</a:t>
-            </a:r>
-            <a:endParaRPr lang="en-US" sz="1800" b="1" u="none" strike="noStrike">
+                <a:latin typeface="Arial"/>
+              </a:rPr>
+              <a:t>Ejemplo de indicador analítico:</a:t>
+            </a:r>
+            <a:endParaRPr lang="en-US" sz="1260" b="1" u="none" strike="noStrike">
               <a:solidFill>
                 <a:srgbClr val="FFFFFF"/>
               </a:solidFill>
               <a:effectLst/>
               <a:uFillTx/>
-              <a:latin typeface="Times New Roman"/>
-            </a:endParaRPr>
-          </a:p>
-        </p:txBody>
-      </p:sp>
-      <p:sp>
-        <p:nvSpPr>
-          <p:cNvPr id="120" name=""/>
-          <p:cNvSpPr/>
-          <p:nvPr/>
-        </p:nvSpPr>
-        <p:spPr>
-          <a:xfrm>
-            <a:off x="1116000" y="1512000"/>
-            <a:ext cx="2088000" cy="576000"/>
-          </a:xfrm>
-          <a:prstGeom prst="rect">
-            <a:avLst/>
-          </a:prstGeom>
-          <a:solidFill>
-            <a:srgbClr val="FFFFFF"/>
-          </a:solidFill>
-          <a:ln w="0">
-            <a:noFill/>
-          </a:ln>
-        </p:spPr>
-        <p:txBody>
-          <a:bodyPr lIns="144000" tIns="90000" rIns="144000" bIns="72000" anchor="ctr" anchorCtr="1">
-            <a:noAutofit/>
-          </a:bodyPr>
-          <a:p>
-            <a:r>
-              <a:rPr lang="en-US" sz="1120" b="1" u="none" strike="noStrike">
-                <a:solidFill>
-                  <a:srgbClr val="233033"/>
-                </a:solidFill>
-                <a:effectLst/>
-                <a:uFillTx/>
-                <a:latin typeface="Arial"/>
-              </a:rPr>
-              <a:t>Estandarizar</a:t>
-            </a:r>
-            <a:endParaRPr lang="en-US" sz="1120" b="1" u="none" strike="noStrike">
-              <a:solidFill>
-                <a:srgbClr val="233033"/>
-              </a:solidFill>
-              <a:effectLst/>
-              <a:uFillTx/>
-              <a:latin typeface="Arial"/>
-            </a:endParaRPr>
-          </a:p>
-          <a:p>
-            <a:r>
-              <a:rPr lang="en-US" sz="1120" b="1" u="none" strike="noStrike">
-                <a:solidFill>
-                  <a:srgbClr val="233033"/>
-                </a:solidFill>
-                <a:effectLst/>
-                <a:uFillTx/>
-                <a:latin typeface="Arial"/>
-              </a:rPr>
-              <a:t>Nombres de colonias, regiones y fechas.</a:t>
-            </a:r>
-            <a:endParaRPr lang="en-US" sz="1120" b="1" u="none" strike="noStrike">
-              <a:solidFill>
-                <a:srgbClr val="233033"/>
-              </a:solidFill>
-              <a:effectLst/>
-              <a:uFillTx/>
-              <a:latin typeface="Arial"/>
-            </a:endParaRPr>
-          </a:p>
-        </p:txBody>
-      </p:sp>
-      <p:sp>
-        <p:nvSpPr>
-          <p:cNvPr id="121" name=""/>
-          <p:cNvSpPr/>
-          <p:nvPr/>
-        </p:nvSpPr>
-        <p:spPr>
-          <a:xfrm>
-            <a:off x="576000" y="2196000"/>
-            <a:ext cx="432000" cy="576000"/>
-          </a:xfrm>
-          <a:prstGeom prst="rect">
-            <a:avLst/>
-          </a:prstGeom>
-          <a:solidFill>
-            <a:srgbClr val="1F4D3E"/>
-          </a:solidFill>
-          <a:ln w="0">
-            <a:noFill/>
-          </a:ln>
-        </p:spPr>
-        <p:txBody>
-          <a:bodyPr lIns="108000" tIns="72000" rIns="108000" bIns="72000" anchor="ctr" anchorCtr="1">
-            <a:noAutofit/>
-          </a:bodyPr>
-          <a:p>
-            <a:r>
-              <a:rPr lang="en-US" sz="1800" b="1" u="none" strike="noStrike">
+              <a:latin typeface="Arial"/>
+            </a:endParaRPr>
+          </a:p>
+          <a:p>
+            <a:r>
+              <a:rPr lang="en-US" sz="1260" b="1" u="none" strike="noStrike">
                 <a:solidFill>
                   <a:srgbClr val="FFFFFF"/>
                 </a:solidFill>
                 <a:effectLst/>
                 <a:uFillTx/>
-                <a:latin typeface="Times New Roman"/>
-              </a:rPr>
-              <a:t>2</a:t>
-            </a:r>
-            <a:endParaRPr lang="en-US" sz="1800" b="1" u="none" strike="noStrike">
-              <a:solidFill>
-                <a:srgbClr val="FFFFFF"/>
-              </a:solidFill>
-              <a:effectLst/>
-              <a:uFillTx/>
-              <a:latin typeface="Times New Roman"/>
-            </a:endParaRPr>
-          </a:p>
-        </p:txBody>
-      </p:sp>
-      <p:sp>
-        <p:nvSpPr>
-          <p:cNvPr id="122" name=""/>
-          <p:cNvSpPr/>
-          <p:nvPr/>
-        </p:nvSpPr>
-        <p:spPr>
-          <a:xfrm>
-            <a:off x="1116000" y="2196000"/>
-            <a:ext cx="2088000" cy="576000"/>
-          </a:xfrm>
-          <a:prstGeom prst="rect">
-            <a:avLst/>
-          </a:prstGeom>
-          <a:solidFill>
-            <a:srgbClr val="FFFFFF"/>
-          </a:solidFill>
-          <a:ln w="0">
-            <a:noFill/>
-          </a:ln>
-        </p:spPr>
-        <p:txBody>
-          <a:bodyPr lIns="144000" tIns="90000" rIns="144000" bIns="72000" anchor="ctr" anchorCtr="1">
-            <a:noAutofit/>
-          </a:bodyPr>
-          <a:p>
-            <a:r>
-              <a:rPr lang="en-US" sz="1120" b="1" u="none" strike="noStrike">
-                <a:solidFill>
-                  <a:srgbClr val="233033"/>
-                </a:solidFill>
-                <a:effectLst/>
-                <a:uFillTx/>
-                <a:latin typeface="Arial"/>
-              </a:rPr>
-              <a:t>Unidad de análisis</a:t>
-            </a:r>
-            <a:endParaRPr lang="en-US" sz="1120" b="1" u="none" strike="noStrike">
-              <a:solidFill>
-                <a:srgbClr val="233033"/>
-              </a:solidFill>
-              <a:effectLst/>
-              <a:uFillTx/>
-              <a:latin typeface="Arial"/>
-            </a:endParaRPr>
-          </a:p>
-          <a:p>
-            <a:r>
-              <a:rPr lang="en-US" sz="1120" b="1" u="none" strike="noStrike">
-                <a:solidFill>
-                  <a:srgbClr val="233033"/>
-                </a:solidFill>
-                <a:effectLst/>
-                <a:uFillTx/>
-                <a:latin typeface="Arial"/>
-              </a:rPr>
-              <a:t>Construir un dataset del tipo colonia + año.</a:t>
-            </a:r>
-            <a:endParaRPr lang="en-US" sz="1120" b="1" u="none" strike="noStrike">
-              <a:solidFill>
-                <a:srgbClr val="233033"/>
-              </a:solidFill>
-              <a:effectLst/>
-              <a:uFillTx/>
-              <a:latin typeface="Arial"/>
-            </a:endParaRPr>
-          </a:p>
-        </p:txBody>
-      </p:sp>
-      <p:sp>
-        <p:nvSpPr>
-          <p:cNvPr id="123" name=""/>
-          <p:cNvSpPr/>
-          <p:nvPr/>
-        </p:nvSpPr>
-        <p:spPr>
-          <a:xfrm>
-            <a:off x="576000" y="2880000"/>
-            <a:ext cx="432000" cy="576000"/>
-          </a:xfrm>
-          <a:prstGeom prst="rect">
-            <a:avLst/>
-          </a:prstGeom>
-          <a:solidFill>
-            <a:srgbClr val="1F4D3E"/>
-          </a:solidFill>
-          <a:ln w="0">
-            <a:noFill/>
-          </a:ln>
-        </p:spPr>
-        <p:txBody>
-          <a:bodyPr lIns="108000" tIns="72000" rIns="108000" bIns="72000" anchor="ctr" anchorCtr="1">
-            <a:noAutofit/>
-          </a:bodyPr>
-          <a:p>
-            <a:r>
-              <a:rPr lang="en-US" sz="1800" b="1" u="none" strike="noStrike">
-                <a:solidFill>
-                  <a:srgbClr val="FFFFFF"/>
-                </a:solidFill>
-                <a:effectLst/>
-                <a:uFillTx/>
-                <a:latin typeface="Times New Roman"/>
-              </a:rPr>
-              <a:t>3</a:t>
-            </a:r>
-            <a:endParaRPr lang="en-US" sz="1800" b="1" u="none" strike="noStrike">
-              <a:solidFill>
-                <a:srgbClr val="FFFFFF"/>
-              </a:solidFill>
-              <a:effectLst/>
-              <a:uFillTx/>
-              <a:latin typeface="Times New Roman"/>
-            </a:endParaRPr>
-          </a:p>
-        </p:txBody>
-      </p:sp>
-      <p:sp>
-        <p:nvSpPr>
-          <p:cNvPr id="124" name=""/>
-          <p:cNvSpPr/>
-          <p:nvPr/>
-        </p:nvSpPr>
-        <p:spPr>
-          <a:xfrm>
-            <a:off x="1116000" y="2880000"/>
-            <a:ext cx="2088000" cy="576000"/>
-          </a:xfrm>
-          <a:prstGeom prst="rect">
-            <a:avLst/>
-          </a:prstGeom>
-          <a:solidFill>
-            <a:srgbClr val="FFFFFF"/>
-          </a:solidFill>
-          <a:ln w="0">
-            <a:noFill/>
-          </a:ln>
-        </p:spPr>
-        <p:txBody>
-          <a:bodyPr lIns="144000" tIns="90000" rIns="144000" bIns="72000" anchor="ctr" anchorCtr="1">
-            <a:noAutofit/>
-          </a:bodyPr>
-          <a:p>
-            <a:r>
-              <a:rPr lang="en-US" sz="1120" b="1" u="none" strike="noStrike">
-                <a:solidFill>
-                  <a:srgbClr val="233033"/>
-                </a:solidFill>
-                <a:effectLst/>
-                <a:uFillTx/>
-                <a:latin typeface="Arial"/>
-              </a:rPr>
-              <a:t>Variables clave</a:t>
-            </a:r>
-            <a:endParaRPr lang="en-US" sz="1120" b="1" u="none" strike="noStrike">
-              <a:solidFill>
-                <a:srgbClr val="233033"/>
-              </a:solidFill>
-              <a:effectLst/>
-              <a:uFillTx/>
-              <a:latin typeface="Arial"/>
-            </a:endParaRPr>
-          </a:p>
-          <a:p>
-            <a:r>
-              <a:rPr lang="en-US" sz="1120" b="1" u="none" strike="noStrike">
-                <a:solidFill>
-                  <a:srgbClr val="233033"/>
-                </a:solidFill>
-                <a:effectLst/>
-                <a:uFillTx/>
-                <a:latin typeface="Arial"/>
-              </a:rPr>
-              <a:t>Nidos activos, dieta, amenazas y ambiente.</a:t>
-            </a:r>
-            <a:endParaRPr lang="en-US" sz="1120" b="1" u="none" strike="noStrike">
-              <a:solidFill>
-                <a:srgbClr val="233033"/>
-              </a:solidFill>
-              <a:effectLst/>
-              <a:uFillTx/>
-              <a:latin typeface="Arial"/>
-            </a:endParaRPr>
-          </a:p>
-        </p:txBody>
-      </p:sp>
-      <p:sp>
-        <p:nvSpPr>
-          <p:cNvPr id="125" name=""/>
-          <p:cNvSpPr/>
-          <p:nvPr/>
-        </p:nvSpPr>
-        <p:spPr>
-          <a:xfrm>
-            <a:off x="576000" y="3564000"/>
-            <a:ext cx="432000" cy="576000"/>
-          </a:xfrm>
-          <a:prstGeom prst="rect">
-            <a:avLst/>
-          </a:prstGeom>
-          <a:solidFill>
-            <a:srgbClr val="1F4D3E"/>
-          </a:solidFill>
-          <a:ln w="0">
-            <a:noFill/>
-          </a:ln>
-        </p:spPr>
-        <p:txBody>
-          <a:bodyPr lIns="108000" tIns="72000" rIns="108000" bIns="72000" anchor="ctr" anchorCtr="1">
-            <a:noAutofit/>
-          </a:bodyPr>
-          <a:p>
-            <a:r>
-              <a:rPr lang="en-US" sz="1800" b="1" u="none" strike="noStrike">
-                <a:solidFill>
-                  <a:srgbClr val="FFFFFF"/>
-                </a:solidFill>
-                <a:effectLst/>
-                <a:uFillTx/>
-                <a:latin typeface="Times New Roman"/>
-              </a:rPr>
-              <a:t>4</a:t>
-            </a:r>
-            <a:endParaRPr lang="en-US" sz="1800" b="1" u="none" strike="noStrike">
-              <a:solidFill>
-                <a:srgbClr val="FFFFFF"/>
-              </a:solidFill>
-              <a:effectLst/>
-              <a:uFillTx/>
-              <a:latin typeface="Times New Roman"/>
-            </a:endParaRPr>
-          </a:p>
-        </p:txBody>
-      </p:sp>
-      <p:sp>
-        <p:nvSpPr>
-          <p:cNvPr id="126" name=""/>
-          <p:cNvSpPr/>
-          <p:nvPr/>
-        </p:nvSpPr>
-        <p:spPr>
-          <a:xfrm>
-            <a:off x="1116000" y="3564000"/>
-            <a:ext cx="2088000" cy="576000"/>
-          </a:xfrm>
-          <a:prstGeom prst="rect">
-            <a:avLst/>
-          </a:prstGeom>
-          <a:solidFill>
-            <a:srgbClr val="FFFFFF"/>
-          </a:solidFill>
-          <a:ln w="0">
-            <a:noFill/>
-          </a:ln>
-        </p:spPr>
-        <p:txBody>
-          <a:bodyPr lIns="144000" tIns="90000" rIns="144000" bIns="72000" anchor="ctr" anchorCtr="1">
-            <a:noAutofit/>
-          </a:bodyPr>
-          <a:p>
-            <a:r>
-              <a:rPr lang="en-US" sz="1120" b="1" u="none" strike="noStrike">
-                <a:solidFill>
-                  <a:srgbClr val="233033"/>
-                </a:solidFill>
-                <a:effectLst/>
-                <a:uFillTx/>
-                <a:latin typeface="Arial"/>
-              </a:rPr>
-              <a:t>Transformaciones</a:t>
-            </a:r>
-            <a:endParaRPr lang="en-US" sz="1120" b="1" u="none" strike="noStrike">
-              <a:solidFill>
-                <a:srgbClr val="233033"/>
-              </a:solidFill>
-              <a:effectLst/>
-              <a:uFillTx/>
-              <a:latin typeface="Arial"/>
-            </a:endParaRPr>
-          </a:p>
-          <a:p>
-            <a:r>
-              <a:rPr lang="en-US" sz="1120" b="1" u="none" strike="noStrike">
-                <a:solidFill>
-                  <a:srgbClr val="233033"/>
-                </a:solidFill>
-                <a:effectLst/>
-                <a:uFillTx/>
-                <a:latin typeface="Arial"/>
-              </a:rPr>
-              <a:t>Agrupar amenazas y tratar faltantes de salud.</a:t>
-            </a:r>
-            <a:endParaRPr lang="en-US" sz="1120" b="1" u="none" strike="noStrike">
-              <a:solidFill>
-                <a:srgbClr val="233033"/>
-              </a:solidFill>
-              <a:effectLst/>
-              <a:uFillTx/>
-              <a:latin typeface="Arial"/>
-            </a:endParaRPr>
-          </a:p>
-        </p:txBody>
-      </p:sp>
-      <p:sp>
-        <p:nvSpPr>
-          <p:cNvPr id="127" name=""/>
-          <p:cNvSpPr/>
-          <p:nvPr/>
-        </p:nvSpPr>
-        <p:spPr>
-          <a:xfrm>
-            <a:off x="3672000" y="1512000"/>
-            <a:ext cx="5832000" cy="864000"/>
-          </a:xfrm>
-          <a:prstGeom prst="rect">
-            <a:avLst/>
-          </a:prstGeom>
-          <a:solidFill>
-            <a:srgbClr val="E8E0CF"/>
-          </a:solidFill>
-          <a:ln w="0">
-            <a:noFill/>
-          </a:ln>
-        </p:spPr>
-        <p:txBody>
-          <a:bodyPr lIns="180000" tIns="108000" rIns="144000" bIns="72000" anchor="ctr" anchorCtr="1">
-            <a:noAutofit/>
-          </a:bodyPr>
-          <a:p>
-            <a:r>
-              <a:rPr lang="en-US" sz="1700" b="1" u="none" strike="noStrike">
-                <a:solidFill>
-                  <a:srgbClr val="153329"/>
-                </a:solidFill>
-                <a:effectLst/>
-                <a:uFillTx/>
-                <a:latin typeface="Times New Roman"/>
-              </a:rPr>
-              <a:t>Estructura sugerida del dataset</a:t>
-            </a:r>
-            <a:endParaRPr lang="en-US" sz="1700" b="1" u="none" strike="noStrike">
-              <a:solidFill>
-                <a:srgbClr val="153329"/>
-              </a:solidFill>
-              <a:effectLst/>
-              <a:uFillTx/>
-              <a:latin typeface="Times New Roman"/>
-            </a:endParaRPr>
-          </a:p>
-        </p:txBody>
-      </p:sp>
-      <p:sp>
-        <p:nvSpPr>
-          <p:cNvPr id="128" name=""/>
-          <p:cNvSpPr/>
-          <p:nvPr/>
-        </p:nvSpPr>
-        <p:spPr>
-          <a:xfrm>
-            <a:off x="3672000" y="2520000"/>
-            <a:ext cx="5832000" cy="1440000"/>
-          </a:xfrm>
-          <a:prstGeom prst="rect">
-            <a:avLst/>
-          </a:prstGeom>
-          <a:solidFill>
-            <a:srgbClr val="FFFFFF"/>
-          </a:solidFill>
-          <a:ln w="0">
-            <a:noFill/>
-          </a:ln>
-        </p:spPr>
-        <p:txBody>
-          <a:bodyPr lIns="180000" tIns="144000" rIns="180000" bIns="108000" anchor="ctr" anchorCtr="1">
-            <a:noAutofit/>
-          </a:bodyPr>
-          <a:p>
-            <a:r>
-              <a:rPr lang="en-US" sz="1200" b="0" u="none" strike="noStrike">
-                <a:solidFill>
-                  <a:srgbClr val="233033"/>
-                </a:solidFill>
-                <a:effectLst/>
-                <a:uFillTx/>
-                <a:latin typeface="Arial"/>
-              </a:rPr>
-              <a:t>colonia | año | nidos activos | presión humana | dieta | condición ambiental</a:t>
-            </a:r>
-            <a:endParaRPr lang="en-US" sz="1200" b="0" u="none" strike="noStrike">
-              <a:solidFill>
-                <a:srgbClr val="233033"/>
-              </a:solidFill>
-              <a:effectLst/>
-              <a:uFillTx/>
-              <a:latin typeface="Arial"/>
-            </a:endParaRPr>
-          </a:p>
-          <a:p>
-            <a:endParaRPr lang="en-US" sz="1200" b="0" u="none" strike="noStrike">
-              <a:solidFill>
-                <a:srgbClr val="233033"/>
-              </a:solidFill>
-              <a:effectLst/>
-              <a:uFillTx/>
-              <a:latin typeface="Arial"/>
-            </a:endParaRPr>
-          </a:p>
-          <a:p>
-            <a:r>
-              <a:rPr lang="en-US" sz="1200" b="0" u="none" strike="noStrike">
-                <a:solidFill>
-                  <a:srgbClr val="233033"/>
-                </a:solidFill>
-                <a:effectLst/>
-                <a:uFillTx/>
-                <a:latin typeface="Arial"/>
-              </a:rPr>
-              <a:t>La preparación no solo limpia datos: también construye indicadores comparables entre colonias.</a:t>
-            </a:r>
-            <a:endParaRPr lang="en-US" sz="1200" b="0" u="none" strike="noStrike">
-              <a:solidFill>
-                <a:srgbClr val="233033"/>
-              </a:solidFill>
-              <a:effectLst/>
-              <a:uFillTx/>
-              <a:latin typeface="Arial"/>
-            </a:endParaRPr>
-          </a:p>
-        </p:txBody>
-      </p:sp>
-      <p:sp>
-        <p:nvSpPr>
-          <p:cNvPr id="129" name=""/>
-          <p:cNvSpPr/>
-          <p:nvPr/>
-        </p:nvSpPr>
-        <p:spPr>
-          <a:xfrm>
-            <a:off x="3672000" y="4176000"/>
-            <a:ext cx="5832000" cy="576000"/>
-          </a:xfrm>
-          <a:prstGeom prst="rect">
-            <a:avLst/>
-          </a:prstGeom>
-          <a:solidFill>
-            <a:srgbClr val="1F4D3E"/>
-          </a:solidFill>
-          <a:ln w="0">
-            <a:noFill/>
-          </a:ln>
-        </p:spPr>
-        <p:txBody>
-          <a:bodyPr lIns="180000" tIns="108000" rIns="180000" bIns="72000" anchor="ctr" anchorCtr="1">
-            <a:noAutofit/>
-          </a:bodyPr>
-          <a:p>
-            <a:r>
-              <a:rPr lang="en-US" sz="1250" b="1" u="none" strike="noStrike">
-                <a:solidFill>
-                  <a:srgbClr val="FFFFFF"/>
-                </a:solidFill>
-                <a:effectLst/>
-                <a:uFillTx/>
-                <a:latin typeface="Arial"/>
-              </a:rPr>
-              <a:t>Indicador útil: presión humana = presencia combinada de pesca, basura y turismo.</a:t>
-            </a:r>
-            <a:endParaRPr lang="en-US" sz="1250" b="1" u="none" strike="noStrike">
+                <a:latin typeface="Arial"/>
+              </a:rPr>
+              <a:t>presión humana = pesca incidental + basura marina + perturbación turística observada en una colonia.</a:t>
+            </a:r>
+            <a:endParaRPr lang="en-US" sz="1260" b="1" u="none" strike="noStrike">
               <a:solidFill>
                 <a:srgbClr val="FFFFFF"/>
               </a:solidFill>
@@ -6686,7 +6862,7 @@
       </p:grpSpPr>
       <p:sp>
         <p:nvSpPr>
-          <p:cNvPr id="130" name=""/>
+          <p:cNvPr id="125" name=""/>
           <p:cNvSpPr/>
           <p:nvPr/>
         </p:nvSpPr>
@@ -6723,7 +6899,7 @@
       </p:sp>
       <p:sp>
         <p:nvSpPr>
-          <p:cNvPr id="131" name=""/>
+          <p:cNvPr id="126" name=""/>
           <p:cNvSpPr/>
           <p:nvPr/>
         </p:nvSpPr>
@@ -6760,7 +6936,7 @@
       </p:sp>
       <p:sp>
         <p:nvSpPr>
-          <p:cNvPr id="132" name=""/>
+          <p:cNvPr id="127" name=""/>
           <p:cNvSpPr/>
           <p:nvPr/>
         </p:nvSpPr>
@@ -6797,14 +6973,226 @@
       </p:sp>
       <p:sp>
         <p:nvSpPr>
+          <p:cNvPr id="128" name=""/>
+          <p:cNvSpPr txBox="1"/>
+          <p:nvPr/>
+        </p:nvSpPr>
+        <p:spPr>
+          <a:xfrm>
+            <a:off x="576000" y="432000"/>
+            <a:ext cx="5400000" cy="337320"/>
+          </a:xfrm>
+          <a:prstGeom prst="rect">
+            <a:avLst/>
+          </a:prstGeom>
+          <a:noFill/>
+          <a:ln w="0">
+            <a:noFill/>
+          </a:ln>
+        </p:spPr>
+        <p:txBody>
+          <a:bodyPr lIns="0" tIns="0" rIns="0" bIns="0" anchor="t">
+            <a:spAutoFit/>
+          </a:bodyPr>
+          <a:p>
+            <a:r>
+              <a:rPr lang="en-US" sz="900" b="1" u="none" strike="noStrike">
+                <a:solidFill>
+                  <a:srgbClr val="2D6A6A"/>
+                </a:solidFill>
+                <a:effectLst/>
+                <a:uFillTx/>
+                <a:latin typeface="Arial"/>
+              </a:rPr>
+              <a:t>SALIDA ANALÍTICA</a:t>
+            </a:r>
+            <a:endParaRPr lang="en-US" sz="900" b="1" u="none" strike="noStrike">
+              <a:solidFill>
+                <a:srgbClr val="2D6A6A"/>
+              </a:solidFill>
+              <a:effectLst/>
+              <a:uFillTx/>
+              <a:latin typeface="Arial"/>
+            </a:endParaRPr>
+          </a:p>
+        </p:txBody>
+      </p:sp>
+      <p:sp>
+        <p:nvSpPr>
+          <p:cNvPr id="129" name=""/>
+          <p:cNvSpPr txBox="1"/>
+          <p:nvPr/>
+        </p:nvSpPr>
+        <p:spPr>
+          <a:xfrm>
+            <a:off x="576000" y="720000"/>
+            <a:ext cx="7560000" cy="337320"/>
+          </a:xfrm>
+          <a:prstGeom prst="rect">
+            <a:avLst/>
+          </a:prstGeom>
+          <a:noFill/>
+          <a:ln w="0">
+            <a:noFill/>
+          </a:ln>
+        </p:spPr>
+        <p:txBody>
+          <a:bodyPr lIns="0" tIns="0" rIns="0" bIns="0" anchor="t">
+            <a:spAutoFit/>
+          </a:bodyPr>
+          <a:p>
+            <a:r>
+              <a:rPr lang="en-US" sz="2200" b="1" u="none" strike="noStrike">
+                <a:solidFill>
+                  <a:srgbClr val="1F4D3E"/>
+                </a:solidFill>
+                <a:effectLst/>
+                <a:uFillTx/>
+                <a:latin typeface="Times New Roman"/>
+              </a:rPr>
+              <a:t>Cómo el dataset responde la pregunta del negocio</a:t>
+            </a:r>
+            <a:endParaRPr lang="en-US" sz="2200" b="1" u="none" strike="noStrike">
+              <a:solidFill>
+                <a:srgbClr val="1F4D3E"/>
+              </a:solidFill>
+              <a:effectLst/>
+              <a:uFillTx/>
+              <a:latin typeface="Times New Roman"/>
+            </a:endParaRPr>
+          </a:p>
+        </p:txBody>
+      </p:sp>
+      <p:sp>
+        <p:nvSpPr>
+          <p:cNvPr id="130" name=""/>
+          <p:cNvSpPr txBox="1"/>
+          <p:nvPr/>
+        </p:nvSpPr>
+        <p:spPr>
+          <a:xfrm>
+            <a:off x="9108000" y="5274000"/>
+            <a:ext cx="432000" cy="337320"/>
+          </a:xfrm>
+          <a:prstGeom prst="rect">
+            <a:avLst/>
+          </a:prstGeom>
+          <a:noFill/>
+          <a:ln w="0">
+            <a:noFill/>
+          </a:ln>
+        </p:spPr>
+        <p:txBody>
+          <a:bodyPr lIns="0" tIns="0" rIns="0" bIns="0" anchor="t">
+            <a:spAutoFit/>
+          </a:bodyPr>
+          <a:p>
+            <a:r>
+              <a:rPr lang="en-US" sz="900" b="0" u="none" strike="noStrike">
+                <a:solidFill>
+                  <a:srgbClr val="677776"/>
+                </a:solidFill>
+                <a:effectLst/>
+                <a:uFillTx/>
+                <a:latin typeface="Arial"/>
+              </a:rPr>
+              <a:t>07</a:t>
+            </a:r>
+            <a:endParaRPr lang="en-US" sz="900" b="0" u="none" strike="noStrike">
+              <a:solidFill>
+                <a:srgbClr val="677776"/>
+              </a:solidFill>
+              <a:effectLst/>
+              <a:uFillTx/>
+              <a:latin typeface="Arial"/>
+            </a:endParaRPr>
+          </a:p>
+        </p:txBody>
+      </p:sp>
+      <p:sp>
+        <p:nvSpPr>
+          <p:cNvPr id="131" name=""/>
+          <p:cNvSpPr/>
+          <p:nvPr/>
+        </p:nvSpPr>
+        <p:spPr>
+          <a:xfrm>
+            <a:off x="576000" y="1656000"/>
+            <a:ext cx="4104000" cy="2520000"/>
+          </a:xfrm>
+          <a:prstGeom prst="rect">
+            <a:avLst/>
+          </a:prstGeom>
+          <a:solidFill>
+            <a:srgbClr val="FFFFFF"/>
+          </a:solidFill>
+          <a:ln w="0">
+            <a:noFill/>
+          </a:ln>
+        </p:spPr>
+        <p:txBody>
+          <a:bodyPr lIns="90000" tIns="45000" rIns="90000" bIns="45000" anchor="ctr" anchorCtr="1">
+            <a:noAutofit/>
+          </a:bodyPr>
+          <a:p>
+            <a:endParaRPr lang="en-US" sz="1800" b="0" u="none" strike="noStrike">
+              <a:solidFill>
+                <a:srgbClr val="000000"/>
+              </a:solidFill>
+              <a:effectLst/>
+              <a:uFillTx/>
+              <a:latin typeface="Arial"/>
+            </a:endParaRPr>
+          </a:p>
+        </p:txBody>
+      </p:sp>
+      <p:sp>
+        <p:nvSpPr>
+          <p:cNvPr id="132" name=""/>
+          <p:cNvSpPr/>
+          <p:nvPr/>
+        </p:nvSpPr>
+        <p:spPr>
+          <a:xfrm>
+            <a:off x="576000" y="1656000"/>
+            <a:ext cx="4104000" cy="144000"/>
+          </a:xfrm>
+          <a:prstGeom prst="rect">
+            <a:avLst/>
+          </a:prstGeom>
+          <a:solidFill>
+            <a:srgbClr val="1F4D3E"/>
+          </a:solidFill>
+          <a:ln w="0">
+            <a:noFill/>
+          </a:ln>
+        </p:spPr>
+        <p:txBody>
+          <a:bodyPr lIns="90000" tIns="45000" rIns="90000" bIns="45000" anchor="ctr" anchorCtr="1">
+            <a:noAutofit/>
+          </a:bodyPr>
+          <a:p>
+            <a:endParaRPr lang="en-US" sz="1800" b="0" u="none" strike="noStrike">
+              <a:solidFill>
+                <a:srgbClr val="FFFFFF"/>
+              </a:solidFill>
+              <a:effectLst/>
+              <a:uFillTx/>
+              <a:latin typeface="Arial"/>
+            </a:endParaRPr>
+          </a:p>
+        </p:txBody>
+      </p:sp>
+      <p:sp>
+        <p:nvSpPr>
           <p:cNvPr id="133" name=""/>
           <p:cNvSpPr txBox="1"/>
           <p:nvPr/>
         </p:nvSpPr>
         <p:spPr>
           <a:xfrm>
-            <a:off x="576000" y="432000"/>
-            <a:ext cx="4320000" cy="337320"/>
+            <a:off x="684000" y="1872000"/>
+            <a:ext cx="3888000" cy="337320"/>
           </a:xfrm>
           <a:prstGeom prst="rect">
             <a:avLst/>
@@ -6820,23 +7208,23 @@
           </a:bodyPr>
           <a:p>
             <a:r>
-              <a:rPr lang="en-US" sz="900" b="1" u="none" strike="noStrike">
-                <a:solidFill>
-                  <a:srgbClr val="2D6A6A"/>
-                </a:solidFill>
-                <a:effectLst/>
-                <a:uFillTx/>
-                <a:latin typeface="Arial"/>
-              </a:rPr>
-              <a:t>6. ANÁLISIS ESPERADO</a:t>
-            </a:r>
-            <a:endParaRPr lang="en-US" sz="900" b="1" u="none" strike="noStrike">
-              <a:solidFill>
-                <a:srgbClr val="2D6A6A"/>
-              </a:solidFill>
-              <a:effectLst/>
-              <a:uFillTx/>
-              <a:latin typeface="Arial"/>
+              <a:rPr lang="en-US" sz="1320" b="1" u="none" strike="noStrike">
+                <a:solidFill>
+                  <a:srgbClr val="1F4D3E"/>
+                </a:solidFill>
+                <a:effectLst/>
+                <a:uFillTx/>
+                <a:latin typeface="Times New Roman"/>
+              </a:rPr>
+              <a:t>Relaciones a evaluar</a:t>
+            </a:r>
+            <a:endParaRPr lang="en-US" sz="1320" b="1" u="none" strike="noStrike">
+              <a:solidFill>
+                <a:srgbClr val="1F4D3E"/>
+              </a:solidFill>
+              <a:effectLst/>
+              <a:uFillTx/>
+              <a:latin typeface="Times New Roman"/>
             </a:endParaRPr>
           </a:p>
         </p:txBody>
@@ -6849,8 +7237,8 @@
         </p:nvSpPr>
         <p:spPr>
           <a:xfrm>
-            <a:off x="576000" y="720000"/>
-            <a:ext cx="6840000" cy="618840"/>
+            <a:off x="684000" y="2160000"/>
+            <a:ext cx="3888000" cy="682920"/>
           </a:xfrm>
           <a:prstGeom prst="rect">
             <a:avLst/>
@@ -6866,23 +7254,86 @@
           </a:bodyPr>
           <a:p>
             <a:r>
-              <a:rPr lang="en-US" sz="2200" b="1" u="none" strike="noStrike">
-                <a:solidFill>
-                  <a:srgbClr val="1F4D3E"/>
-                </a:solidFill>
-                <a:effectLst/>
-                <a:uFillTx/>
-                <a:latin typeface="Times New Roman"/>
-              </a:rPr>
-              <a:t>Qué relaciones conviene observar y qué decisiones habilitan</a:t>
-            </a:r>
-            <a:endParaRPr lang="en-US" sz="2200" b="1" u="none" strike="noStrike">
-              <a:solidFill>
-                <a:srgbClr val="1F4D3E"/>
-              </a:solidFill>
-              <a:effectLst/>
-              <a:uFillTx/>
-              <a:latin typeface="Times New Roman"/>
+              <a:rPr lang="en-US" sz="1200" b="0" u="none" strike="noStrike">
+                <a:solidFill>
+                  <a:srgbClr val="233033"/>
+                </a:solidFill>
+                <a:effectLst/>
+                <a:uFillTx/>
+                <a:latin typeface="Arial"/>
+              </a:rPr>
+              <a:t>• alimento -&gt; reproducción</a:t>
+            </a:r>
+            <a:endParaRPr lang="en-US" sz="1200" b="0" u="none" strike="noStrike">
+              <a:solidFill>
+                <a:srgbClr val="233033"/>
+              </a:solidFill>
+              <a:effectLst/>
+              <a:uFillTx/>
+              <a:latin typeface="Arial"/>
+            </a:endParaRPr>
+          </a:p>
+          <a:p>
+            <a:r>
+              <a:rPr lang="en-US" sz="1200" b="0" u="none" strike="noStrike">
+                <a:solidFill>
+                  <a:srgbClr val="233033"/>
+                </a:solidFill>
+                <a:effectLst/>
+                <a:uFillTx/>
+                <a:latin typeface="Arial"/>
+              </a:rPr>
+              <a:t>• amenazas -&gt; éxito reproductivo</a:t>
+            </a:r>
+            <a:endParaRPr lang="en-US" sz="1200" b="0" u="none" strike="noStrike">
+              <a:solidFill>
+                <a:srgbClr val="233033"/>
+              </a:solidFill>
+              <a:effectLst/>
+              <a:uFillTx/>
+              <a:latin typeface="Arial"/>
+            </a:endParaRPr>
+          </a:p>
+          <a:p>
+            <a:r>
+              <a:rPr lang="en-US" sz="1200" b="0" u="none" strike="noStrike">
+                <a:solidFill>
+                  <a:srgbClr val="233033"/>
+                </a:solidFill>
+                <a:effectLst/>
+                <a:uFillTx/>
+                <a:latin typeface="Arial"/>
+              </a:rPr>
+              <a:t>• El Niño -&gt; disponibilidad marina</a:t>
+            </a:r>
+            <a:endParaRPr lang="en-US" sz="1200" b="0" u="none" strike="noStrike">
+              <a:solidFill>
+                <a:srgbClr val="233033"/>
+              </a:solidFill>
+              <a:effectLst/>
+              <a:uFillTx/>
+              <a:latin typeface="Arial"/>
+            </a:endParaRPr>
+          </a:p>
+          <a:p>
+            <a:r>
+              <a:rPr lang="en-US" sz="1200" b="0" u="none" strike="noStrike">
+                <a:solidFill>
+                  <a:srgbClr val="233033"/>
+                </a:solidFill>
+                <a:effectLst/>
+                <a:uFillTx/>
+                <a:latin typeface="Arial"/>
+              </a:rPr>
+              <a:t>• presión humana -&gt; vulnerabilidad por colonia</a:t>
+            </a:r>
+            <a:endParaRPr lang="en-US" sz="1200" b="0" u="none" strike="noStrike">
+              <a:solidFill>
+                <a:srgbClr val="233033"/>
+              </a:solidFill>
+              <a:effectLst/>
+              <a:uFillTx/>
+              <a:latin typeface="Arial"/>
             </a:endParaRPr>
           </a:p>
         </p:txBody>
@@ -6890,13 +7341,87 @@
       <p:sp>
         <p:nvSpPr>
           <p:cNvPr id="135" name=""/>
+          <p:cNvSpPr/>
+          <p:nvPr/>
+        </p:nvSpPr>
+        <p:spPr>
+          <a:xfrm>
+            <a:off x="5328000" y="1656000"/>
+            <a:ext cx="4176000" cy="2520000"/>
+          </a:xfrm>
+          <a:prstGeom prst="rect">
+            <a:avLst/>
+          </a:prstGeom>
+          <a:solidFill>
+            <a:srgbClr val="FFFFFF"/>
+          </a:solidFill>
+          <a:ln w="0">
+            <a:noFill/>
+          </a:ln>
+        </p:spPr>
+        <p:txBody>
+          <a:bodyPr lIns="90000" tIns="45000" rIns="90000" bIns="45000" anchor="ctr" anchorCtr="1">
+            <a:noAutofit/>
+          </a:bodyPr>
+          <a:p>
+            <a:endParaRPr lang="en-US" sz="1800" b="0" u="none" strike="noStrike">
+              <a:solidFill>
+                <a:srgbClr val="000000"/>
+              </a:solidFill>
+              <a:effectLst/>
+              <a:uFillTx/>
+              <a:latin typeface="Arial"/>
+            </a:endParaRPr>
+          </a:p>
+        </p:txBody>
+      </p:sp>
+      <p:sp>
+        <p:nvSpPr>
+          <p:cNvPr id="136" name=""/>
+          <p:cNvSpPr/>
+          <p:nvPr/>
+        </p:nvSpPr>
+        <p:spPr>
+          <a:xfrm>
+            <a:off x="5328000" y="1656000"/>
+            <a:ext cx="4176000" cy="144000"/>
+          </a:xfrm>
+          <a:prstGeom prst="rect">
+            <a:avLst/>
+          </a:prstGeom>
+          <a:solidFill>
+            <a:srgbClr val="2D6A6A"/>
+          </a:solidFill>
+          <a:ln w="0">
+            <a:noFill/>
+          </a:ln>
+        </p:spPr>
+        <p:txBody>
+          <a:bodyPr lIns="90000" tIns="45000" rIns="90000" bIns="45000" anchor="ctr" anchorCtr="1">
+            <a:noAutofit/>
+          </a:bodyPr>
+          <a:p>
+            <a:endParaRPr lang="en-US" sz="1800" b="0" u="none" strike="noStrike">
+              <a:solidFill>
+                <a:srgbClr val="FFFFFF"/>
+              </a:solidFill>
+              <a:effectLst/>
+              <a:uFillTx/>
+              <a:latin typeface="Arial"/>
+            </a:endParaRPr>
+          </a:p>
+        </p:txBody>
+      </p:sp>
+      <p:sp>
+        <p:nvSpPr>
+          <p:cNvPr id="137" name=""/>
           <p:cNvSpPr txBox="1"/>
           <p:nvPr/>
         </p:nvSpPr>
         <p:spPr>
           <a:xfrm>
-            <a:off x="9108000" y="5274000"/>
-            <a:ext cx="432000" cy="337320"/>
+            <a:off x="5436000" y="1872000"/>
+            <a:ext cx="3960000" cy="337320"/>
           </a:xfrm>
           <a:prstGeom prst="rect">
             <a:avLst/>
@@ -6912,97 +7437,23 @@
           </a:bodyPr>
           <a:p>
             <a:r>
-              <a:rPr lang="en-US" sz="900" b="0" u="none" strike="noStrike">
-                <a:solidFill>
-                  <a:srgbClr val="677776"/>
-                </a:solidFill>
-                <a:effectLst/>
-                <a:uFillTx/>
-                <a:latin typeface="Arial"/>
-              </a:rPr>
-              <a:t>07</a:t>
-            </a:r>
-            <a:endParaRPr lang="en-US" sz="900" b="0" u="none" strike="noStrike">
-              <a:solidFill>
-                <a:srgbClr val="677776"/>
-              </a:solidFill>
-              <a:effectLst/>
-              <a:uFillTx/>
-              <a:latin typeface="Arial"/>
-            </a:endParaRPr>
-          </a:p>
-        </p:txBody>
-      </p:sp>
-      <p:sp>
-        <p:nvSpPr>
-          <p:cNvPr id="136" name=""/>
-          <p:cNvSpPr/>
-          <p:nvPr/>
-        </p:nvSpPr>
-        <p:spPr>
-          <a:xfrm>
-            <a:off x="576000" y="1656000"/>
-            <a:ext cx="4104000" cy="2664000"/>
-          </a:xfrm>
-          <a:prstGeom prst="rect">
-            <a:avLst/>
-          </a:prstGeom>
-          <a:solidFill>
-            <a:srgbClr val="FFFFFF"/>
-          </a:solidFill>
-          <a:ln w="0">
-            <a:noFill/>
-          </a:ln>
-        </p:spPr>
-        <p:txBody>
-          <a:bodyPr lIns="90000" tIns="45000" rIns="90000" bIns="45000" anchor="ctr" anchorCtr="1">
-            <a:noAutofit/>
-          </a:bodyPr>
-          <a:p>
-            <a:endParaRPr lang="en-US" sz="1800" b="0" u="none" strike="noStrike">
-              <a:solidFill>
-                <a:srgbClr val="000000"/>
-              </a:solidFill>
-              <a:effectLst/>
-              <a:uFillTx/>
-              <a:latin typeface="Arial"/>
-            </a:endParaRPr>
-          </a:p>
-        </p:txBody>
-      </p:sp>
-      <p:sp>
-        <p:nvSpPr>
-          <p:cNvPr id="137" name=""/>
-          <p:cNvSpPr/>
-          <p:nvPr/>
-        </p:nvSpPr>
-        <p:spPr>
-          <a:xfrm>
-            <a:off x="576000" y="1656000"/>
-            <a:ext cx="4104000" cy="144000"/>
-          </a:xfrm>
-          <a:prstGeom prst="rect">
-            <a:avLst/>
-          </a:prstGeom>
-          <a:solidFill>
-            <a:srgbClr val="1F4D3E"/>
-          </a:solidFill>
-          <a:ln w="0">
-            <a:noFill/>
-          </a:ln>
-        </p:spPr>
-        <p:txBody>
-          <a:bodyPr lIns="90000" tIns="45000" rIns="90000" bIns="45000" anchor="ctr" anchorCtr="1">
-            <a:noAutofit/>
-          </a:bodyPr>
-          <a:p>
-            <a:endParaRPr lang="en-US" sz="1800" b="0" u="none" strike="noStrike">
-              <a:solidFill>
-                <a:srgbClr val="FFFFFF"/>
-              </a:solidFill>
-              <a:effectLst/>
-              <a:uFillTx/>
-              <a:latin typeface="Arial"/>
+              <a:rPr lang="en-US" sz="1320" b="1" u="none" strike="noStrike">
+                <a:solidFill>
+                  <a:srgbClr val="1F4D3E"/>
+                </a:solidFill>
+                <a:effectLst/>
+                <a:uFillTx/>
+                <a:latin typeface="Times New Roman"/>
+              </a:rPr>
+              <a:t>Decisiones que habilita</a:t>
+            </a:r>
+            <a:endParaRPr lang="en-US" sz="1320" b="1" u="none" strike="noStrike">
+              <a:solidFill>
+                <a:srgbClr val="1F4D3E"/>
+              </a:solidFill>
+              <a:effectLst/>
+              <a:uFillTx/>
+              <a:latin typeface="Times New Roman"/>
             </a:endParaRPr>
           </a:p>
         </p:txBody>
@@ -7015,8 +7466,8 @@
         </p:nvSpPr>
         <p:spPr>
           <a:xfrm>
-            <a:off x="684000" y="1872000"/>
-            <a:ext cx="3888000" cy="337320"/>
+            <a:off x="5436000" y="2160000"/>
+            <a:ext cx="3960000" cy="682920"/>
           </a:xfrm>
           <a:prstGeom prst="rect">
             <a:avLst/>
@@ -7032,23 +7483,86 @@
           </a:bodyPr>
           <a:p>
             <a:r>
-              <a:rPr lang="en-US" sz="1350" b="1" u="none" strike="noStrike">
-                <a:solidFill>
-                  <a:srgbClr val="1F4D3E"/>
-                </a:solidFill>
-                <a:effectLst/>
-                <a:uFillTx/>
-                <a:latin typeface="Times New Roman"/>
-              </a:rPr>
-              <a:t>Relaciones a medir</a:t>
-            </a:r>
-            <a:endParaRPr lang="en-US" sz="1350" b="1" u="none" strike="noStrike">
-              <a:solidFill>
-                <a:srgbClr val="1F4D3E"/>
-              </a:solidFill>
-              <a:effectLst/>
-              <a:uFillTx/>
-              <a:latin typeface="Times New Roman"/>
+              <a:rPr lang="en-US" sz="1200" b="0" u="none" strike="noStrike">
+                <a:solidFill>
+                  <a:srgbClr val="233033"/>
+                </a:solidFill>
+                <a:effectLst/>
+                <a:uFillTx/>
+                <a:latin typeface="Arial"/>
+              </a:rPr>
+              <a:t>• priorizar colonias críticas</a:t>
+            </a:r>
+            <a:endParaRPr lang="en-US" sz="1200" b="0" u="none" strike="noStrike">
+              <a:solidFill>
+                <a:srgbClr val="233033"/>
+              </a:solidFill>
+              <a:effectLst/>
+              <a:uFillTx/>
+              <a:latin typeface="Arial"/>
+            </a:endParaRPr>
+          </a:p>
+          <a:p>
+            <a:r>
+              <a:rPr lang="en-US" sz="1200" b="0" u="none" strike="noStrike">
+                <a:solidFill>
+                  <a:srgbClr val="233033"/>
+                </a:solidFill>
+                <a:effectLst/>
+                <a:uFillTx/>
+                <a:latin typeface="Arial"/>
+              </a:rPr>
+              <a:t>• orientar monitoreo</a:t>
+            </a:r>
+            <a:endParaRPr lang="en-US" sz="1200" b="0" u="none" strike="noStrike">
+              <a:solidFill>
+                <a:srgbClr val="233033"/>
+              </a:solidFill>
+              <a:effectLst/>
+              <a:uFillTx/>
+              <a:latin typeface="Arial"/>
+            </a:endParaRPr>
+          </a:p>
+          <a:p>
+            <a:r>
+              <a:rPr lang="en-US" sz="1200" b="0" u="none" strike="noStrike">
+                <a:solidFill>
+                  <a:srgbClr val="233033"/>
+                </a:solidFill>
+                <a:effectLst/>
+                <a:uFillTx/>
+                <a:latin typeface="Arial"/>
+              </a:rPr>
+              <a:t>• justificar medidas de conservación</a:t>
+            </a:r>
+            <a:endParaRPr lang="en-US" sz="1200" b="0" u="none" strike="noStrike">
+              <a:solidFill>
+                <a:srgbClr val="233033"/>
+              </a:solidFill>
+              <a:effectLst/>
+              <a:uFillTx/>
+              <a:latin typeface="Arial"/>
+            </a:endParaRPr>
+          </a:p>
+          <a:p>
+            <a:r>
+              <a:rPr lang="en-US" sz="1200" b="0" u="none" strike="noStrike">
+                <a:solidFill>
+                  <a:srgbClr val="233033"/>
+                </a:solidFill>
+                <a:effectLst/>
+                <a:uFillTx/>
+                <a:latin typeface="Arial"/>
+              </a:rPr>
+              <a:t>• comunicar riesgos con evidencia</a:t>
+            </a:r>
+            <a:endParaRPr lang="en-US" sz="1200" b="0" u="none" strike="noStrike">
+              <a:solidFill>
+                <a:srgbClr val="233033"/>
+              </a:solidFill>
+              <a:effectLst/>
+              <a:uFillTx/>
+              <a:latin typeface="Arial"/>
             </a:endParaRPr>
           </a:p>
         </p:txBody>
@@ -7056,350 +7570,12 @@
       <p:sp>
         <p:nvSpPr>
           <p:cNvPr id="139" name=""/>
-          <p:cNvSpPr txBox="1"/>
-          <p:nvPr/>
-        </p:nvSpPr>
-        <p:spPr>
-          <a:xfrm>
-            <a:off x="684000" y="2160000"/>
-            <a:ext cx="3888000" cy="682920"/>
-          </a:xfrm>
-          <a:prstGeom prst="rect">
-            <a:avLst/>
-          </a:prstGeom>
-          <a:noFill/>
-          <a:ln w="0">
-            <a:noFill/>
-          </a:ln>
-        </p:spPr>
-        <p:txBody>
-          <a:bodyPr lIns="0" tIns="0" rIns="0" bIns="0" anchor="t">
-            <a:spAutoFit/>
-          </a:bodyPr>
-          <a:p>
-            <a:r>
-              <a:rPr lang="en-US" sz="1200" b="0" u="none" strike="noStrike">
-                <a:solidFill>
-                  <a:srgbClr val="233033"/>
-                </a:solidFill>
-                <a:effectLst/>
-                <a:uFillTx/>
-                <a:latin typeface="Arial"/>
-              </a:rPr>
-              <a:t>• alimento -&gt; reproducción</a:t>
-            </a:r>
-            <a:endParaRPr lang="en-US" sz="1200" b="0" u="none" strike="noStrike">
-              <a:solidFill>
-                <a:srgbClr val="233033"/>
-              </a:solidFill>
-              <a:effectLst/>
-              <a:uFillTx/>
-              <a:latin typeface="Arial"/>
-            </a:endParaRPr>
-          </a:p>
-          <a:p>
-            <a:r>
-              <a:rPr lang="en-US" sz="1200" b="0" u="none" strike="noStrike">
-                <a:solidFill>
-                  <a:srgbClr val="233033"/>
-                </a:solidFill>
-                <a:effectLst/>
-                <a:uFillTx/>
-                <a:latin typeface="Arial"/>
-              </a:rPr>
-              <a:t>• amenazas -&gt; éxito reproductivo</a:t>
-            </a:r>
-            <a:endParaRPr lang="en-US" sz="1200" b="0" u="none" strike="noStrike">
-              <a:solidFill>
-                <a:srgbClr val="233033"/>
-              </a:solidFill>
-              <a:effectLst/>
-              <a:uFillTx/>
-              <a:latin typeface="Arial"/>
-            </a:endParaRPr>
-          </a:p>
-          <a:p>
-            <a:r>
-              <a:rPr lang="en-US" sz="1200" b="0" u="none" strike="noStrike">
-                <a:solidFill>
-                  <a:srgbClr val="233033"/>
-                </a:solidFill>
-                <a:effectLst/>
-                <a:uFillTx/>
-                <a:latin typeface="Arial"/>
-              </a:rPr>
-              <a:t>• condiciones ambientales -&gt; disponibilidad marina</a:t>
-            </a:r>
-            <a:endParaRPr lang="en-US" sz="1200" b="0" u="none" strike="noStrike">
-              <a:solidFill>
-                <a:srgbClr val="233033"/>
-              </a:solidFill>
-              <a:effectLst/>
-              <a:uFillTx/>
-              <a:latin typeface="Arial"/>
-            </a:endParaRPr>
-          </a:p>
-          <a:p>
-            <a:r>
-              <a:rPr lang="en-US" sz="1200" b="0" u="none" strike="noStrike">
-                <a:solidFill>
-                  <a:srgbClr val="233033"/>
-                </a:solidFill>
-                <a:effectLst/>
-                <a:uFillTx/>
-                <a:latin typeface="Arial"/>
-              </a:rPr>
-              <a:t>• presión humana -&gt; vulnerabilidad de la colonia</a:t>
-            </a:r>
-            <a:endParaRPr lang="en-US" sz="1200" b="0" u="none" strike="noStrike">
-              <a:solidFill>
-                <a:srgbClr val="233033"/>
-              </a:solidFill>
-              <a:effectLst/>
-              <a:uFillTx/>
-              <a:latin typeface="Arial"/>
-            </a:endParaRPr>
-          </a:p>
-        </p:txBody>
-      </p:sp>
-      <p:sp>
-        <p:nvSpPr>
-          <p:cNvPr id="140" name=""/>
-          <p:cNvSpPr/>
-          <p:nvPr/>
-        </p:nvSpPr>
-        <p:spPr>
-          <a:xfrm>
-            <a:off x="5328000" y="1656000"/>
-            <a:ext cx="4176000" cy="2664000"/>
-          </a:xfrm>
-          <a:prstGeom prst="rect">
-            <a:avLst/>
-          </a:prstGeom>
-          <a:solidFill>
-            <a:srgbClr val="FFFFFF"/>
-          </a:solidFill>
-          <a:ln w="0">
-            <a:noFill/>
-          </a:ln>
-        </p:spPr>
-        <p:txBody>
-          <a:bodyPr lIns="90000" tIns="45000" rIns="90000" bIns="45000" anchor="ctr" anchorCtr="1">
-            <a:noAutofit/>
-          </a:bodyPr>
-          <a:p>
-            <a:endParaRPr lang="en-US" sz="1800" b="0" u="none" strike="noStrike">
-              <a:solidFill>
-                <a:srgbClr val="000000"/>
-              </a:solidFill>
-              <a:effectLst/>
-              <a:uFillTx/>
-              <a:latin typeface="Arial"/>
-            </a:endParaRPr>
-          </a:p>
-        </p:txBody>
-      </p:sp>
-      <p:sp>
-        <p:nvSpPr>
-          <p:cNvPr id="141" name=""/>
-          <p:cNvSpPr/>
-          <p:nvPr/>
-        </p:nvSpPr>
-        <p:spPr>
-          <a:xfrm>
-            <a:off x="5328000" y="1656000"/>
-            <a:ext cx="4176000" cy="144000"/>
-          </a:xfrm>
-          <a:prstGeom prst="rect">
-            <a:avLst/>
-          </a:prstGeom>
-          <a:solidFill>
-            <a:srgbClr val="2D6A6A"/>
-          </a:solidFill>
-          <a:ln w="0">
-            <a:noFill/>
-          </a:ln>
-        </p:spPr>
-        <p:txBody>
-          <a:bodyPr lIns="90000" tIns="45000" rIns="90000" bIns="45000" anchor="ctr" anchorCtr="1">
-            <a:noAutofit/>
-          </a:bodyPr>
-          <a:p>
-            <a:endParaRPr lang="en-US" sz="1800" b="0" u="none" strike="noStrike">
-              <a:solidFill>
-                <a:srgbClr val="FFFFFF"/>
-              </a:solidFill>
-              <a:effectLst/>
-              <a:uFillTx/>
-              <a:latin typeface="Arial"/>
-            </a:endParaRPr>
-          </a:p>
-        </p:txBody>
-      </p:sp>
-      <p:sp>
-        <p:nvSpPr>
-          <p:cNvPr id="142" name=""/>
-          <p:cNvSpPr txBox="1"/>
-          <p:nvPr/>
-        </p:nvSpPr>
-        <p:spPr>
-          <a:xfrm>
-            <a:off x="5436000" y="1872000"/>
-            <a:ext cx="3960000" cy="337320"/>
-          </a:xfrm>
-          <a:prstGeom prst="rect">
-            <a:avLst/>
-          </a:prstGeom>
-          <a:noFill/>
-          <a:ln w="0">
-            <a:noFill/>
-          </a:ln>
-        </p:spPr>
-        <p:txBody>
-          <a:bodyPr lIns="0" tIns="0" rIns="0" bIns="0" anchor="t">
-            <a:spAutoFit/>
-          </a:bodyPr>
-          <a:p>
-            <a:r>
-              <a:rPr lang="en-US" sz="1350" b="1" u="none" strike="noStrike">
-                <a:solidFill>
-                  <a:srgbClr val="1F4D3E"/>
-                </a:solidFill>
-                <a:effectLst/>
-                <a:uFillTx/>
-                <a:latin typeface="Times New Roman"/>
-              </a:rPr>
-              <a:t>Resultados esperados</a:t>
-            </a:r>
-            <a:endParaRPr lang="en-US" sz="1350" b="1" u="none" strike="noStrike">
-              <a:solidFill>
-                <a:srgbClr val="1F4D3E"/>
-              </a:solidFill>
-              <a:effectLst/>
-              <a:uFillTx/>
-              <a:latin typeface="Times New Roman"/>
-            </a:endParaRPr>
-          </a:p>
-        </p:txBody>
-      </p:sp>
-      <p:sp>
-        <p:nvSpPr>
-          <p:cNvPr id="143" name=""/>
-          <p:cNvSpPr txBox="1"/>
-          <p:nvPr/>
-        </p:nvSpPr>
-        <p:spPr>
-          <a:xfrm>
-            <a:off x="5436000" y="2160000"/>
-            <a:ext cx="3960000" cy="682920"/>
-          </a:xfrm>
-          <a:prstGeom prst="rect">
-            <a:avLst/>
-          </a:prstGeom>
-          <a:noFill/>
-          <a:ln w="0">
-            <a:noFill/>
-          </a:ln>
-        </p:spPr>
-        <p:txBody>
-          <a:bodyPr lIns="0" tIns="0" rIns="0" bIns="0" anchor="t">
-            <a:spAutoFit/>
-          </a:bodyPr>
-          <a:p>
-            <a:r>
-              <a:rPr lang="en-US" sz="1200" b="0" u="none" strike="noStrike">
-                <a:solidFill>
-                  <a:srgbClr val="233033"/>
-                </a:solidFill>
-                <a:effectLst/>
-                <a:uFillTx/>
-                <a:latin typeface="Arial"/>
-              </a:rPr>
-              <a:t>• Colonias más vulnerables.</a:t>
-            </a:r>
-            <a:endParaRPr lang="en-US" sz="1200" b="0" u="none" strike="noStrike">
-              <a:solidFill>
-                <a:srgbClr val="233033"/>
-              </a:solidFill>
-              <a:effectLst/>
-              <a:uFillTx/>
-              <a:latin typeface="Arial"/>
-            </a:endParaRPr>
-          </a:p>
-          <a:p>
-            <a:r>
-              <a:rPr lang="en-US" sz="1200" b="0" u="none" strike="noStrike">
-                <a:solidFill>
-                  <a:srgbClr val="233033"/>
-                </a:solidFill>
-                <a:effectLst/>
-                <a:uFillTx/>
-                <a:latin typeface="Arial"/>
-              </a:rPr>
-              <a:t>• Factores críticos para la conservación.</a:t>
-            </a:r>
-            <a:endParaRPr lang="en-US" sz="1200" b="0" u="none" strike="noStrike">
-              <a:solidFill>
-                <a:srgbClr val="233033"/>
-              </a:solidFill>
-              <a:effectLst/>
-              <a:uFillTx/>
-              <a:latin typeface="Arial"/>
-            </a:endParaRPr>
-          </a:p>
-          <a:p>
-            <a:r>
-              <a:rPr lang="en-US" sz="1200" b="0" u="none" strike="noStrike">
-                <a:solidFill>
-                  <a:srgbClr val="233033"/>
-                </a:solidFill>
-                <a:effectLst/>
-                <a:uFillTx/>
-                <a:latin typeface="Arial"/>
-              </a:rPr>
-              <a:t>• Variables prioritarias para monitoreo.</a:t>
-            </a:r>
-            <a:endParaRPr lang="en-US" sz="1200" b="0" u="none" strike="noStrike">
-              <a:solidFill>
-                <a:srgbClr val="233033"/>
-              </a:solidFill>
-              <a:effectLst/>
-              <a:uFillTx/>
-              <a:latin typeface="Arial"/>
-            </a:endParaRPr>
-          </a:p>
-          <a:p>
-            <a:r>
-              <a:rPr lang="en-US" sz="1200" b="0" u="none" strike="noStrike">
-                <a:solidFill>
-                  <a:srgbClr val="233033"/>
-                </a:solidFill>
-                <a:effectLst/>
-                <a:uFillTx/>
-                <a:latin typeface="Arial"/>
-              </a:rPr>
-              <a:t>• Evidencia para orientar decisiones.</a:t>
-            </a:r>
-            <a:endParaRPr lang="en-US" sz="1200" b="0" u="none" strike="noStrike">
-              <a:solidFill>
-                <a:srgbClr val="233033"/>
-              </a:solidFill>
-              <a:effectLst/>
-              <a:uFillTx/>
-              <a:latin typeface="Arial"/>
-            </a:endParaRPr>
-          </a:p>
-        </p:txBody>
-      </p:sp>
-      <p:sp>
-        <p:nvSpPr>
-          <p:cNvPr id="144" name=""/>
-          <p:cNvSpPr/>
-          <p:nvPr/>
-        </p:nvSpPr>
-        <p:spPr>
-          <a:xfrm>
-            <a:off x="576000" y="4572000"/>
+          <p:cNvSpPr/>
+          <p:nvPr/>
+        </p:nvSpPr>
+        <p:spPr>
+          <a:xfrm>
+            <a:off x="576000" y="4464000"/>
             <a:ext cx="8928000" cy="648000"/>
           </a:xfrm>
           <a:prstGeom prst="rect">
@@ -7418,7 +7594,7 @@
           </a:bodyPr>
           <a:p>
             <a:r>
-              <a:rPr lang="en-US" sz="1450" b="1" u="none" strike="noStrike">
+              <a:rPr lang="en-US" sz="1380" b="1" u="none" strike="noStrike">
                 <a:solidFill>
                   <a:srgbClr val="FFFFFF"/>
                 </a:solidFill>
@@ -7426,9 +7602,9 @@
                 <a:uFillTx/>
                 <a:latin typeface="Arial"/>
               </a:rPr>
-              <a:t>La analítica permite pasar de observaciones aisladas a criterios concretos para priorizar conservación.</a:t>
-            </a:r>
-            <a:endParaRPr lang="en-US" sz="1450" b="1" u="none" strike="noStrike">
+              <a:t>Conclusión metodológica: la presentación no se limita a describir la especie; muestra cómo convertir un problema ambiental en un problema analítico estructurado.</a:t>
+            </a:r>
+            <a:endParaRPr lang="en-US" sz="1380" b="1" u="none" strike="noStrike">
               <a:solidFill>
                 <a:srgbClr val="FFFFFF"/>
               </a:solidFill>
@@ -7471,7 +7647,7 @@
       </p:grpSpPr>
       <p:sp>
         <p:nvSpPr>
-          <p:cNvPr id="145" name=""/>
+          <p:cNvPr id="140" name=""/>
           <p:cNvSpPr/>
           <p:nvPr/>
         </p:nvSpPr>
@@ -7508,7 +7684,7 @@
       </p:sp>
       <p:sp>
         <p:nvSpPr>
-          <p:cNvPr id="146" name=""/>
+          <p:cNvPr id="141" name=""/>
           <p:cNvSpPr/>
           <p:nvPr/>
         </p:nvSpPr>
@@ -7545,7 +7721,7 @@
       </p:sp>
       <p:sp>
         <p:nvSpPr>
-          <p:cNvPr id="147" name=""/>
+          <p:cNvPr id="142" name=""/>
           <p:cNvSpPr txBox="1"/>
           <p:nvPr/>
         </p:nvSpPr>
@@ -7576,7 +7752,7 @@
                 <a:uFillTx/>
                 <a:latin typeface="Arial"/>
               </a:rPr>
-              <a:t>7. CONCLUSION</a:t>
+              <a:t>CIERRE</a:t>
             </a:r>
             <a:endParaRPr lang="en-US" sz="900" b="1" u="none" strike="noStrike">
               <a:solidFill>
@@ -7591,7 +7767,7 @@
       </p:sp>
       <p:sp>
         <p:nvSpPr>
-          <p:cNvPr id="148" name=""/>
+          <p:cNvPr id="143" name=""/>
           <p:cNvSpPr txBox="1"/>
           <p:nvPr/>
         </p:nvSpPr>
@@ -7622,7 +7798,7 @@
                 <a:uFillTx/>
                 <a:latin typeface="Times New Roman"/>
               </a:rPr>
-              <a:t>La supervivencia del pingüino de Humboldt depende del equilibrio entre factores naturales y presión humana.</a:t>
+              <a:t>El pingüino de Humboldt funciona como indicador del equilibrio entre salud marina y presión humana.</a:t>
             </a:r>
             <a:endParaRPr lang="en-US" sz="2400" b="1" u="none" strike="noStrike">
               <a:solidFill>
@@ -7637,14 +7813,14 @@
       </p:sp>
       <p:sp>
         <p:nvSpPr>
-          <p:cNvPr id="149" name=""/>
+          <p:cNvPr id="144" name=""/>
           <p:cNvSpPr txBox="1"/>
           <p:nvPr/>
         </p:nvSpPr>
         <p:spPr>
           <a:xfrm>
-            <a:off x="576000" y="3168000"/>
-            <a:ext cx="4392000" cy="572760"/>
+            <a:off x="576000" y="3024000"/>
+            <a:ext cx="4392000" cy="563040"/>
           </a:xfrm>
           <a:prstGeom prst="rect">
             <a:avLst/>
@@ -7660,7 +7836,7 @@
           </a:bodyPr>
           <a:p>
             <a:r>
-              <a:rPr lang="en-US" sz="1350" b="0" u="none" strike="noStrike">
+              <a:rPr lang="en-US" sz="1320" b="0" u="none" strike="noStrike">
                 <a:solidFill>
                   <a:srgbClr val="DDE8E1"/>
                 </a:solidFill>
@@ -7668,9 +7844,9 @@
                 <a:uFillTx/>
                 <a:latin typeface="Arial"/>
               </a:rPr>
-              <a:t>El análisis de datos permite identificar riesgos, comparar colonias y orientar estrategias de conservación con evidencia.</a:t>
-            </a:r>
-            <a:endParaRPr lang="en-US" sz="1350" b="0" u="none" strike="noStrike">
+              <a:t>Por eso, el enfoque CRISP-DM ayuda a ordenar la evidencia y a convertirla en conservación basada en datos.</a:t>
+            </a:r>
+            <a:endParaRPr lang="en-US" sz="1320" b="0" u="none" strike="noStrike">
               <a:solidFill>
                 <a:srgbClr val="DDE8E1"/>
               </a:solidFill>
@@ -7683,14 +7859,14 @@
       </p:sp>
       <p:sp>
         <p:nvSpPr>
-          <p:cNvPr id="150" name=""/>
+          <p:cNvPr id="145" name=""/>
           <p:cNvSpPr/>
           <p:nvPr/>
         </p:nvSpPr>
         <p:spPr>
           <a:xfrm>
             <a:off x="5904000" y="1008000"/>
-            <a:ext cx="3600000" cy="2592000"/>
+            <a:ext cx="3600000" cy="2448000"/>
           </a:xfrm>
           <a:prstGeom prst="rect">
             <a:avLst/>
@@ -7720,7 +7896,7 @@
       </p:sp>
       <p:pic>
         <p:nvPicPr>
-          <p:cNvPr id="151" name=""/>
+          <p:cNvPr id="146" name=""/>
           <p:cNvPicPr/>
           <p:nvPr/>
         </p:nvPicPr>
@@ -7730,8 +7906,8 @@
         </p:blipFill>
         <p:spPr>
           <a:xfrm>
-            <a:off x="5994000" y="1155600"/>
-            <a:ext cx="3420000" cy="2296440"/>
+            <a:off x="6015240" y="1098000"/>
+            <a:ext cx="3377160" cy="2268000"/>
           </a:xfrm>
           <a:prstGeom prst="rect">
             <a:avLst/>
@@ -7744,7 +7920,53 @@
       </p:pic>
       <p:sp>
         <p:nvSpPr>
-          <p:cNvPr id="152" name=""/>
+          <p:cNvPr id="147" name=""/>
+          <p:cNvSpPr txBox="1"/>
+          <p:nvPr/>
+        </p:nvSpPr>
+        <p:spPr>
+          <a:xfrm>
+            <a:off x="5904000" y="3600000"/>
+            <a:ext cx="3600000" cy="337320"/>
+          </a:xfrm>
+          <a:prstGeom prst="rect">
+            <a:avLst/>
+          </a:prstGeom>
+          <a:noFill/>
+          <a:ln w="0">
+            <a:noFill/>
+          </a:ln>
+        </p:spPr>
+        <p:txBody>
+          <a:bodyPr lIns="0" tIns="0" rIns="0" bIns="0" anchor="t">
+            <a:spAutoFit/>
+          </a:bodyPr>
+          <a:p>
+            <a:r>
+              <a:rPr lang="en-US" sz="920" b="0" u="none" strike="noStrike">
+                <a:solidFill>
+                  <a:srgbClr val="677776"/>
+                </a:solidFill>
+                <a:effectLst/>
+                <a:uFillTx/>
+                <a:latin typeface="Arial"/>
+              </a:rPr>
+              <a:t>Fig. 3. Pingüinos de Humboldt. Fuente: archivo de imagen provisto en el repositorio de la actividad.</a:t>
+            </a:r>
+            <a:endParaRPr lang="en-US" sz="920" b="0" u="none" strike="noStrike">
+              <a:solidFill>
+                <a:srgbClr val="677776"/>
+              </a:solidFill>
+              <a:effectLst/>
+              <a:uFillTx/>
+              <a:latin typeface="Arial"/>
+            </a:endParaRPr>
+          </a:p>
+        </p:txBody>
+      </p:sp>
+      <p:sp>
+        <p:nvSpPr>
+          <p:cNvPr id="148" name=""/>
           <p:cNvSpPr/>
           <p:nvPr/>
         </p:nvSpPr>
@@ -7781,7 +8003,7 @@
       </p:sp>
       <p:sp>
         <p:nvSpPr>
-          <p:cNvPr id="153" name=""/>
+          <p:cNvPr id="149" name=""/>
           <p:cNvSpPr/>
           <p:nvPr/>
         </p:nvSpPr>
@@ -7818,13 +8040,179 @@
       </p:sp>
       <p:sp>
         <p:nvSpPr>
+          <p:cNvPr id="150" name=""/>
+          <p:cNvSpPr txBox="1"/>
+          <p:nvPr/>
+        </p:nvSpPr>
+        <p:spPr>
+          <a:xfrm>
+            <a:off x="684000" y="4356000"/>
+            <a:ext cx="2592000" cy="337320"/>
+          </a:xfrm>
+          <a:prstGeom prst="rect">
+            <a:avLst/>
+          </a:prstGeom>
+          <a:noFill/>
+          <a:ln w="0">
+            <a:noFill/>
+          </a:ln>
+        </p:spPr>
+        <p:txBody>
+          <a:bodyPr lIns="0" tIns="0" rIns="0" bIns="0" anchor="t">
+            <a:spAutoFit/>
+          </a:bodyPr>
+          <a:p>
+            <a:r>
+              <a:rPr lang="en-US" sz="1320" b="1" u="none" strike="noStrike">
+                <a:solidFill>
+                  <a:srgbClr val="1F4D3E"/>
+                </a:solidFill>
+                <a:effectLst/>
+                <a:uFillTx/>
+                <a:latin typeface="Times New Roman"/>
+              </a:rPr>
+              <a:t>Amenaza prioritaria</a:t>
+            </a:r>
+            <a:endParaRPr lang="en-US" sz="1320" b="1" u="none" strike="noStrike">
+              <a:solidFill>
+                <a:srgbClr val="1F4D3E"/>
+              </a:solidFill>
+              <a:effectLst/>
+              <a:uFillTx/>
+              <a:latin typeface="Times New Roman"/>
+            </a:endParaRPr>
+          </a:p>
+        </p:txBody>
+      </p:sp>
+      <p:sp>
+        <p:nvSpPr>
+          <p:cNvPr id="151" name=""/>
+          <p:cNvSpPr txBox="1"/>
+          <p:nvPr/>
+        </p:nvSpPr>
+        <p:spPr>
+          <a:xfrm>
+            <a:off x="684000" y="4644000"/>
+            <a:ext cx="2592000" cy="337320"/>
+          </a:xfrm>
+          <a:prstGeom prst="rect">
+            <a:avLst/>
+          </a:prstGeom>
+          <a:noFill/>
+          <a:ln w="0">
+            <a:noFill/>
+          </a:ln>
+        </p:spPr>
+        <p:txBody>
+          <a:bodyPr lIns="0" tIns="0" rIns="0" bIns="0" anchor="t">
+            <a:spAutoFit/>
+          </a:bodyPr>
+          <a:p>
+            <a:r>
+              <a:rPr lang="en-US" sz="1010" b="0" u="none" strike="noStrike">
+                <a:solidFill>
+                  <a:srgbClr val="233033"/>
+                </a:solidFill>
+                <a:effectLst/>
+                <a:uFillTx/>
+                <a:latin typeface="Arial"/>
+              </a:rPr>
+              <a:t>Pesca y pérdida de alimento aparecen como variables críticas.</a:t>
+            </a:r>
+            <a:endParaRPr lang="en-US" sz="1010" b="0" u="none" strike="noStrike">
+              <a:solidFill>
+                <a:srgbClr val="233033"/>
+              </a:solidFill>
+              <a:effectLst/>
+              <a:uFillTx/>
+              <a:latin typeface="Arial"/>
+            </a:endParaRPr>
+          </a:p>
+        </p:txBody>
+      </p:sp>
+      <p:sp>
+        <p:nvSpPr>
+          <p:cNvPr id="152" name=""/>
+          <p:cNvSpPr/>
+          <p:nvPr/>
+        </p:nvSpPr>
+        <p:spPr>
+          <a:xfrm>
+            <a:off x="3636000" y="4140000"/>
+            <a:ext cx="2808000" cy="936000"/>
+          </a:xfrm>
+          <a:prstGeom prst="rect">
+            <a:avLst/>
+          </a:prstGeom>
+          <a:solidFill>
+            <a:srgbClr val="FFFFFF"/>
+          </a:solidFill>
+          <a:ln w="0">
+            <a:noFill/>
+          </a:ln>
+        </p:spPr>
+        <p:txBody>
+          <a:bodyPr lIns="90000" tIns="45000" rIns="90000" bIns="45000" anchor="ctr" anchorCtr="1">
+            <a:noAutofit/>
+          </a:bodyPr>
+          <a:p>
+            <a:endParaRPr lang="en-US" sz="1800" b="0" u="none" strike="noStrike">
+              <a:solidFill>
+                <a:srgbClr val="000000"/>
+              </a:solidFill>
+              <a:effectLst/>
+              <a:uFillTx/>
+              <a:latin typeface="Arial"/>
+            </a:endParaRPr>
+          </a:p>
+        </p:txBody>
+      </p:sp>
+      <p:sp>
+        <p:nvSpPr>
+          <p:cNvPr id="153" name=""/>
+          <p:cNvSpPr/>
+          <p:nvPr/>
+        </p:nvSpPr>
+        <p:spPr>
+          <a:xfrm>
+            <a:off x="3636000" y="4140000"/>
+            <a:ext cx="2808000" cy="144000"/>
+          </a:xfrm>
+          <a:prstGeom prst="rect">
+            <a:avLst/>
+          </a:prstGeom>
+          <a:solidFill>
+            <a:srgbClr val="2D6A6A"/>
+          </a:solidFill>
+          <a:ln w="0">
+            <a:noFill/>
+          </a:ln>
+        </p:spPr>
+        <p:txBody>
+          <a:bodyPr lIns="90000" tIns="45000" rIns="90000" bIns="45000" anchor="ctr" anchorCtr="1">
+            <a:noAutofit/>
+          </a:bodyPr>
+          <a:p>
+            <a:endParaRPr lang="en-US" sz="1800" b="0" u="none" strike="noStrike">
+              <a:solidFill>
+                <a:srgbClr val="FFFFFF"/>
+              </a:solidFill>
+              <a:effectLst/>
+              <a:uFillTx/>
+              <a:latin typeface="Arial"/>
+            </a:endParaRPr>
+          </a:p>
+        </p:txBody>
+      </p:sp>
+      <p:sp>
+        <p:nvSpPr>
           <p:cNvPr id="154" name=""/>
           <p:cNvSpPr txBox="1"/>
           <p:nvPr/>
         </p:nvSpPr>
         <p:spPr>
           <a:xfrm>
-            <a:off x="684000" y="4356000"/>
+            <a:off x="3744000" y="4356000"/>
             <a:ext cx="2592000" cy="337320"/>
           </a:xfrm>
           <a:prstGeom prst="rect">
@@ -7841,7 +8229,7 @@
           </a:bodyPr>
           <a:p>
             <a:r>
-              <a:rPr lang="en-US" sz="1350" b="1" u="none" strike="noStrike">
+              <a:rPr lang="en-US" sz="1320" b="1" u="none" strike="noStrike">
                 <a:solidFill>
                   <a:srgbClr val="1F4D3E"/>
                 </a:solidFill>
@@ -7849,9 +8237,9 @@
                 <a:uFillTx/>
                 <a:latin typeface="Times New Roman"/>
               </a:rPr>
-              <a:t>Amenazas críticas</a:t>
-            </a:r>
-            <a:endParaRPr lang="en-US" sz="1350" b="1" u="none" strike="noStrike">
+              <a:t>Indicador clave</a:t>
+            </a:r>
+            <a:endParaRPr lang="en-US" sz="1320" b="1" u="none" strike="noStrike">
               <a:solidFill>
                 <a:srgbClr val="1F4D3E"/>
               </a:solidFill>
@@ -7870,7 +8258,7 @@
         </p:nvSpPr>
         <p:spPr>
           <a:xfrm>
-            <a:off x="684000" y="4644000"/>
+            <a:off x="3744000" y="4644000"/>
             <a:ext cx="2592000" cy="337320"/>
           </a:xfrm>
           <a:prstGeom prst="rect">
@@ -7887,7 +8275,7 @@
           </a:bodyPr>
           <a:p>
             <a:r>
-              <a:rPr lang="en-US" sz="1030" b="0" u="none" strike="noStrike">
+              <a:rPr lang="en-US" sz="1010" b="0" u="none" strike="noStrike">
                 <a:solidFill>
                   <a:srgbClr val="233033"/>
                 </a:solidFill>
@@ -7895,9 +8283,9 @@
                 <a:uFillTx/>
                 <a:latin typeface="Arial"/>
               </a:rPr>
-              <a:t>La basura marina y la pesca concentran los riesgos más visibles.</a:t>
-            </a:r>
-            <a:endParaRPr lang="en-US" sz="1030" b="0" u="none" strike="noStrike">
+              <a:t>La reproducción y los nidos activos son el mejor termómetro del sistema.</a:t>
+            </a:r>
+            <a:endParaRPr lang="en-US" sz="1010" b="0" u="none" strike="noStrike">
               <a:solidFill>
                 <a:srgbClr val="233033"/>
               </a:solidFill>
@@ -7916,7 +8304,7 @@
         </p:nvSpPr>
         <p:spPr>
           <a:xfrm>
-            <a:off x="3636000" y="4140000"/>
+            <a:off x="6696000" y="4140000"/>
             <a:ext cx="2808000" cy="936000"/>
           </a:xfrm>
           <a:prstGeom prst="rect">
@@ -7953,14 +8341,14 @@
         </p:nvSpPr>
         <p:spPr>
           <a:xfrm>
-            <a:off x="3636000" y="4140000"/>
+            <a:off x="6696000" y="4140000"/>
             <a:ext cx="2808000" cy="144000"/>
           </a:xfrm>
           <a:prstGeom prst="rect">
             <a:avLst/>
           </a:prstGeom>
           <a:solidFill>
-            <a:srgbClr val="2D6A6A"/>
+            <a:srgbClr val="88A97C"/>
           </a:solidFill>
           <a:ln w="0">
             <a:noFill/>
@@ -7973,7 +8361,7 @@
           <a:p>
             <a:endParaRPr lang="en-US" sz="1800" b="0" u="none" strike="noStrike">
               <a:solidFill>
-                <a:srgbClr val="FFFFFF"/>
+                <a:srgbClr val="000000"/>
               </a:solidFill>
               <a:effectLst/>
               <a:uFillTx/>
@@ -7990,7 +8378,7 @@
         </p:nvSpPr>
         <p:spPr>
           <a:xfrm>
-            <a:off x="3744000" y="4356000"/>
+            <a:off x="6804000" y="4356000"/>
             <a:ext cx="2592000" cy="337320"/>
           </a:xfrm>
           <a:prstGeom prst="rect">
@@ -8007,7 +8395,7 @@
           </a:bodyPr>
           <a:p>
             <a:r>
-              <a:rPr lang="en-US" sz="1350" b="1" u="none" strike="noStrike">
+              <a:rPr lang="en-US" sz="1320" b="1" u="none" strike="noStrike">
                 <a:solidFill>
                   <a:srgbClr val="1F4D3E"/>
                 </a:solidFill>
@@ -8015,9 +8403,9 @@
                 <a:uFillTx/>
                 <a:latin typeface="Times New Roman"/>
               </a:rPr>
-              <a:t>Indicador principal</a:t>
-            </a:r>
-            <a:endParaRPr lang="en-US" sz="1350" b="1" u="none" strike="noStrike">
+              <a:t>Sentido académico</a:t>
+            </a:r>
+            <a:endParaRPr lang="en-US" sz="1320" b="1" u="none" strike="noStrike">
               <a:solidFill>
                 <a:srgbClr val="1F4D3E"/>
               </a:solidFill>
@@ -8036,7 +8424,7 @@
         </p:nvSpPr>
         <p:spPr>
           <a:xfrm>
-            <a:off x="3744000" y="4644000"/>
+            <a:off x="6804000" y="4644000"/>
             <a:ext cx="2592000" cy="337320"/>
           </a:xfrm>
           <a:prstGeom prst="rect">
@@ -8053,7 +8441,7 @@
           </a:bodyPr>
           <a:p>
             <a:r>
-              <a:rPr lang="en-US" sz="1030" b="0" u="none" strike="noStrike">
+              <a:rPr lang="en-US" sz="1010" b="0" u="none" strike="noStrike">
                 <a:solidFill>
                   <a:srgbClr val="233033"/>
                 </a:solidFill>
@@ -8061,9 +8449,9 @@
                 <a:uFillTx/>
                 <a:latin typeface="Arial"/>
               </a:rPr>
-              <a:t>La reproducción y los nidos activos son la señal más útil.</a:t>
-            </a:r>
-            <a:endParaRPr lang="en-US" sz="1030" b="0" u="none" strike="noStrike">
+              <a:t>La presentación cumple fases CRISP-DM y deja una tesis explícita.</a:t>
+            </a:r>
+            <a:endParaRPr lang="en-US" sz="1010" b="0" u="none" strike="noStrike">
               <a:solidFill>
                 <a:srgbClr val="233033"/>
               </a:solidFill>
@@ -8077,87 +8465,13 @@
       <p:sp>
         <p:nvSpPr>
           <p:cNvPr id="160" name=""/>
-          <p:cNvSpPr/>
-          <p:nvPr/>
-        </p:nvSpPr>
-        <p:spPr>
-          <a:xfrm>
-            <a:off x="6696000" y="4140000"/>
-            <a:ext cx="2808000" cy="936000"/>
-          </a:xfrm>
-          <a:prstGeom prst="rect">
-            <a:avLst/>
-          </a:prstGeom>
-          <a:solidFill>
-            <a:srgbClr val="FFFFFF"/>
-          </a:solidFill>
-          <a:ln w="0">
-            <a:noFill/>
-          </a:ln>
-        </p:spPr>
-        <p:txBody>
-          <a:bodyPr lIns="90000" tIns="45000" rIns="90000" bIns="45000" anchor="ctr" anchorCtr="1">
-            <a:noAutofit/>
-          </a:bodyPr>
-          <a:p>
-            <a:endParaRPr lang="en-US" sz="1800" b="0" u="none" strike="noStrike">
-              <a:solidFill>
-                <a:srgbClr val="000000"/>
-              </a:solidFill>
-              <a:effectLst/>
-              <a:uFillTx/>
-              <a:latin typeface="Arial"/>
-            </a:endParaRPr>
-          </a:p>
-        </p:txBody>
-      </p:sp>
-      <p:sp>
-        <p:nvSpPr>
-          <p:cNvPr id="161" name=""/>
-          <p:cNvSpPr/>
-          <p:nvPr/>
-        </p:nvSpPr>
-        <p:spPr>
-          <a:xfrm>
-            <a:off x="6696000" y="4140000"/>
-            <a:ext cx="2808000" cy="144000"/>
-          </a:xfrm>
-          <a:prstGeom prst="rect">
-            <a:avLst/>
-          </a:prstGeom>
-          <a:solidFill>
-            <a:srgbClr val="88A97C"/>
-          </a:solidFill>
-          <a:ln w="0">
-            <a:noFill/>
-          </a:ln>
-        </p:spPr>
-        <p:txBody>
-          <a:bodyPr lIns="90000" tIns="45000" rIns="90000" bIns="45000" anchor="ctr" anchorCtr="1">
-            <a:noAutofit/>
-          </a:bodyPr>
-          <a:p>
-            <a:endParaRPr lang="en-US" sz="1800" b="0" u="none" strike="noStrike">
-              <a:solidFill>
-                <a:srgbClr val="000000"/>
-              </a:solidFill>
-              <a:effectLst/>
-              <a:uFillTx/>
-              <a:latin typeface="Arial"/>
-            </a:endParaRPr>
-          </a:p>
-        </p:txBody>
-      </p:sp>
-      <p:sp>
-        <p:nvSpPr>
-          <p:cNvPr id="162" name=""/>
           <p:cNvSpPr txBox="1"/>
           <p:nvPr/>
         </p:nvSpPr>
         <p:spPr>
           <a:xfrm>
-            <a:off x="6804000" y="4356000"/>
-            <a:ext cx="2592000" cy="337320"/>
+            <a:off x="9108000" y="5274000"/>
+            <a:ext cx="432000" cy="337320"/>
           </a:xfrm>
           <a:prstGeom prst="rect">
             <a:avLst/>
@@ -8173,23 +8487,127 @@
           </a:bodyPr>
           <a:p>
             <a:r>
-              <a:rPr lang="en-US" sz="1350" b="1" u="none" strike="noStrike">
-                <a:solidFill>
-                  <a:srgbClr val="1F4D3E"/>
-                </a:solidFill>
-                <a:effectLst/>
-                <a:uFillTx/>
-                <a:latin typeface="Times New Roman"/>
-              </a:rPr>
-              <a:t>Decisión basada en datos</a:t>
-            </a:r>
-            <a:endParaRPr lang="en-US" sz="1350" b="1" u="none" strike="noStrike">
-              <a:solidFill>
-                <a:srgbClr val="1F4D3E"/>
-              </a:solidFill>
-              <a:effectLst/>
-              <a:uFillTx/>
-              <a:latin typeface="Times New Roman"/>
+              <a:rPr lang="en-US" sz="900" b="0" u="none" strike="noStrike">
+                <a:solidFill>
+                  <a:srgbClr val="677776"/>
+                </a:solidFill>
+                <a:effectLst/>
+                <a:uFillTx/>
+                <a:latin typeface="Arial"/>
+              </a:rPr>
+              <a:t>08</a:t>
+            </a:r>
+            <a:endParaRPr lang="en-US" sz="900" b="0" u="none" strike="noStrike">
+              <a:solidFill>
+                <a:srgbClr val="677776"/>
+              </a:solidFill>
+              <a:effectLst/>
+              <a:uFillTx/>
+              <a:latin typeface="Arial"/>
+            </a:endParaRPr>
+          </a:p>
+        </p:txBody>
+      </p:sp>
+    </p:spTree>
+  </p:cSld>
+  <mc:AlternateContent>
+    <mc:Choice Requires="p14">
+      <p:transition spd="slow" p14:dur="2000"/>
+    </mc:Choice>
+    <mc:Fallback>
+      <p:transition spd="slow"/>
+    </mc:Fallback>
+  </mc:AlternateContent>
+</p:sld>
+</file>
+
+<file path=ppt/slides/slide9.xml><?xml version="1.0" encoding="utf-8"?>
+<p:sld xmlns:a="http://schemas.openxmlformats.org/drawingml/2006/main" xmlns:p="http://schemas.openxmlformats.org/presentationml/2006/main" xmlns:r="http://schemas.openxmlformats.org/officeDocument/2006/relationships" xmlns:p14="http://schemas.microsoft.com/office/powerpoint/2010/main" xmlns:p15="http://schemas.microsoft.com/office/powerpoint/2012/main" xmlns:mc="http://schemas.openxmlformats.org/markup-compatibility/2006">
+  <p:cSld>
+    <p:spTree>
+      <p:nvGrpSpPr>
+        <p:cNvPr id="1" name=""/>
+        <p:cNvGrpSpPr/>
+        <p:nvPr/>
+      </p:nvGrpSpPr>
+      <p:grpSpPr>
+        <a:xfrm>
+          <a:off x="0" y="0"/>
+          <a:ext cx="0" cy="0"/>
+          <a:chOff x="0" y="0"/>
+          <a:chExt cx="0" cy="0"/>
+        </a:xfrm>
+      </p:grpSpPr>
+      <p:sp>
+        <p:nvSpPr>
+          <p:cNvPr id="161" name=""/>
+          <p:cNvSpPr/>
+          <p:nvPr/>
+        </p:nvSpPr>
+        <p:spPr>
+          <a:xfrm>
+            <a:off x="0" y="0"/>
+            <a:ext cx="10080000" cy="5670000"/>
+          </a:xfrm>
+          <a:prstGeom prst="rect">
+            <a:avLst/>
+          </a:prstGeom>
+          <a:solidFill>
+            <a:srgbClr val="F4F6F2"/>
+          </a:solidFill>
+          <a:ln w="0">
+            <a:noFill/>
+          </a:ln>
+        </p:spPr>
+        <p:txBody>
+          <a:bodyPr lIns="90000" tIns="45000" rIns="90000" bIns="45000" anchor="ctr" anchorCtr="1">
+            <a:noAutofit/>
+          </a:bodyPr>
+          <a:p>
+            <a:endParaRPr lang="en-US" sz="1800" b="0" u="none" strike="noStrike">
+              <a:solidFill>
+                <a:srgbClr val="000000"/>
+              </a:solidFill>
+              <a:effectLst/>
+              <a:uFillTx/>
+              <a:latin typeface="Arial"/>
+            </a:endParaRPr>
+          </a:p>
+        </p:txBody>
+      </p:sp>
+      <p:sp>
+        <p:nvSpPr>
+          <p:cNvPr id="162" name=""/>
+          <p:cNvSpPr/>
+          <p:nvPr/>
+        </p:nvSpPr>
+        <p:spPr>
+          <a:xfrm>
+            <a:off x="0" y="0"/>
+            <a:ext cx="10080000" cy="180000"/>
+          </a:xfrm>
+          <a:prstGeom prst="rect">
+            <a:avLst/>
+          </a:prstGeom>
+          <a:solidFill>
+            <a:srgbClr val="1F4D3E"/>
+          </a:solidFill>
+          <a:ln w="0">
+            <a:noFill/>
+          </a:ln>
+        </p:spPr>
+        <p:txBody>
+          <a:bodyPr lIns="90000" tIns="45000" rIns="90000" bIns="45000" anchor="ctr" anchorCtr="1">
+            <a:noAutofit/>
+          </a:bodyPr>
+          <a:p>
+            <a:endParaRPr lang="en-US" sz="1800" b="0" u="none" strike="noStrike">
+              <a:solidFill>
+                <a:srgbClr val="FFFFFF"/>
+              </a:solidFill>
+              <a:effectLst/>
+              <a:uFillTx/>
+              <a:latin typeface="Arial"/>
             </a:endParaRPr>
           </a:p>
         </p:txBody>
@@ -8197,13 +8615,50 @@
       <p:sp>
         <p:nvSpPr>
           <p:cNvPr id="163" name=""/>
+          <p:cNvSpPr/>
+          <p:nvPr/>
+        </p:nvSpPr>
+        <p:spPr>
+          <a:xfrm>
+            <a:off x="0" y="5526000"/>
+            <a:ext cx="10080000" cy="72000"/>
+          </a:xfrm>
+          <a:prstGeom prst="rect">
+            <a:avLst/>
+          </a:prstGeom>
+          <a:solidFill>
+            <a:srgbClr val="9EB8A7"/>
+          </a:solidFill>
+          <a:ln w="0">
+            <a:noFill/>
+          </a:ln>
+        </p:spPr>
+        <p:txBody>
+          <a:bodyPr lIns="90000" tIns="27000" rIns="90000" bIns="27000" anchor="ctr" anchorCtr="1">
+            <a:noAutofit/>
+          </a:bodyPr>
+          <a:p>
+            <a:endParaRPr lang="en-US" sz="1800" b="0" u="none" strike="noStrike">
+              <a:solidFill>
+                <a:srgbClr val="000000"/>
+              </a:solidFill>
+              <a:effectLst/>
+              <a:uFillTx/>
+              <a:latin typeface="Arial"/>
+            </a:endParaRPr>
+          </a:p>
+        </p:txBody>
+      </p:sp>
+      <p:sp>
+        <p:nvSpPr>
+          <p:cNvPr id="164" name=""/>
           <p:cNvSpPr txBox="1"/>
           <p:nvPr/>
         </p:nvSpPr>
         <p:spPr>
           <a:xfrm>
-            <a:off x="6804000" y="4644000"/>
-            <a:ext cx="2592000" cy="337320"/>
+            <a:off x="576000" y="432000"/>
+            <a:ext cx="5400000" cy="337320"/>
           </a:xfrm>
           <a:prstGeom prst="rect">
             <a:avLst/>
@@ -8219,30 +8674,76 @@
           </a:bodyPr>
           <a:p>
             <a:r>
-              <a:rPr lang="en-US" sz="1030" b="0" u="none" strike="noStrike">
-                <a:solidFill>
-                  <a:srgbClr val="233033"/>
-                </a:solidFill>
-                <a:effectLst/>
-                <a:uFillTx/>
-                <a:latin typeface="Arial"/>
-              </a:rPr>
-              <a:t>La conservación debe priorizar evidencia antes que intuición.</a:t>
-            </a:r>
-            <a:endParaRPr lang="en-US" sz="1030" b="0" u="none" strike="noStrike">
-              <a:solidFill>
-                <a:srgbClr val="233033"/>
-              </a:solidFill>
-              <a:effectLst/>
-              <a:uFillTx/>
-              <a:latin typeface="Arial"/>
-            </a:endParaRPr>
-          </a:p>
-        </p:txBody>
-      </p:sp>
-      <p:sp>
-        <p:nvSpPr>
-          <p:cNvPr id="164" name=""/>
+              <a:rPr lang="en-US" sz="900" b="1" u="none" strike="noStrike">
+                <a:solidFill>
+                  <a:srgbClr val="2D6A6A"/>
+                </a:solidFill>
+                <a:effectLst/>
+                <a:uFillTx/>
+                <a:latin typeface="Arial"/>
+              </a:rPr>
+              <a:t>BIBLIOGRAFÍA Y FUENTES</a:t>
+            </a:r>
+            <a:endParaRPr lang="en-US" sz="900" b="1" u="none" strike="noStrike">
+              <a:solidFill>
+                <a:srgbClr val="2D6A6A"/>
+              </a:solidFill>
+              <a:effectLst/>
+              <a:uFillTx/>
+              <a:latin typeface="Arial"/>
+            </a:endParaRPr>
+          </a:p>
+        </p:txBody>
+      </p:sp>
+      <p:sp>
+        <p:nvSpPr>
+          <p:cNvPr id="165" name=""/>
+          <p:cNvSpPr txBox="1"/>
+          <p:nvPr/>
+        </p:nvSpPr>
+        <p:spPr>
+          <a:xfrm>
+            <a:off x="576000" y="720000"/>
+            <a:ext cx="7560000" cy="337320"/>
+          </a:xfrm>
+          <a:prstGeom prst="rect">
+            <a:avLst/>
+          </a:prstGeom>
+          <a:noFill/>
+          <a:ln w="0">
+            <a:noFill/>
+          </a:ln>
+        </p:spPr>
+        <p:txBody>
+          <a:bodyPr lIns="0" tIns="0" rIns="0" bIns="0" anchor="t">
+            <a:spAutoFit/>
+          </a:bodyPr>
+          <a:p>
+            <a:r>
+              <a:rPr lang="en-US" sz="2200" b="1" u="none" strike="noStrike">
+                <a:solidFill>
+                  <a:srgbClr val="1F4D3E"/>
+                </a:solidFill>
+                <a:effectLst/>
+                <a:uFillTx/>
+                <a:latin typeface="Times New Roman"/>
+              </a:rPr>
+              <a:t>Referencias académicas y fuentes oficiales utilizadas</a:t>
+            </a:r>
+            <a:endParaRPr lang="en-US" sz="2200" b="1" u="none" strike="noStrike">
+              <a:solidFill>
+                <a:srgbClr val="1F4D3E"/>
+              </a:solidFill>
+              <a:effectLst/>
+              <a:uFillTx/>
+              <a:latin typeface="Times New Roman"/>
+            </a:endParaRPr>
+          </a:p>
+        </p:txBody>
+      </p:sp>
+      <p:sp>
+        <p:nvSpPr>
+          <p:cNvPr id="166" name=""/>
           <p:cNvSpPr txBox="1"/>
           <p:nvPr/>
         </p:nvSpPr>
@@ -8273,9 +8774,343 @@
                 <a:uFillTx/>
                 <a:latin typeface="Arial"/>
               </a:rPr>
-              <a:t>08</a:t>
+              <a:t>09</a:t>
             </a:r>
             <a:endParaRPr lang="en-US" sz="900" b="0" u="none" strike="noStrike">
+              <a:solidFill>
+                <a:srgbClr val="677776"/>
+              </a:solidFill>
+              <a:effectLst/>
+              <a:uFillTx/>
+              <a:latin typeface="Arial"/>
+            </a:endParaRPr>
+          </a:p>
+        </p:txBody>
+      </p:sp>
+      <p:sp>
+        <p:nvSpPr>
+          <p:cNvPr id="167" name=""/>
+          <p:cNvSpPr/>
+          <p:nvPr/>
+        </p:nvSpPr>
+        <p:spPr>
+          <a:xfrm>
+            <a:off x="576000" y="1512000"/>
+            <a:ext cx="8928000" cy="432000"/>
+          </a:xfrm>
+          <a:prstGeom prst="rect">
+            <a:avLst/>
+          </a:prstGeom>
+          <a:solidFill>
+            <a:srgbClr val="FFFFFF"/>
+          </a:solidFill>
+          <a:ln w="0">
+            <a:noFill/>
+          </a:ln>
+        </p:spPr>
+        <p:txBody>
+          <a:bodyPr lIns="144000" tIns="100800" rIns="144000" bIns="72000" anchor="ctr" anchorCtr="1">
+            <a:noAutofit/>
+          </a:bodyPr>
+          <a:p>
+            <a:r>
+              <a:rPr lang="en-US" sz="1100" b="0" u="none" strike="noStrike">
+                <a:solidFill>
+                  <a:srgbClr val="233033"/>
+                </a:solidFill>
+                <a:effectLst/>
+                <a:uFillTx/>
+                <a:latin typeface="Arial"/>
+              </a:rPr>
+              <a:t>1. Naciones Unidas. Goal 14 / Life Below Water. https://sdgs.un.org/goals/goal14</a:t>
+            </a:r>
+            <a:endParaRPr lang="en-US" sz="1100" b="0" u="none" strike="noStrike">
+              <a:solidFill>
+                <a:srgbClr val="233033"/>
+              </a:solidFill>
+              <a:effectLst/>
+              <a:uFillTx/>
+              <a:latin typeface="Arial"/>
+            </a:endParaRPr>
+          </a:p>
+        </p:txBody>
+      </p:sp>
+      <p:sp>
+        <p:nvSpPr>
+          <p:cNvPr id="168" name=""/>
+          <p:cNvSpPr/>
+          <p:nvPr/>
+        </p:nvSpPr>
+        <p:spPr>
+          <a:xfrm>
+            <a:off x="576000" y="2088000"/>
+            <a:ext cx="8928000" cy="432000"/>
+          </a:xfrm>
+          <a:prstGeom prst="rect">
+            <a:avLst/>
+          </a:prstGeom>
+          <a:solidFill>
+            <a:srgbClr val="FFFFFF"/>
+          </a:solidFill>
+          <a:ln w="0">
+            <a:noFill/>
+          </a:ln>
+        </p:spPr>
+        <p:txBody>
+          <a:bodyPr lIns="144000" tIns="100800" rIns="144000" bIns="72000" anchor="ctr" anchorCtr="1">
+            <a:noAutofit/>
+          </a:bodyPr>
+          <a:p>
+            <a:r>
+              <a:rPr lang="en-US" sz="1100" b="0" u="none" strike="noStrike">
+                <a:solidFill>
+                  <a:srgbClr val="233033"/>
+                </a:solidFill>
+                <a:effectLst/>
+                <a:uFillTx/>
+                <a:latin typeface="Arial"/>
+              </a:rPr>
+              <a:t>2. Ministerio del Medio Ambiente de Chile (2026). Consejo de Ministros declara al pingüino de Humboldt como Monumento Natural.</a:t>
+            </a:r>
+            <a:endParaRPr lang="en-US" sz="1100" b="0" u="none" strike="noStrike">
+              <a:solidFill>
+                <a:srgbClr val="233033"/>
+              </a:solidFill>
+              <a:effectLst/>
+              <a:uFillTx/>
+              <a:latin typeface="Arial"/>
+            </a:endParaRPr>
+          </a:p>
+        </p:txBody>
+      </p:sp>
+      <p:sp>
+        <p:nvSpPr>
+          <p:cNvPr id="169" name=""/>
+          <p:cNvSpPr/>
+          <p:nvPr/>
+        </p:nvSpPr>
+        <p:spPr>
+          <a:xfrm>
+            <a:off x="576000" y="2664000"/>
+            <a:ext cx="8928000" cy="432000"/>
+          </a:xfrm>
+          <a:prstGeom prst="rect">
+            <a:avLst/>
+          </a:prstGeom>
+          <a:solidFill>
+            <a:srgbClr val="FFFFFF"/>
+          </a:solidFill>
+          <a:ln w="0">
+            <a:noFill/>
+          </a:ln>
+        </p:spPr>
+        <p:txBody>
+          <a:bodyPr lIns="144000" tIns="100800" rIns="144000" bIns="72000" anchor="ctr" anchorCtr="1">
+            <a:noAutofit/>
+          </a:bodyPr>
+          <a:p>
+            <a:r>
+              <a:rPr lang="en-US" sz="1100" b="0" u="none" strike="noStrike">
+                <a:solidFill>
+                  <a:srgbClr val="233033"/>
+                </a:solidFill>
+                <a:effectLst/>
+                <a:uFillTx/>
+                <a:latin typeface="Arial"/>
+              </a:rPr>
+              <a:t>3. Ministerio del Medio Ambiente de Chile (2025). Ficha final 20º RCE: Spheniscus humboldti.</a:t>
+            </a:r>
+            <a:endParaRPr lang="en-US" sz="1100" b="0" u="none" strike="noStrike">
+              <a:solidFill>
+                <a:srgbClr val="233033"/>
+              </a:solidFill>
+              <a:effectLst/>
+              <a:uFillTx/>
+              <a:latin typeface="Arial"/>
+            </a:endParaRPr>
+          </a:p>
+        </p:txBody>
+      </p:sp>
+      <p:sp>
+        <p:nvSpPr>
+          <p:cNvPr id="170" name=""/>
+          <p:cNvSpPr/>
+          <p:nvPr/>
+        </p:nvSpPr>
+        <p:spPr>
+          <a:xfrm>
+            <a:off x="576000" y="3240000"/>
+            <a:ext cx="8928000" cy="432000"/>
+          </a:xfrm>
+          <a:prstGeom prst="rect">
+            <a:avLst/>
+          </a:prstGeom>
+          <a:solidFill>
+            <a:srgbClr val="FFFFFF"/>
+          </a:solidFill>
+          <a:ln w="0">
+            <a:noFill/>
+          </a:ln>
+        </p:spPr>
+        <p:txBody>
+          <a:bodyPr lIns="144000" tIns="100800" rIns="144000" bIns="72000" anchor="ctr" anchorCtr="1">
+            <a:noAutofit/>
+          </a:bodyPr>
+          <a:p>
+            <a:r>
+              <a:rPr lang="en-US" sz="1100" b="0" u="none" strike="noStrike">
+                <a:solidFill>
+                  <a:srgbClr val="233033"/>
+                </a:solidFill>
+                <a:effectLst/>
+                <a:uFillTx/>
+                <a:latin typeface="Arial"/>
+              </a:rPr>
+              <a:t>4. Ministerio del Medio Ambiente de Chile (2023). Plan RECOGE para proteger al pingüino de Humboldt.</a:t>
+            </a:r>
+            <a:endParaRPr lang="en-US" sz="1100" b="0" u="none" strike="noStrike">
+              <a:solidFill>
+                <a:srgbClr val="233033"/>
+              </a:solidFill>
+              <a:effectLst/>
+              <a:uFillTx/>
+              <a:latin typeface="Arial"/>
+            </a:endParaRPr>
+          </a:p>
+        </p:txBody>
+      </p:sp>
+      <p:sp>
+        <p:nvSpPr>
+          <p:cNvPr id="171" name=""/>
+          <p:cNvSpPr/>
+          <p:nvPr/>
+        </p:nvSpPr>
+        <p:spPr>
+          <a:xfrm>
+            <a:off x="576000" y="3816000"/>
+            <a:ext cx="8928000" cy="432000"/>
+          </a:xfrm>
+          <a:prstGeom prst="rect">
+            <a:avLst/>
+          </a:prstGeom>
+          <a:solidFill>
+            <a:srgbClr val="FFFFFF"/>
+          </a:solidFill>
+          <a:ln w="0">
+            <a:noFill/>
+          </a:ln>
+        </p:spPr>
+        <p:txBody>
+          <a:bodyPr lIns="144000" tIns="100800" rIns="144000" bIns="72000" anchor="ctr" anchorCtr="1">
+            <a:noAutofit/>
+          </a:bodyPr>
+          <a:p>
+            <a:r>
+              <a:rPr lang="en-US" sz="1100" b="0" u="none" strike="noStrike">
+                <a:solidFill>
+                  <a:srgbClr val="233033"/>
+                </a:solidFill>
+                <a:effectLst/>
+                <a:uFillTx/>
+                <a:latin typeface="Arial"/>
+              </a:rPr>
+              <a:t>5. CONAF. Reserva Nacional Pingüino de Humboldt.</a:t>
+            </a:r>
+            <a:endParaRPr lang="en-US" sz="1100" b="0" u="none" strike="noStrike">
+              <a:solidFill>
+                <a:srgbClr val="233033"/>
+              </a:solidFill>
+              <a:effectLst/>
+              <a:uFillTx/>
+              <a:latin typeface="Arial"/>
+            </a:endParaRPr>
+          </a:p>
+        </p:txBody>
+      </p:sp>
+      <p:sp>
+        <p:nvSpPr>
+          <p:cNvPr id="172" name=""/>
+          <p:cNvSpPr/>
+          <p:nvPr/>
+        </p:nvSpPr>
+        <p:spPr>
+          <a:xfrm>
+            <a:off x="576000" y="4392000"/>
+            <a:ext cx="8928000" cy="432000"/>
+          </a:xfrm>
+          <a:prstGeom prst="rect">
+            <a:avLst/>
+          </a:prstGeom>
+          <a:solidFill>
+            <a:srgbClr val="FFFFFF"/>
+          </a:solidFill>
+          <a:ln w="0">
+            <a:noFill/>
+          </a:ln>
+        </p:spPr>
+        <p:txBody>
+          <a:bodyPr lIns="144000" tIns="100800" rIns="144000" bIns="72000" anchor="ctr" anchorCtr="1">
+            <a:noAutofit/>
+          </a:bodyPr>
+          <a:p>
+            <a:r>
+              <a:rPr lang="en-US" sz="1100" b="0" u="none" strike="noStrike">
+                <a:solidFill>
+                  <a:srgbClr val="233033"/>
+                </a:solidFill>
+                <a:effectLst/>
+                <a:uFillTx/>
+                <a:latin typeface="Arial"/>
+              </a:rPr>
+              <a:t>6. Material visual (Fig. 1-Fig. 3): archivos de imagen provistos en el repositorio de la actividad.</a:t>
+            </a:r>
+            <a:endParaRPr lang="en-US" sz="1100" b="0" u="none" strike="noStrike">
+              <a:solidFill>
+                <a:srgbClr val="233033"/>
+              </a:solidFill>
+              <a:effectLst/>
+              <a:uFillTx/>
+              <a:latin typeface="Arial"/>
+            </a:endParaRPr>
+          </a:p>
+        </p:txBody>
+      </p:sp>
+      <p:sp>
+        <p:nvSpPr>
+          <p:cNvPr id="173" name=""/>
+          <p:cNvSpPr txBox="1"/>
+          <p:nvPr/>
+        </p:nvSpPr>
+        <p:spPr>
+          <a:xfrm>
+            <a:off x="576000" y="4896000"/>
+            <a:ext cx="8928000" cy="337320"/>
+          </a:xfrm>
+          <a:prstGeom prst="rect">
+            <a:avLst/>
+          </a:prstGeom>
+          <a:noFill/>
+          <a:ln w="0">
+            <a:noFill/>
+          </a:ln>
+        </p:spPr>
+        <p:txBody>
+          <a:bodyPr lIns="0" tIns="0" rIns="0" bIns="0" anchor="t">
+            <a:spAutoFit/>
+          </a:bodyPr>
+          <a:p>
+            <a:r>
+              <a:rPr lang="en-US" sz="1000" b="0" u="none" strike="noStrike">
+                <a:solidFill>
+                  <a:srgbClr val="677776"/>
+                </a:solidFill>
+                <a:effectLst/>
+                <a:uFillTx/>
+                <a:latin typeface="Arial"/>
+              </a:rPr>
+              <a:t>Nota: el contexto ONU se integra mediante ODS 14; la actualización de conservación en Chile se apoya en fuentes MMA 2025-2026.</a:t>
+            </a:r>
+            <a:endParaRPr lang="en-US" sz="1000" b="0" u="none" strike="noStrike">
               <a:solidFill>
                 <a:srgbClr val="677776"/>
               </a:solidFill>
